--- a/MACE_Agentic_Discovery_v2.pptx
+++ b/MACE_Agentic_Discovery_v2.pptx
@@ -15,8 +15,8 @@
     <p:sldId id="262" r:id="rId6"/>
     <p:sldId id="267" r:id="rId14"/>
     <p:sldId id="265" r:id="rId7"/>
+    <p:sldId id="268" r:id="rId15"/>
     <p:sldId id="266" r:id="rId8"/>
-    <p:sldId id="268" r:id="rId15"/>
     <p:sldId id="269" r:id="rId16"/>
     <p:sldId id="270" r:id="rId17"/>
     <p:sldId id="271" r:id="rId18"/>
@@ -24,6 +24,7 @@
     <p:sldId id="273" r:id="rId20"/>
     <p:sldId id="274" r:id="rId21"/>
     <p:sldId id="275" r:id="rId22"/>
+    <p:sldId id="276" r:id="rId23"/>
   </p:sldIdLst>
   <p:sldSz cx="12192000" cy="6858000"/>
   <p:notesSz cx="6858000" cy="9144000"/>
@@ -1248,7 +1249,7 @@
           <a:lstStyle/>
           <a:p>
             <a:r>
-              <a:t>Backup: the three design principles every machine-learned potential shares, and where MACE sits in the lineage.</a:t>
+              <a:t>Backup: DFT for a non-specialist. What it is, why we trust it, and the three reasons it cannot sit inside a search loop.</a:t>
             </a:r>
           </a:p>
         </p:txBody>
@@ -1294,7 +1295,7 @@
           <a:lstStyle/>
           <a:p>
             <a:r>
-              <a:t>Backup: the mental model. Graph, messages, products for many-body information, two layers, readout, differentiate for forces.</a:t>
+              <a:t>Backup: the three design principles every machine-learned potential shares, and where MACE sits in the lineage.</a:t>
             </a:r>
           </a:p>
         </p:txBody>
@@ -1340,7 +1341,7 @@
           <a:lstStyle/>
           <a:p>
             <a:r>
-              <a:t>Backup: invariance (scalars stay the same) vs equivariance (vectors transform along). MACE's features are equivariant by construction.</a:t>
+              <a:t>Backup: the mental model. Graph, messages, products for many-body information, two layers, readout, differentiate for forces.</a:t>
             </a:r>
           </a:p>
         </p:txBody>
@@ -1386,7 +1387,7 @@
           <a:lstStyle/>
           <a:p>
             <a:r>
-              <a:t>Backup: the four equations. Sum of atomic energies; two-body collection; products for many-body terms (ACE); update, read out, differentiate.</a:t>
+              <a:t>Backup: invariance (scalars stay the same) vs equivariance (vectors transform along). MACE's features are equivariant by construction.</a:t>
             </a:r>
           </a:p>
         </p:txBody>
@@ -1432,7 +1433,7 @@
           <a:lstStyle/>
           <a:p>
             <a:r>
-              <a:t>Backup: the quantitative result. Use when asked 'why fine-tune at all' or 'how good is it'.</a:t>
+              <a:t>Backup: the four equations. Sum of atomic energies; two-body collection; products for many-body terms (ACE); update, read out, differentiate.</a:t>
             </a:r>
           </a:p>
         </p:txBody>
@@ -1478,7 +1479,7 @@
           <a:lstStyle/>
           <a:p>
             <a:r>
-              <a:t>Backup: the system is real and the answer is known, which is why the audience can judge the result.</a:t>
+              <a:t>Backup: the quantitative result. Use when asked 'why fine-tune at all' or 'how good is it'.</a:t>
             </a:r>
           </a:p>
         </p:txBody>
@@ -1524,6 +1525,52 @@
           <a:lstStyle/>
           <a:p>
             <a:r>
+              <a:t>Backup: the system is real and the answer is known, which is why the audience can judge the result.</a:t>
+            </a:r>
+          </a:p>
+        </p:txBody>
+      </p:sp>
+    </p:spTree>
+  </p:cSld>
+  <p:clrMapOvr>
+    <a:masterClrMapping/>
+  </p:clrMapOvr>
+</p:notes>
+</file>
+
+<file path=ppt/notesSlides/notesSlide17.xml><?xml version="1.0" encoding="utf-8"?>
+<p:notes xmlns:a="http://schemas.openxmlformats.org/drawingml/2006/main" xmlns:p="http://schemas.openxmlformats.org/presentationml/2006/main" xmlns:r="http://schemas.openxmlformats.org/officeDocument/2006/relationships">
+  <p:cSld>
+    <p:spTree>
+      <p:nvGrpSpPr>
+        <p:cNvPr id="1" name=""/>
+        <p:cNvGrpSpPr/>
+        <p:nvPr/>
+      </p:nvGrpSpPr>
+      <p:grpSpPr>
+        <a:xfrm>
+          <a:off x="0" y="0"/>
+          <a:ext cx="0" cy="0"/>
+          <a:chOff x="0" y="0"/>
+          <a:chExt cx="0" cy="0"/>
+        </a:xfrm>
+      </p:grpSpPr>
+      <p:sp>
+        <p:nvSpPr>
+          <p:cNvPr id="3" name="Notes Placeholder 2"/>
+          <p:cNvSpPr>
+            <a:spLocks noGrp="1"/>
+          </p:cNvSpPr>
+          <p:nvPr>
+            <p:ph type="body" sz="quarter" idx="3"/>
+          </p:nvPr>
+        </p:nvSpPr>
+        <p:spPr/>
+        <p:txBody>
+          <a:bodyPr/>
+          <a:lstStyle/>
+          <a:p>
+            <a:r>
               <a:t>Backup: what was computed and why each group exists.</a:t>
             </a:r>
           </a:p>
@@ -2036,7 +2083,7 @@
           <a:lstStyle/>
           <a:p>
             <a:r>
-              <a:t>Backup: DFT for a non-specialist. What it is, why we trust it, and the three reasons it cannot sit inside a search loop.</a:t>
+              <a:t>[8:00-8:40] Everything you just saw transfers. Tungsten is the wall material of a fusion reactor; what decides whether it survives is radiation damage — a million atoms, nanoseconds. DFT scales as N cubed: minutes for our 8-atom cell, hours for a hundred atoms, never for a cascade. The learned potential scales linearly: a cascade is hours on a GPU. Same four blocks: fine-tune on a few hundred DFT cells, test on held-out defects, search and simulate with MACE, verify the uncertain cases with DFT.</a:t>
             </a:r>
           </a:p>
         </p:txBody>
@@ -5239,7 +5286,7 @@
                 </a:solidFill>
                 <a:latin typeface="Arial"/>
               </a:rPr>
-              <a:t>BACKUP · LEARNED POTENTIALS</a:t>
+              <a:t>BACKUP · THE SIMULATOR</a:t>
             </a:r>
           </a:p>
         </p:txBody>
@@ -5274,7 +5321,7 @@
                 </a:solidFill>
                 <a:latin typeface="Arial"/>
               </a:rPr>
-              <a:t>From DFT to a learned potential</a:t>
+              <a:t>DFT in one slide</a:t>
             </a:r>
           </a:p>
         </p:txBody>
@@ -5309,7 +5356,7 @@
                 </a:solidFill>
                 <a:latin typeface="Arial"/>
               </a:rPr>
-              <a:t>Treat the energy as a regression target — with three physics constraints built in</a:t>
+              <a:t>The slow, trusted physics calculation that produced our labels</a:t>
             </a:r>
           </a:p>
         </p:txBody>
@@ -5344,7 +5391,7 @@
                 </a:solidFill>
                 <a:latin typeface="Arial"/>
               </a:rPr>
-              <a:t>13</a:t>
+              <a:t>12</a:t>
             </a:r>
           </a:p>
         </p:txBody>
@@ -5358,7 +5405,7 @@
         <p:spPr>
           <a:xfrm>
             <a:off x="548640" y="1783080"/>
-            <a:ext cx="3611880" cy="2514600"/>
+            <a:ext cx="3611880" cy="3429000"/>
           </a:xfrm>
           <a:prstGeom prst="roundRect">
             <a:avLst>
@@ -5443,7 +5490,7 @@
                 </a:solidFill>
                 <a:latin typeface="Cambria Math"/>
               </a:rPr>
-              <a:t>Σ</a:t>
+              <a:t>ψ</a:t>
             </a:r>
           </a:p>
         </p:txBody>
@@ -5478,7 +5525,7 @@
                 </a:solidFill>
                 <a:latin typeface="Arial"/>
               </a:rPr>
-              <a:t>Locality</a:t>
+              <a:t>What it is</a:t>
             </a:r>
           </a:p>
         </p:txBody>
@@ -5492,7 +5539,7 @@
         <p:spPr>
           <a:xfrm>
             <a:off x="777240" y="3108960"/>
-            <a:ext cx="3154680" cy="1097280"/>
+            <a:ext cx="3154680" cy="2011679"/>
           </a:xfrm>
           <a:prstGeom prst="rect">
             <a:avLst/>
@@ -5507,25 +5554,37 @@
           <a:p>
             <a:pPr algn="l"/>
             <a:r>
-              <a:rPr sz="1250" b="0" i="0">
+              <a:rPr sz="1150" b="0" i="0">
                 <a:solidFill>
                   <a:srgbClr val="64748B"/>
                 </a:solidFill>
                 <a:latin typeface="Arial"/>
               </a:rPr>
-              <a:t>Total energy is a sum of atomic energies, each depending only on neighbours within a cut-off (MACE: 6 Å).</a:t>
+              <a:t>Electrons obey the Schrödinger equation — unsolvable directly beyond a few electrons.</a:t>
             </a:r>
           </a:p>
           <a:p>
             <a:pPr algn="l"/>
             <a:r>
-              <a:rPr sz="1250" b="0" i="0">
+              <a:rPr sz="1150" b="0" i="0">
                 <a:solidFill>
                   <a:srgbClr val="64748B"/>
                 </a:solidFill>
                 <a:latin typeface="Arial"/>
               </a:rPr>
-              <a:t>This is why a model trained on 4- and 8-atom cells works on any size, and why cost is linear in N.</a:t>
+              <a:t>Density functional theory (Kohn, Nobel 1998) rewrites it in terms of the electron density — three coordinates instead of 3N — solved iteratively (the SCF loop).</a:t>
+            </a:r>
+          </a:p>
+          <a:p>
+            <a:pPr algn="l"/>
+            <a:r>
+              <a:rPr sz="1150" b="0" i="0">
+                <a:solidFill>
+                  <a:srgbClr val="64748B"/>
+                </a:solidFill>
+                <a:latin typeface="Arial"/>
+              </a:rPr>
+              <a:t>One approximation: the exchange–correlation functional. We use PBE, the standard for solids.</a:t>
             </a:r>
           </a:p>
         </p:txBody>
@@ -5539,7 +5598,7 @@
         <p:spPr>
           <a:xfrm>
             <a:off x="4279392" y="1783080"/>
-            <a:ext cx="3611880" cy="2514600"/>
+            <a:ext cx="3611880" cy="3429000"/>
           </a:xfrm>
           <a:prstGeom prst="roundRect">
             <a:avLst>
@@ -5624,7 +5683,7 @@
                 </a:solidFill>
                 <a:latin typeface="Cambria Math"/>
               </a:rPr>
-              <a:t>⟳</a:t>
+              <a:t>✓</a:t>
             </a:r>
           </a:p>
         </p:txBody>
@@ -5659,7 +5718,7 @@
                 </a:solidFill>
                 <a:latin typeface="Arial"/>
               </a:rPr>
-              <a:t>Symmetry</a:t>
+              <a:t>Why it is trusted</a:t>
             </a:r>
           </a:p>
         </p:txBody>
@@ -5673,7 +5732,7 @@
         <p:spPr>
           <a:xfrm>
             <a:off x="4507992" y="3108960"/>
-            <a:ext cx="3154680" cy="1097280"/>
+            <a:ext cx="3154680" cy="2011679"/>
           </a:xfrm>
           <a:prstGeom prst="rect">
             <a:avLst/>
@@ -5688,25 +5747,37 @@
           <a:p>
             <a:pPr algn="l"/>
             <a:r>
-              <a:rPr sz="1250" b="0" i="0">
+              <a:rPr sz="1150" b="0" i="0">
                 <a:solidFill>
                   <a:srgbClr val="64748B"/>
                 </a:solidFill>
                 <a:latin typeface="Arial"/>
               </a:rPr>
-              <a:t>Translate, rotate or relabel identical atoms: the energy must not change; forces must rotate along.</a:t>
+              <a:t>First principles: inputs are atomic numbers and positions; nothing fitted to experiment for the system at hand.</a:t>
             </a:r>
           </a:p>
           <a:p>
             <a:pPr algn="l"/>
             <a:r>
-              <a:rPr sz="1250" b="0" i="0">
+              <a:rPr sz="1150" b="0" i="0">
                 <a:solidFill>
                   <a:srgbClr val="64748B"/>
                 </a:solidFill>
                 <a:latin typeface="Arial"/>
               </a:rPr>
-              <a:t>Built into the architecture, not learned from data.</a:t>
+              <a:t>Lattice constants within 1–2 %, formation energies to tens of meV/atom, forces for free (Hellmann–Feynman).</a:t>
+            </a:r>
+          </a:p>
+          <a:p>
+            <a:pPr algn="l"/>
+            <a:r>
+              <a:rPr sz="1150" b="0" i="0">
+                <a:solidFill>
+                  <a:srgbClr val="64748B"/>
+                </a:solidFill>
+                <a:latin typeface="Arial"/>
+              </a:rPr>
+              <a:t>Ours: Cu 3.65 Å, Au 4.18 Å (experiment 3.61 / 4.08).</a:t>
             </a:r>
           </a:p>
         </p:txBody>
@@ -5720,56 +5791,12 @@
         <p:spPr>
           <a:xfrm>
             <a:off x="8010144" y="1783080"/>
-            <a:ext cx="3611880" cy="2514600"/>
+            <a:ext cx="3611880" cy="3429000"/>
           </a:xfrm>
           <a:prstGeom prst="roundRect">
             <a:avLst>
               <a:gd name="adj" fmla="val 8000"/>
             </a:avLst>
-          </a:prstGeom>
-          <a:solidFill>
-            <a:srgbClr val="F5F1F1"/>
-          </a:solidFill>
-          <a:ln>
-            <a:noFill/>
-          </a:ln>
-          <a:effectLst/>
-        </p:spPr>
-        <p:style>
-          <a:lnRef idx="1">
-            <a:schemeClr val="accent1"/>
-          </a:lnRef>
-          <a:fillRef idx="3">
-            <a:schemeClr val="accent1"/>
-          </a:fillRef>
-          <a:effectRef idx="2">
-            <a:schemeClr val="accent1"/>
-          </a:effectRef>
-          <a:fontRef idx="minor">
-            <a:schemeClr val="lt1"/>
-          </a:fontRef>
-        </p:style>
-        <p:txBody>
-          <a:bodyPr rtlCol="0" anchor="ctr"/>
-          <a:lstStyle/>
-          <a:p>
-            <a:pPr algn="ctr"/>
-          </a:p>
-        </p:txBody>
-      </p:sp>
-      <p:sp>
-        <p:nvSpPr>
-          <p:cNvPr id="15" name="Oval 14"/>
-          <p:cNvSpPr/>
-          <p:nvPr/>
-        </p:nvSpPr>
-        <p:spPr>
-          <a:xfrm>
-            <a:off x="8238744" y="1984248"/>
-            <a:ext cx="502920" cy="502920"/>
-          </a:xfrm>
-          <a:prstGeom prst="ellipse">
-            <a:avLst/>
           </a:prstGeom>
           <a:solidFill>
             <a:srgbClr val="500000"/>
@@ -5794,157 +5821,29 @@
           </a:fontRef>
         </p:style>
         <p:txBody>
-          <a:bodyPr rtlCol="0" anchor="ctr" lIns="0" rIns="0" tIns="0" bIns="0"/>
+          <a:bodyPr rtlCol="0" anchor="ctr"/>
           <a:lstStyle/>
           <a:p>
             <a:pPr algn="ctr"/>
-            <a:r>
-              <a:rPr sz="1300" b="1">
-                <a:solidFill>
-                  <a:srgbClr val="FFFFFF"/>
-                </a:solidFill>
-                <a:latin typeface="Cambria Math"/>
-              </a:rPr>
-              <a:t>∇</a:t>
-            </a:r>
-          </a:p>
-        </p:txBody>
-      </p:sp>
-      <p:sp>
-        <p:nvSpPr>
-          <p:cNvPr id="16" name="TextBox 15"/>
-          <p:cNvSpPr txBox="1"/>
-          <p:nvPr/>
-        </p:nvSpPr>
-        <p:spPr>
-          <a:xfrm>
-            <a:off x="8238744" y="2651760"/>
-            <a:ext cx="3154680" cy="411480"/>
-          </a:xfrm>
-          <a:prstGeom prst="rect">
-            <a:avLst/>
-          </a:prstGeom>
-          <a:noFill/>
-        </p:spPr>
-        <p:txBody>
-          <a:bodyPr wrap="square" anchor="t" lIns="45720" rIns="45720" tIns="18288" bIns="18288">
-            <a:spAutoFit/>
-          </a:bodyPr>
-          <a:lstStyle/>
-          <a:p>
-            <a:pPr algn="l"/>
-            <a:r>
-              <a:rPr sz="1600" b="1" i="0">
-                <a:solidFill>
-                  <a:srgbClr val="1E293B"/>
-                </a:solidFill>
-                <a:latin typeface="Arial"/>
-              </a:rPr>
-              <a:t>Forces by differentiation</a:t>
-            </a:r>
-          </a:p>
-        </p:txBody>
-      </p:sp>
-      <p:sp>
-        <p:nvSpPr>
-          <p:cNvPr id="17" name="TextBox 16"/>
-          <p:cNvSpPr txBox="1"/>
-          <p:nvPr/>
-        </p:nvSpPr>
-        <p:spPr>
-          <a:xfrm>
-            <a:off x="8238744" y="3108960"/>
-            <a:ext cx="3154680" cy="1097280"/>
-          </a:xfrm>
-          <a:prstGeom prst="rect">
-            <a:avLst/>
-          </a:prstGeom>
-          <a:noFill/>
-        </p:spPr>
-        <p:txBody>
-          <a:bodyPr wrap="square" anchor="t" lIns="45720" rIns="45720" tIns="18288" bIns="18288">
-            <a:spAutoFit/>
-          </a:bodyPr>
-          <a:lstStyle/>
-          <a:p>
-            <a:pPr algn="l"/>
-            <a:r>
-              <a:rPr sz="1250" b="0" i="0">
-                <a:solidFill>
-                  <a:srgbClr val="64748B"/>
-                </a:solidFill>
-                <a:latin typeface="Arial"/>
-              </a:rPr>
-              <a:t>F = −∂E/∂r, computed exactly by automatic differentiation.</a:t>
-            </a:r>
-          </a:p>
-          <a:p>
-            <a:pPr algn="l"/>
-            <a:r>
-              <a:rPr sz="1250" b="0" i="0">
-                <a:solidFill>
-                  <a:srgbClr val="64748B"/>
-                </a:solidFill>
-                <a:latin typeface="Arial"/>
-              </a:rPr>
-              <a:t>Energy-conserving by construction, and every DFT structure gives 3N force labels — most of the training signal.</a:t>
-            </a:r>
-          </a:p>
-        </p:txBody>
-      </p:sp>
-      <p:sp>
-        <p:nvSpPr>
-          <p:cNvPr id="18" name="TextBox 17"/>
-          <p:cNvSpPr txBox="1"/>
-          <p:nvPr/>
-        </p:nvSpPr>
-        <p:spPr>
-          <a:xfrm>
-            <a:off x="548640" y="4526280"/>
-            <a:ext cx="11064240" cy="274320"/>
-          </a:xfrm>
-          <a:prstGeom prst="rect">
-            <a:avLst/>
-          </a:prstGeom>
-          <a:noFill/>
-        </p:spPr>
-        <p:txBody>
-          <a:bodyPr wrap="square" anchor="t" lIns="45720" rIns="45720" tIns="18288" bIns="18288">
-            <a:spAutoFit/>
-          </a:bodyPr>
-          <a:lstStyle/>
-          <a:p>
-            <a:pPr algn="l"/>
-            <a:r>
-              <a:rPr sz="1100" b="1" i="0">
-                <a:solidFill>
-                  <a:srgbClr val="B87878"/>
-                </a:solidFill>
-                <a:latin typeface="Arial"/>
-              </a:rPr>
-              <a:t>LINEAGE</a:t>
-            </a:r>
-          </a:p>
-        </p:txBody>
-      </p:sp>
-      <p:sp>
-        <p:nvSpPr>
-          <p:cNvPr id="19" name="Rounded Rectangle 18"/>
+          </a:p>
+        </p:txBody>
+      </p:sp>
+      <p:sp>
+        <p:nvSpPr>
+          <p:cNvPr id="15" name="Oval 14"/>
           <p:cNvSpPr/>
           <p:nvPr/>
         </p:nvSpPr>
         <p:spPr>
           <a:xfrm>
-            <a:off x="548640" y="4846320"/>
-            <a:ext cx="2066543" cy="1143000"/>
-          </a:xfrm>
-          <a:prstGeom prst="roundRect">
-            <a:avLst>
-              <a:gd name="adj" fmla="val 8000"/>
-            </a:avLst>
+            <a:off x="8238744" y="1984248"/>
+            <a:ext cx="502920" cy="502920"/>
+          </a:xfrm>
+          <a:prstGeom prst="ellipse">
+            <a:avLst/>
           </a:prstGeom>
           <a:solidFill>
-            <a:srgbClr val="F5F1F1"/>
+            <a:srgbClr val="FFFFFF"/>
           </a:solidFill>
           <a:ln>
             <a:noFill/>
@@ -5966,23 +5865,32 @@
           </a:fontRef>
         </p:style>
         <p:txBody>
-          <a:bodyPr rtlCol="0" anchor="ctr"/>
+          <a:bodyPr rtlCol="0" anchor="ctr" lIns="0" rIns="0" tIns="0" bIns="0"/>
           <a:lstStyle/>
           <a:p>
             <a:pPr algn="ctr"/>
-          </a:p>
-        </p:txBody>
-      </p:sp>
-      <p:sp>
-        <p:nvSpPr>
-          <p:cNvPr id="20" name="TextBox 19"/>
+            <a:r>
+              <a:rPr sz="1300" b="1">
+                <a:solidFill>
+                  <a:srgbClr val="500000"/>
+                </a:solidFill>
+                <a:latin typeface="Cambria Math"/>
+              </a:rPr>
+              <a:t>N³</a:t>
+            </a:r>
+          </a:p>
+        </p:txBody>
+      </p:sp>
+      <p:sp>
+        <p:nvSpPr>
+          <p:cNvPr id="16" name="TextBox 15"/>
           <p:cNvSpPr txBox="1"/>
           <p:nvPr/>
         </p:nvSpPr>
         <p:spPr>
           <a:xfrm>
-            <a:off x="685800" y="4919472"/>
-            <a:ext cx="1828800" cy="274320"/>
+            <a:off x="8238744" y="2651760"/>
+            <a:ext cx="3154680" cy="411480"/>
           </a:xfrm>
           <a:prstGeom prst="rect">
             <a:avLst/>
@@ -5997,27 +5905,27 @@
           <a:p>
             <a:pPr algn="l"/>
             <a:r>
-              <a:rPr sz="1100" b="1" i="0">
-                <a:solidFill>
-                  <a:srgbClr val="B87878"/>
-                </a:solidFill>
-                <a:latin typeface="Arial"/>
-              </a:rPr>
-              <a:t>2007</a:t>
-            </a:r>
-          </a:p>
-        </p:txBody>
-      </p:sp>
-      <p:sp>
-        <p:nvSpPr>
-          <p:cNvPr id="21" name="TextBox 20"/>
+              <a:rPr sz="1600" b="1" i="0">
+                <a:solidFill>
+                  <a:srgbClr val="FFFFFF"/>
+                </a:solidFill>
+                <a:latin typeface="Arial"/>
+              </a:rPr>
+              <a:t>Why not inside the loop</a:t>
+            </a:r>
+          </a:p>
+        </p:txBody>
+      </p:sp>
+      <p:sp>
+        <p:nvSpPr>
+          <p:cNvPr id="17" name="TextBox 16"/>
           <p:cNvSpPr txBox="1"/>
           <p:nvPr/>
         </p:nvSpPr>
         <p:spPr>
           <a:xfrm>
-            <a:off x="685800" y="5166360"/>
-            <a:ext cx="1828800" cy="320040"/>
+            <a:off x="8238744" y="3108960"/>
+            <a:ext cx="3154680" cy="2011679"/>
           </a:xfrm>
           <a:prstGeom prst="rect">
             <a:avLst/>
@@ -6032,98 +5940,51 @@
           <a:p>
             <a:pPr algn="l"/>
             <a:r>
-              <a:rPr sz="1500" b="1" i="0">
-                <a:solidFill>
-                  <a:srgbClr val="1E293B"/>
-                </a:solidFill>
-                <a:latin typeface="Arial"/>
-              </a:rPr>
-              <a:t>Behler–Parrinello</a:t>
-            </a:r>
-          </a:p>
-        </p:txBody>
-      </p:sp>
-      <p:sp>
-        <p:nvSpPr>
-          <p:cNvPr id="22" name="TextBox 21"/>
-          <p:cNvSpPr txBox="1"/>
-          <p:nvPr/>
-        </p:nvSpPr>
-        <p:spPr>
-          <a:xfrm>
-            <a:off x="685800" y="5486400"/>
-            <a:ext cx="1828800" cy="457200"/>
-          </a:xfrm>
-          <a:prstGeom prst="rect">
-            <a:avLst/>
-          </a:prstGeom>
-          <a:noFill/>
-        </p:spPr>
-        <p:txBody>
-          <a:bodyPr wrap="square" anchor="t" lIns="45720" rIns="45720" tIns="18288" bIns="18288">
-            <a:spAutoFit/>
-          </a:bodyPr>
-          <a:lstStyle/>
+              <a:rPr sz="1150" b="0" i="0">
+                <a:solidFill>
+                  <a:srgbClr val="E3C4C4"/>
+                </a:solidFill>
+                <a:latin typeface="Arial"/>
+              </a:rPr>
+              <a:t>Cost grows as N³ in the electrons: minutes for 8 atoms, hours for 100, impossible for a million-step simulation.</a:t>
+            </a:r>
+          </a:p>
           <a:p>
             <a:pPr algn="l"/>
             <a:r>
-              <a:rPr sz="1100" b="0" i="0">
-                <a:solidFill>
-                  <a:srgbClr val="64748B"/>
-                </a:solidFill>
-                <a:latin typeface="Arial"/>
-              </a:rPr>
-              <a:t>atomic energies + neural nets</a:t>
-            </a:r>
-          </a:p>
-        </p:txBody>
-      </p:sp>
-      <p:cxnSp>
-        <p:nvCxnSpPr>
-          <p:cNvPr id="23" name="Connector 22"/>
-          <p:cNvCxnSpPr/>
-          <p:nvPr/>
-        </p:nvCxnSpPr>
-        <p:spPr>
-          <a:xfrm>
-            <a:off x="2615184" y="5413248"/>
-            <a:ext cx="182880" cy="0"/>
-          </a:xfrm>
-          <a:prstGeom prst="line">
-            <a:avLst/>
-          </a:prstGeom>
-          <a:ln w="19050">
-            <a:solidFill>
-              <a:srgbClr val="94A3B8"/>
-            </a:solidFill>
-            <a:tailEnd type="triangle" w="med" len="med"/>
-          </a:ln>
-        </p:spPr>
-        <p:style>
-          <a:lnRef idx="2">
-            <a:schemeClr val="accent1"/>
-          </a:lnRef>
-          <a:fillRef idx="0">
-            <a:schemeClr val="accent1"/>
-          </a:fillRef>
-          <a:effectRef idx="1">
-            <a:schemeClr val="accent1"/>
-          </a:effectRef>
-          <a:fontRef idx="minor">
-            <a:schemeClr val="tx1"/>
-          </a:fontRef>
-        </p:style>
-      </p:cxnSp>
-      <p:sp>
-        <p:nvSpPr>
-          <p:cNvPr id="24" name="Rounded Rectangle 23"/>
+              <a:rPr sz="1150" b="0" i="0">
+                <a:solidFill>
+                  <a:srgbClr val="E3C4C4"/>
+                </a:solidFill>
+                <a:latin typeface="Arial"/>
+              </a:rPr>
+              <a:t>Known systematic errors — PBE underbinds Cu–Au by ~30 %. The learned model inherits them.</a:t>
+            </a:r>
+          </a:p>
+          <a:p>
+            <a:pPr algn="l"/>
+            <a:r>
+              <a:rPr sz="1150" b="0" i="0">
+                <a:solidFill>
+                  <a:srgbClr val="E3C4C4"/>
+                </a:solidFill>
+                <a:latin typeface="Arial"/>
+              </a:rPr>
+              <a:t>Zero kelvin: temperature needs many more evaluations.</a:t>
+            </a:r>
+          </a:p>
+        </p:txBody>
+      </p:sp>
+      <p:sp>
+        <p:nvSpPr>
+          <p:cNvPr id="18" name="Rounded Rectangle 17"/>
           <p:cNvSpPr/>
           <p:nvPr/>
         </p:nvSpPr>
         <p:spPr>
           <a:xfrm>
-            <a:off x="2798064" y="4846320"/>
-            <a:ext cx="2066543" cy="1143000"/>
+            <a:off x="548640" y="5394960"/>
+            <a:ext cx="11064240" cy="914400"/>
           </a:xfrm>
           <a:prstGeom prst="roundRect">
             <a:avLst>
@@ -6131,10 +5992,12 @@
             </a:avLst>
           </a:prstGeom>
           <a:solidFill>
-            <a:srgbClr val="F5F1F1"/>
+            <a:srgbClr val="FFFFFF"/>
           </a:solidFill>
-          <a:ln>
-            <a:noFill/>
+          <a:ln w="12700">
+            <a:solidFill>
+              <a:srgbClr val="E5E7EB"/>
+            </a:solidFill>
           </a:ln>
           <a:effectLst/>
         </p:spPr>
@@ -6162,14 +6025,14 @@
       </p:sp>
       <p:sp>
         <p:nvSpPr>
-          <p:cNvPr id="25" name="TextBox 24"/>
+          <p:cNvPr id="19" name="TextBox 18"/>
           <p:cNvSpPr txBox="1"/>
           <p:nvPr/>
         </p:nvSpPr>
         <p:spPr>
           <a:xfrm>
-            <a:off x="2935224" y="4919472"/>
-            <a:ext cx="1828800" cy="274320"/>
+            <a:off x="777240" y="5458968"/>
+            <a:ext cx="10607040" cy="274320"/>
           </a:xfrm>
           <a:prstGeom prst="rect">
             <a:avLst/>
@@ -6184,27 +6047,27 @@
           <a:p>
             <a:pPr algn="l"/>
             <a:r>
-              <a:rPr sz="1100" b="1" i="0">
-                <a:solidFill>
-                  <a:srgbClr val="B87878"/>
-                </a:solidFill>
-                <a:latin typeface="Arial"/>
-              </a:rPr>
-              <a:t>2010</a:t>
-            </a:r>
-          </a:p>
-        </p:txBody>
-      </p:sp>
-      <p:sp>
-        <p:nvSpPr>
-          <p:cNvPr id="26" name="TextBox 25"/>
+              <a:rPr sz="1250" b="1" i="0">
+                <a:solidFill>
+                  <a:srgbClr val="500000"/>
+                </a:solidFill>
+                <a:latin typeface="Arial"/>
+              </a:rPr>
+              <a:t>Our calculations</a:t>
+            </a:r>
+          </a:p>
+        </p:txBody>
+      </p:sp>
+      <p:sp>
+        <p:nvSpPr>
+          <p:cNvPr id="20" name="TextBox 19"/>
           <p:cNvSpPr txBox="1"/>
           <p:nvPr/>
         </p:nvSpPr>
         <p:spPr>
           <a:xfrm>
-            <a:off x="2935224" y="5166360"/>
-            <a:ext cx="1828800" cy="320040"/>
+            <a:off x="777240" y="5733288"/>
+            <a:ext cx="10607040" cy="548640"/>
           </a:xfrm>
           <a:prstGeom prst="rect">
             <a:avLst/>
@@ -6219,27 +6082,27 @@
           <a:p>
             <a:pPr algn="l"/>
             <a:r>
-              <a:rPr sz="1500" b="1" i="0">
-                <a:solidFill>
-                  <a:srgbClr val="1E293B"/>
-                </a:solidFill>
-                <a:latin typeface="Arial"/>
-              </a:rPr>
-              <a:t>GAP</a:t>
-            </a:r>
-          </a:p>
-        </p:txBody>
-      </p:sp>
-      <p:sp>
-        <p:nvSpPr>
-          <p:cNvPr id="27" name="TextBox 26"/>
+              <a:rPr sz="1100" b="0" i="0">
+                <a:solidFill>
+                  <a:srgbClr val="64748B"/>
+                </a:solidFill>
+                <a:latin typeface="Arial"/>
+              </a:rPr>
+              <a:t>VASP 6.3.2 · PBE · PAW (Cu, Au: 11 valence e⁻) · ENCUT 400 eV · Γ-centred 8×8×8 / 4×8×8 k-points · Methfessel–Paxton 0.1 eV · 186 single points (energy + forces at fixed geometry), minutes each on 12 cores, SLURM array on TAMU HPRC Grace.</a:t>
+            </a:r>
+          </a:p>
+        </p:txBody>
+      </p:sp>
+      <p:sp>
+        <p:nvSpPr>
+          <p:cNvPr id="21" name="TextBox 20"/>
           <p:cNvSpPr txBox="1"/>
           <p:nvPr/>
         </p:nvSpPr>
         <p:spPr>
           <a:xfrm>
-            <a:off x="2935224" y="5486400"/>
-            <a:ext cx="1828800" cy="457200"/>
+            <a:off x="548640" y="6428232"/>
+            <a:ext cx="9601200" cy="228600"/>
           </a:xfrm>
           <a:prstGeom prst="rect">
             <a:avLst/>
@@ -6254,609 +6117,13 @@
           <a:p>
             <a:pPr algn="l"/>
             <a:r>
-              <a:rPr sz="1100" b="0" i="0">
-                <a:solidFill>
-                  <a:srgbClr val="64748B"/>
-                </a:solidFill>
-                <a:latin typeface="Arial"/>
-              </a:rPr>
-              <a:t>Gaussian processes</a:t>
-            </a:r>
-          </a:p>
-        </p:txBody>
-      </p:sp>
-      <p:cxnSp>
-        <p:nvCxnSpPr>
-          <p:cNvPr id="28" name="Connector 27"/>
-          <p:cNvCxnSpPr/>
-          <p:nvPr/>
-        </p:nvCxnSpPr>
-        <p:spPr>
-          <a:xfrm>
-            <a:off x="4864608" y="5413248"/>
-            <a:ext cx="182880" cy="0"/>
-          </a:xfrm>
-          <a:prstGeom prst="line">
-            <a:avLst/>
-          </a:prstGeom>
-          <a:ln w="19050">
-            <a:solidFill>
-              <a:srgbClr val="94A3B8"/>
-            </a:solidFill>
-            <a:tailEnd type="triangle" w="med" len="med"/>
-          </a:ln>
-        </p:spPr>
-        <p:style>
-          <a:lnRef idx="2">
-            <a:schemeClr val="accent1"/>
-          </a:lnRef>
-          <a:fillRef idx="0">
-            <a:schemeClr val="accent1"/>
-          </a:fillRef>
-          <a:effectRef idx="1">
-            <a:schemeClr val="accent1"/>
-          </a:effectRef>
-          <a:fontRef idx="minor">
-            <a:schemeClr val="tx1"/>
-          </a:fontRef>
-        </p:style>
-      </p:cxnSp>
-      <p:sp>
-        <p:nvSpPr>
-          <p:cNvPr id="29" name="Rounded Rectangle 28"/>
-          <p:cNvSpPr/>
-          <p:nvPr/>
-        </p:nvSpPr>
-        <p:spPr>
-          <a:xfrm>
-            <a:off x="5047488" y="4846320"/>
-            <a:ext cx="2066543" cy="1143000"/>
-          </a:xfrm>
-          <a:prstGeom prst="roundRect">
-            <a:avLst>
-              <a:gd name="adj" fmla="val 8000"/>
-            </a:avLst>
-          </a:prstGeom>
-          <a:solidFill>
-            <a:srgbClr val="F5F1F1"/>
-          </a:solidFill>
-          <a:ln>
-            <a:noFill/>
-          </a:ln>
-          <a:effectLst/>
-        </p:spPr>
-        <p:style>
-          <a:lnRef idx="1">
-            <a:schemeClr val="accent1"/>
-          </a:lnRef>
-          <a:fillRef idx="3">
-            <a:schemeClr val="accent1"/>
-          </a:fillRef>
-          <a:effectRef idx="2">
-            <a:schemeClr val="accent1"/>
-          </a:effectRef>
-          <a:fontRef idx="minor">
-            <a:schemeClr val="lt1"/>
-          </a:fontRef>
-        </p:style>
-        <p:txBody>
-          <a:bodyPr rtlCol="0" anchor="ctr"/>
-          <a:lstStyle/>
-          <a:p>
-            <a:pPr algn="ctr"/>
-          </a:p>
-        </p:txBody>
-      </p:sp>
-      <p:sp>
-        <p:nvSpPr>
-          <p:cNvPr id="30" name="TextBox 29"/>
-          <p:cNvSpPr txBox="1"/>
-          <p:nvPr/>
-        </p:nvSpPr>
-        <p:spPr>
-          <a:xfrm>
-            <a:off x="5184648" y="4919472"/>
-            <a:ext cx="1828800" cy="274320"/>
-          </a:xfrm>
-          <a:prstGeom prst="rect">
-            <a:avLst/>
-          </a:prstGeom>
-          <a:noFill/>
-        </p:spPr>
-        <p:txBody>
-          <a:bodyPr wrap="square" anchor="t" lIns="45720" rIns="45720" tIns="18288" bIns="18288">
-            <a:spAutoFit/>
-          </a:bodyPr>
-          <a:lstStyle/>
-          <a:p>
-            <a:pPr algn="l"/>
-            <a:r>
-              <a:rPr sz="1100" b="1" i="0">
-                <a:solidFill>
-                  <a:srgbClr val="B87878"/>
-                </a:solidFill>
-                <a:latin typeface="Arial"/>
-              </a:rPr>
-              <a:t>2019</a:t>
-            </a:r>
-          </a:p>
-        </p:txBody>
-      </p:sp>
-      <p:sp>
-        <p:nvSpPr>
-          <p:cNvPr id="31" name="TextBox 30"/>
-          <p:cNvSpPr txBox="1"/>
-          <p:nvPr/>
-        </p:nvSpPr>
-        <p:spPr>
-          <a:xfrm>
-            <a:off x="5184648" y="5166360"/>
-            <a:ext cx="1828800" cy="320040"/>
-          </a:xfrm>
-          <a:prstGeom prst="rect">
-            <a:avLst/>
-          </a:prstGeom>
-          <a:noFill/>
-        </p:spPr>
-        <p:txBody>
-          <a:bodyPr wrap="square" anchor="t" lIns="45720" rIns="45720" tIns="18288" bIns="18288">
-            <a:spAutoFit/>
-          </a:bodyPr>
-          <a:lstStyle/>
-          <a:p>
-            <a:pPr algn="l"/>
-            <a:r>
-              <a:rPr sz="1500" b="1" i="0">
-                <a:solidFill>
-                  <a:srgbClr val="1E293B"/>
-                </a:solidFill>
-                <a:latin typeface="Arial"/>
-              </a:rPr>
-              <a:t>ACE</a:t>
-            </a:r>
-          </a:p>
-        </p:txBody>
-      </p:sp>
-      <p:sp>
-        <p:nvSpPr>
-          <p:cNvPr id="32" name="TextBox 31"/>
-          <p:cNvSpPr txBox="1"/>
-          <p:nvPr/>
-        </p:nvSpPr>
-        <p:spPr>
-          <a:xfrm>
-            <a:off x="5184648" y="5486400"/>
-            <a:ext cx="1828800" cy="457200"/>
-          </a:xfrm>
-          <a:prstGeom prst="rect">
-            <a:avLst/>
-          </a:prstGeom>
-          <a:noFill/>
-        </p:spPr>
-        <p:txBody>
-          <a:bodyPr wrap="square" anchor="t" lIns="45720" rIns="45720" tIns="18288" bIns="18288">
-            <a:spAutoFit/>
-          </a:bodyPr>
-          <a:lstStyle/>
-          <a:p>
-            <a:pPr algn="l"/>
-            <a:r>
-              <a:rPr sz="1100" b="0" i="0">
-                <a:solidFill>
-                  <a:srgbClr val="64748B"/>
-                </a:solidFill>
-                <a:latin typeface="Arial"/>
-              </a:rPr>
-              <a:t>complete many-body basis</a:t>
-            </a:r>
-          </a:p>
-        </p:txBody>
-      </p:sp>
-      <p:cxnSp>
-        <p:nvCxnSpPr>
-          <p:cNvPr id="33" name="Connector 32"/>
-          <p:cNvCxnSpPr/>
-          <p:nvPr/>
-        </p:nvCxnSpPr>
-        <p:spPr>
-          <a:xfrm>
-            <a:off x="7114031" y="5413248"/>
-            <a:ext cx="182881" cy="0"/>
-          </a:xfrm>
-          <a:prstGeom prst="line">
-            <a:avLst/>
-          </a:prstGeom>
-          <a:ln w="19050">
-            <a:solidFill>
-              <a:srgbClr val="94A3B8"/>
-            </a:solidFill>
-            <a:tailEnd type="triangle" w="med" len="med"/>
-          </a:ln>
-        </p:spPr>
-        <p:style>
-          <a:lnRef idx="2">
-            <a:schemeClr val="accent1"/>
-          </a:lnRef>
-          <a:fillRef idx="0">
-            <a:schemeClr val="accent1"/>
-          </a:fillRef>
-          <a:effectRef idx="1">
-            <a:schemeClr val="accent1"/>
-          </a:effectRef>
-          <a:fontRef idx="minor">
-            <a:schemeClr val="tx1"/>
-          </a:fontRef>
-        </p:style>
-      </p:cxnSp>
-      <p:sp>
-        <p:nvSpPr>
-          <p:cNvPr id="34" name="Rounded Rectangle 33"/>
-          <p:cNvSpPr/>
-          <p:nvPr/>
-        </p:nvSpPr>
-        <p:spPr>
-          <a:xfrm>
-            <a:off x="7296912" y="4846320"/>
-            <a:ext cx="2066543" cy="1143000"/>
-          </a:xfrm>
-          <a:prstGeom prst="roundRect">
-            <a:avLst>
-              <a:gd name="adj" fmla="val 8000"/>
-            </a:avLst>
-          </a:prstGeom>
-          <a:solidFill>
-            <a:srgbClr val="F5F1F1"/>
-          </a:solidFill>
-          <a:ln>
-            <a:noFill/>
-          </a:ln>
-          <a:effectLst/>
-        </p:spPr>
-        <p:style>
-          <a:lnRef idx="1">
-            <a:schemeClr val="accent1"/>
-          </a:lnRef>
-          <a:fillRef idx="3">
-            <a:schemeClr val="accent1"/>
-          </a:fillRef>
-          <a:effectRef idx="2">
-            <a:schemeClr val="accent1"/>
-          </a:effectRef>
-          <a:fontRef idx="minor">
-            <a:schemeClr val="lt1"/>
-          </a:fontRef>
-        </p:style>
-        <p:txBody>
-          <a:bodyPr rtlCol="0" anchor="ctr"/>
-          <a:lstStyle/>
-          <a:p>
-            <a:pPr algn="ctr"/>
-          </a:p>
-        </p:txBody>
-      </p:sp>
-      <p:sp>
-        <p:nvSpPr>
-          <p:cNvPr id="35" name="TextBox 34"/>
-          <p:cNvSpPr txBox="1"/>
-          <p:nvPr/>
-        </p:nvSpPr>
-        <p:spPr>
-          <a:xfrm>
-            <a:off x="7434071" y="4919472"/>
-            <a:ext cx="1828800" cy="274320"/>
-          </a:xfrm>
-          <a:prstGeom prst="rect">
-            <a:avLst/>
-          </a:prstGeom>
-          <a:noFill/>
-        </p:spPr>
-        <p:txBody>
-          <a:bodyPr wrap="square" anchor="t" lIns="45720" rIns="45720" tIns="18288" bIns="18288">
-            <a:spAutoFit/>
-          </a:bodyPr>
-          <a:lstStyle/>
-          <a:p>
-            <a:pPr algn="l"/>
-            <a:r>
-              <a:rPr sz="1100" b="1" i="0">
-                <a:solidFill>
-                  <a:srgbClr val="B87878"/>
-                </a:solidFill>
-                <a:latin typeface="Arial"/>
-              </a:rPr>
-              <a:t>2022</a:t>
-            </a:r>
-          </a:p>
-        </p:txBody>
-      </p:sp>
-      <p:sp>
-        <p:nvSpPr>
-          <p:cNvPr id="36" name="TextBox 35"/>
-          <p:cNvSpPr txBox="1"/>
-          <p:nvPr/>
-        </p:nvSpPr>
-        <p:spPr>
-          <a:xfrm>
-            <a:off x="7434071" y="5166360"/>
-            <a:ext cx="1828800" cy="320040"/>
-          </a:xfrm>
-          <a:prstGeom prst="rect">
-            <a:avLst/>
-          </a:prstGeom>
-          <a:noFill/>
-        </p:spPr>
-        <p:txBody>
-          <a:bodyPr wrap="square" anchor="t" lIns="45720" rIns="45720" tIns="18288" bIns="18288">
-            <a:spAutoFit/>
-          </a:bodyPr>
-          <a:lstStyle/>
-          <a:p>
-            <a:pPr algn="l"/>
-            <a:r>
-              <a:rPr sz="1500" b="1" i="0">
-                <a:solidFill>
-                  <a:srgbClr val="1E293B"/>
-                </a:solidFill>
-                <a:latin typeface="Arial"/>
-              </a:rPr>
-              <a:t>NequIP</a:t>
-            </a:r>
-          </a:p>
-        </p:txBody>
-      </p:sp>
-      <p:sp>
-        <p:nvSpPr>
-          <p:cNvPr id="37" name="TextBox 36"/>
-          <p:cNvSpPr txBox="1"/>
-          <p:nvPr/>
-        </p:nvSpPr>
-        <p:spPr>
-          <a:xfrm>
-            <a:off x="7434071" y="5486400"/>
-            <a:ext cx="1828800" cy="457200"/>
-          </a:xfrm>
-          <a:prstGeom prst="rect">
-            <a:avLst/>
-          </a:prstGeom>
-          <a:noFill/>
-        </p:spPr>
-        <p:txBody>
-          <a:bodyPr wrap="square" anchor="t" lIns="45720" rIns="45720" tIns="18288" bIns="18288">
-            <a:spAutoFit/>
-          </a:bodyPr>
-          <a:lstStyle/>
-          <a:p>
-            <a:pPr algn="l"/>
-            <a:r>
-              <a:rPr sz="1100" b="0" i="0">
-                <a:solidFill>
-                  <a:srgbClr val="64748B"/>
-                </a:solidFill>
-                <a:latin typeface="Arial"/>
-              </a:rPr>
-              <a:t>equivariant graph nets</a:t>
-            </a:r>
-          </a:p>
-        </p:txBody>
-      </p:sp>
-      <p:cxnSp>
-        <p:nvCxnSpPr>
-          <p:cNvPr id="38" name="Connector 37"/>
-          <p:cNvCxnSpPr/>
-          <p:nvPr/>
-        </p:nvCxnSpPr>
-        <p:spPr>
-          <a:xfrm>
-            <a:off x="9363455" y="5413248"/>
-            <a:ext cx="182881" cy="0"/>
-          </a:xfrm>
-          <a:prstGeom prst="line">
-            <a:avLst/>
-          </a:prstGeom>
-          <a:ln w="19050">
-            <a:solidFill>
-              <a:srgbClr val="94A3B8"/>
-            </a:solidFill>
-            <a:tailEnd type="triangle" w="med" len="med"/>
-          </a:ln>
-        </p:spPr>
-        <p:style>
-          <a:lnRef idx="2">
-            <a:schemeClr val="accent1"/>
-          </a:lnRef>
-          <a:fillRef idx="0">
-            <a:schemeClr val="accent1"/>
-          </a:fillRef>
-          <a:effectRef idx="1">
-            <a:schemeClr val="accent1"/>
-          </a:effectRef>
-          <a:fontRef idx="minor">
-            <a:schemeClr val="tx1"/>
-          </a:fontRef>
-        </p:style>
-      </p:cxnSp>
-      <p:sp>
-        <p:nvSpPr>
-          <p:cNvPr id="39" name="Rounded Rectangle 38"/>
-          <p:cNvSpPr/>
-          <p:nvPr/>
-        </p:nvSpPr>
-        <p:spPr>
-          <a:xfrm>
-            <a:off x="9546336" y="4846320"/>
-            <a:ext cx="2066543" cy="1143000"/>
-          </a:xfrm>
-          <a:prstGeom prst="roundRect">
-            <a:avLst>
-              <a:gd name="adj" fmla="val 8000"/>
-            </a:avLst>
-          </a:prstGeom>
-          <a:solidFill>
-            <a:srgbClr val="500000"/>
-          </a:solidFill>
-          <a:ln>
-            <a:noFill/>
-          </a:ln>
-          <a:effectLst/>
-        </p:spPr>
-        <p:style>
-          <a:lnRef idx="1">
-            <a:schemeClr val="accent1"/>
-          </a:lnRef>
-          <a:fillRef idx="3">
-            <a:schemeClr val="accent1"/>
-          </a:fillRef>
-          <a:effectRef idx="2">
-            <a:schemeClr val="accent1"/>
-          </a:effectRef>
-          <a:fontRef idx="minor">
-            <a:schemeClr val="lt1"/>
-          </a:fontRef>
-        </p:style>
-        <p:txBody>
-          <a:bodyPr rtlCol="0" anchor="ctr"/>
-          <a:lstStyle/>
-          <a:p>
-            <a:pPr algn="ctr"/>
-          </a:p>
-        </p:txBody>
-      </p:sp>
-      <p:sp>
-        <p:nvSpPr>
-          <p:cNvPr id="40" name="TextBox 39"/>
-          <p:cNvSpPr txBox="1"/>
-          <p:nvPr/>
-        </p:nvSpPr>
-        <p:spPr>
-          <a:xfrm>
-            <a:off x="9683496" y="4919472"/>
-            <a:ext cx="1828800" cy="274320"/>
-          </a:xfrm>
-          <a:prstGeom prst="rect">
-            <a:avLst/>
-          </a:prstGeom>
-          <a:noFill/>
-        </p:spPr>
-        <p:txBody>
-          <a:bodyPr wrap="square" anchor="t" lIns="45720" rIns="45720" tIns="18288" bIns="18288">
-            <a:spAutoFit/>
-          </a:bodyPr>
-          <a:lstStyle/>
-          <a:p>
-            <a:pPr algn="l"/>
-            <a:r>
-              <a:rPr sz="1100" b="1" i="0">
-                <a:solidFill>
-                  <a:srgbClr val="E3C4C4"/>
-                </a:solidFill>
-                <a:latin typeface="Arial"/>
-              </a:rPr>
-              <a:t>2022</a:t>
-            </a:r>
-          </a:p>
-        </p:txBody>
-      </p:sp>
-      <p:sp>
-        <p:nvSpPr>
-          <p:cNvPr id="41" name="TextBox 40"/>
-          <p:cNvSpPr txBox="1"/>
-          <p:nvPr/>
-        </p:nvSpPr>
-        <p:spPr>
-          <a:xfrm>
-            <a:off x="9683496" y="5166360"/>
-            <a:ext cx="1828800" cy="320040"/>
-          </a:xfrm>
-          <a:prstGeom prst="rect">
-            <a:avLst/>
-          </a:prstGeom>
-          <a:noFill/>
-        </p:spPr>
-        <p:txBody>
-          <a:bodyPr wrap="square" anchor="t" lIns="45720" rIns="45720" tIns="18288" bIns="18288">
-            <a:spAutoFit/>
-          </a:bodyPr>
-          <a:lstStyle/>
-          <a:p>
-            <a:pPr algn="l"/>
-            <a:r>
-              <a:rPr sz="1500" b="1" i="0">
-                <a:solidFill>
-                  <a:srgbClr val="FFFFFF"/>
-                </a:solidFill>
-                <a:latin typeface="Arial"/>
-              </a:rPr>
-              <a:t>MACE</a:t>
-            </a:r>
-          </a:p>
-        </p:txBody>
-      </p:sp>
-      <p:sp>
-        <p:nvSpPr>
-          <p:cNvPr id="42" name="TextBox 41"/>
-          <p:cNvSpPr txBox="1"/>
-          <p:nvPr/>
-        </p:nvSpPr>
-        <p:spPr>
-          <a:xfrm>
-            <a:off x="9683496" y="5486400"/>
-            <a:ext cx="1828800" cy="457200"/>
-          </a:xfrm>
-          <a:prstGeom prst="rect">
-            <a:avLst/>
-          </a:prstGeom>
-          <a:noFill/>
-        </p:spPr>
-        <p:txBody>
-          <a:bodyPr wrap="square" anchor="t" lIns="45720" rIns="45720" tIns="18288" bIns="18288">
-            <a:spAutoFit/>
-          </a:bodyPr>
-          <a:lstStyle/>
-          <a:p>
-            <a:pPr algn="l"/>
-            <a:r>
-              <a:rPr sz="1100" b="0" i="0">
-                <a:solidFill>
-                  <a:srgbClr val="E3C4C4"/>
-                </a:solidFill>
-                <a:latin typeface="Arial"/>
-              </a:rPr>
-              <a:t>ACE products inside an equivariant GNN</a:t>
-            </a:r>
-          </a:p>
-        </p:txBody>
-      </p:sp>
-      <p:sp>
-        <p:nvSpPr>
-          <p:cNvPr id="43" name="TextBox 42"/>
-          <p:cNvSpPr txBox="1"/>
-          <p:nvPr/>
-        </p:nvSpPr>
-        <p:spPr>
-          <a:xfrm>
-            <a:off x="548640" y="6428232"/>
-            <a:ext cx="9601200" cy="228600"/>
-          </a:xfrm>
-          <a:prstGeom prst="rect">
-            <a:avLst/>
-          </a:prstGeom>
-          <a:noFill/>
-        </p:spPr>
-        <p:txBody>
-          <a:bodyPr wrap="square" anchor="t" lIns="45720" rIns="45720" tIns="18288" bIns="18288">
-            <a:spAutoFit/>
-          </a:bodyPr>
-          <a:lstStyle/>
-          <a:p>
-            <a:pPr algn="l"/>
-            <a:r>
               <a:rPr sz="900" b="0" i="0">
                 <a:solidFill>
                   <a:srgbClr val="94A3B8"/>
                 </a:solidFill>
                 <a:latin typeface="Arial"/>
               </a:rPr>
-              <a:t>Behler &amp; Parrinello 2007 · Bartók et al. 2010 · Drautz 2019 · Batzner et al. 2022 · Batatia et al. NeurIPS 2022</a:t>
+              <a:t>Hohenberg &amp; Kohn 1964; Kohn &amp; Sham 1965; Perdew, Burke &amp; Ernzerhof 1996</a:t>
             </a:r>
           </a:p>
         </p:txBody>
@@ -6909,7 +6176,7 @@
                 </a:solidFill>
                 <a:latin typeface="Arial"/>
               </a:rPr>
-              <a:t>BACKUP · THE MODEL</a:t>
+              <a:t>BACKUP · LEARNED POTENTIALS</a:t>
             </a:r>
           </a:p>
         </p:txBody>
@@ -6944,7 +6211,7 @@
                 </a:solidFill>
                 <a:latin typeface="Arial"/>
               </a:rPr>
-              <a:t>MACE: a graph of atoms passing messages</a:t>
+              <a:t>From DFT to a learned potential</a:t>
             </a:r>
           </a:p>
         </p:txBody>
@@ -6979,7 +6246,7 @@
                 </a:solidFill>
                 <a:latin typeface="Arial"/>
               </a:rPr>
-              <a:t>Two layers, many-body messages, exact rotational symmetry</a:t>
+              <a:t>Treat the energy as a regression target — with three physics constraints built in</a:t>
             </a:r>
           </a:p>
         </p:txBody>
@@ -7014,7 +6281,7 @@
                 </a:solidFill>
                 <a:latin typeface="Arial"/>
               </a:rPr>
-              <a:t>14</a:t>
+              <a:t>13</a:t>
             </a:r>
           </a:p>
         </p:txBody>
@@ -7028,7 +6295,7 @@
         <p:spPr>
           <a:xfrm>
             <a:off x="548640" y="1783080"/>
-            <a:ext cx="4754880" cy="4206240"/>
+            <a:ext cx="3611880" cy="2514600"/>
           </a:xfrm>
           <a:prstGeom prst="roundRect">
             <a:avLst>
@@ -7073,684 +6340,8 @@
         </p:nvSpPr>
         <p:spPr>
           <a:xfrm>
-            <a:off x="1188720" y="2103120"/>
-            <a:ext cx="3474720" cy="3474720"/>
-          </a:xfrm>
-          <a:prstGeom prst="ellipse">
-            <a:avLst/>
-          </a:prstGeom>
-          <a:noFill/>
-          <a:ln w="15875">
-            <a:solidFill>
-              <a:srgbClr val="B87878"/>
-            </a:solidFill>
-            <a:prstDash val="dash"/>
-          </a:ln>
-        </p:spPr>
-        <p:style>
-          <a:lnRef idx="1">
-            <a:schemeClr val="accent1"/>
-          </a:lnRef>
-          <a:fillRef idx="3">
-            <a:schemeClr val="accent1"/>
-          </a:fillRef>
-          <a:effectRef idx="2">
-            <a:schemeClr val="accent1"/>
-          </a:effectRef>
-          <a:fontRef idx="minor">
-            <a:schemeClr val="lt1"/>
-          </a:fontRef>
-        </p:style>
-        <p:txBody>
-          <a:bodyPr rtlCol="0" anchor="ctr"/>
-          <a:lstStyle/>
-          <a:p>
-            <a:pPr algn="ctr"/>
-          </a:p>
-        </p:txBody>
-      </p:sp>
-      <p:cxnSp>
-        <p:nvCxnSpPr>
-          <p:cNvPr id="8" name="Connector 7"/>
-          <p:cNvCxnSpPr/>
-          <p:nvPr/>
-        </p:nvCxnSpPr>
-        <p:spPr>
-          <a:xfrm>
-            <a:off x="2926080" y="3840480"/>
-            <a:ext cx="1005840" cy="0"/>
-          </a:xfrm>
-          <a:prstGeom prst="line">
-            <a:avLst/>
-          </a:prstGeom>
-          <a:ln w="15875">
-            <a:solidFill>
-              <a:srgbClr val="94A3B8"/>
-            </a:solidFill>
-          </a:ln>
-        </p:spPr>
-        <p:style>
-          <a:lnRef idx="2">
-            <a:schemeClr val="accent1"/>
-          </a:lnRef>
-          <a:fillRef idx="0">
-            <a:schemeClr val="accent1"/>
-          </a:fillRef>
-          <a:effectRef idx="1">
-            <a:schemeClr val="accent1"/>
-          </a:effectRef>
-          <a:fontRef idx="minor">
-            <a:schemeClr val="tx1"/>
-          </a:fontRef>
-        </p:style>
-      </p:cxnSp>
-      <p:cxnSp>
-        <p:nvCxnSpPr>
-          <p:cNvPr id="9" name="Connector 8"/>
-          <p:cNvCxnSpPr/>
-          <p:nvPr/>
-        </p:nvCxnSpPr>
-        <p:spPr>
-          <a:xfrm>
-            <a:off x="2926080" y="3840480"/>
-            <a:ext cx="502920" cy="868680"/>
-          </a:xfrm>
-          <a:prstGeom prst="line">
-            <a:avLst/>
-          </a:prstGeom>
-          <a:ln w="15875">
-            <a:solidFill>
-              <a:srgbClr val="94A3B8"/>
-            </a:solidFill>
-          </a:ln>
-        </p:spPr>
-        <p:style>
-          <a:lnRef idx="2">
-            <a:schemeClr val="accent1"/>
-          </a:lnRef>
-          <a:fillRef idx="0">
-            <a:schemeClr val="accent1"/>
-          </a:fillRef>
-          <a:effectRef idx="1">
-            <a:schemeClr val="accent1"/>
-          </a:effectRef>
-          <a:fontRef idx="minor">
-            <a:schemeClr val="tx1"/>
-          </a:fontRef>
-        </p:style>
-      </p:cxnSp>
-      <p:cxnSp>
-        <p:nvCxnSpPr>
-          <p:cNvPr id="10" name="Connector 9"/>
-          <p:cNvCxnSpPr/>
-          <p:nvPr/>
-        </p:nvCxnSpPr>
-        <p:spPr>
-          <a:xfrm flipH="1">
-            <a:off x="2423160" y="3840480"/>
-            <a:ext cx="502920" cy="868680"/>
-          </a:xfrm>
-          <a:prstGeom prst="line">
-            <a:avLst/>
-          </a:prstGeom>
-          <a:ln w="15875">
-            <a:solidFill>
-              <a:srgbClr val="94A3B8"/>
-            </a:solidFill>
-          </a:ln>
-        </p:spPr>
-        <p:style>
-          <a:lnRef idx="2">
-            <a:schemeClr val="accent1"/>
-          </a:lnRef>
-          <a:fillRef idx="0">
-            <a:schemeClr val="accent1"/>
-          </a:fillRef>
-          <a:effectRef idx="1">
-            <a:schemeClr val="accent1"/>
-          </a:effectRef>
-          <a:fontRef idx="minor">
-            <a:schemeClr val="tx1"/>
-          </a:fontRef>
-        </p:style>
-      </p:cxnSp>
-      <p:cxnSp>
-        <p:nvCxnSpPr>
-          <p:cNvPr id="11" name="Connector 10"/>
-          <p:cNvCxnSpPr/>
-          <p:nvPr/>
-        </p:nvCxnSpPr>
-        <p:spPr>
-          <a:xfrm flipH="1">
-            <a:off x="1920240" y="3840480"/>
-            <a:ext cx="1005840" cy="0"/>
-          </a:xfrm>
-          <a:prstGeom prst="line">
-            <a:avLst/>
-          </a:prstGeom>
-          <a:ln w="15875">
-            <a:solidFill>
-              <a:srgbClr val="94A3B8"/>
-            </a:solidFill>
-          </a:ln>
-        </p:spPr>
-        <p:style>
-          <a:lnRef idx="2">
-            <a:schemeClr val="accent1"/>
-          </a:lnRef>
-          <a:fillRef idx="0">
-            <a:schemeClr val="accent1"/>
-          </a:fillRef>
-          <a:effectRef idx="1">
-            <a:schemeClr val="accent1"/>
-          </a:effectRef>
-          <a:fontRef idx="minor">
-            <a:schemeClr val="tx1"/>
-          </a:fontRef>
-        </p:style>
-      </p:cxnSp>
-      <p:cxnSp>
-        <p:nvCxnSpPr>
-          <p:cNvPr id="12" name="Connector 11"/>
-          <p:cNvCxnSpPr/>
-          <p:nvPr/>
-        </p:nvCxnSpPr>
-        <p:spPr>
-          <a:xfrm flipH="1" flipV="1">
-            <a:off x="2423160" y="2971800"/>
-            <a:ext cx="502920" cy="868680"/>
-          </a:xfrm>
-          <a:prstGeom prst="line">
-            <a:avLst/>
-          </a:prstGeom>
-          <a:ln w="15875">
-            <a:solidFill>
-              <a:srgbClr val="94A3B8"/>
-            </a:solidFill>
-          </a:ln>
-        </p:spPr>
-        <p:style>
-          <a:lnRef idx="2">
-            <a:schemeClr val="accent1"/>
-          </a:lnRef>
-          <a:fillRef idx="0">
-            <a:schemeClr val="accent1"/>
-          </a:fillRef>
-          <a:effectRef idx="1">
-            <a:schemeClr val="accent1"/>
-          </a:effectRef>
-          <a:fontRef idx="minor">
-            <a:schemeClr val="tx1"/>
-          </a:fontRef>
-        </p:style>
-      </p:cxnSp>
-      <p:cxnSp>
-        <p:nvCxnSpPr>
-          <p:cNvPr id="13" name="Connector 12"/>
-          <p:cNvCxnSpPr/>
-          <p:nvPr/>
-        </p:nvCxnSpPr>
-        <p:spPr>
-          <a:xfrm flipV="1">
-            <a:off x="2926080" y="2971800"/>
-            <a:ext cx="502920" cy="868680"/>
-          </a:xfrm>
-          <a:prstGeom prst="line">
-            <a:avLst/>
-          </a:prstGeom>
-          <a:ln w="15875">
-            <a:solidFill>
-              <a:srgbClr val="94A3B8"/>
-            </a:solidFill>
-          </a:ln>
-        </p:spPr>
-        <p:style>
-          <a:lnRef idx="2">
-            <a:schemeClr val="accent1"/>
-          </a:lnRef>
-          <a:fillRef idx="0">
-            <a:schemeClr val="accent1"/>
-          </a:fillRef>
-          <a:effectRef idx="1">
-            <a:schemeClr val="accent1"/>
-          </a:effectRef>
-          <a:fontRef idx="minor">
-            <a:schemeClr val="tx1"/>
-          </a:fontRef>
-        </p:style>
-      </p:cxnSp>
-      <p:cxnSp>
-        <p:nvCxnSpPr>
-          <p:cNvPr id="14" name="Connector 13"/>
-          <p:cNvCxnSpPr/>
-          <p:nvPr/>
-        </p:nvCxnSpPr>
-        <p:spPr>
-          <a:xfrm>
-            <a:off x="2926080" y="3840480"/>
-            <a:ext cx="1463040" cy="822960"/>
-          </a:xfrm>
-          <a:prstGeom prst="line">
-            <a:avLst/>
-          </a:prstGeom>
-          <a:ln w="15875">
-            <a:solidFill>
-              <a:srgbClr val="94A3B8"/>
-            </a:solidFill>
-          </a:ln>
-        </p:spPr>
-        <p:style>
-          <a:lnRef idx="2">
-            <a:schemeClr val="accent1"/>
-          </a:lnRef>
-          <a:fillRef idx="0">
-            <a:schemeClr val="accent1"/>
-          </a:fillRef>
-          <a:effectRef idx="1">
-            <a:schemeClr val="accent1"/>
-          </a:effectRef>
-          <a:fontRef idx="minor">
-            <a:schemeClr val="tx1"/>
-          </a:fontRef>
-        </p:style>
-      </p:cxnSp>
-      <p:cxnSp>
-        <p:nvCxnSpPr>
-          <p:cNvPr id="15" name="Connector 14"/>
-          <p:cNvCxnSpPr/>
-          <p:nvPr/>
-        </p:nvCxnSpPr>
-        <p:spPr>
-          <a:xfrm flipH="1">
-            <a:off x="1554480" y="3840480"/>
-            <a:ext cx="1371600" cy="1005840"/>
-          </a:xfrm>
-          <a:prstGeom prst="line">
-            <a:avLst/>
-          </a:prstGeom>
-          <a:ln w="15875">
-            <a:solidFill>
-              <a:srgbClr val="94A3B8"/>
-            </a:solidFill>
-          </a:ln>
-        </p:spPr>
-        <p:style>
-          <a:lnRef idx="2">
-            <a:schemeClr val="accent1"/>
-          </a:lnRef>
-          <a:fillRef idx="0">
-            <a:schemeClr val="accent1"/>
-          </a:fillRef>
-          <a:effectRef idx="1">
-            <a:schemeClr val="accent1"/>
-          </a:effectRef>
-          <a:fontRef idx="minor">
-            <a:schemeClr val="tx1"/>
-          </a:fontRef>
-        </p:style>
-      </p:cxnSp>
-      <p:sp>
-        <p:nvSpPr>
-          <p:cNvPr id="16" name="Oval 15"/>
-          <p:cNvSpPr/>
-          <p:nvPr/>
-        </p:nvSpPr>
-        <p:spPr>
-          <a:xfrm>
-            <a:off x="3785616" y="3694176"/>
-            <a:ext cx="292608" cy="292608"/>
-          </a:xfrm>
-          <a:prstGeom prst="ellipse">
-            <a:avLst/>
-          </a:prstGeom>
-          <a:solidFill>
-            <a:srgbClr val="B87878"/>
-          </a:solidFill>
-          <a:ln>
-            <a:noFill/>
-          </a:ln>
-          <a:effectLst/>
-        </p:spPr>
-        <p:style>
-          <a:lnRef idx="1">
-            <a:schemeClr val="accent1"/>
-          </a:lnRef>
-          <a:fillRef idx="3">
-            <a:schemeClr val="accent1"/>
-          </a:fillRef>
-          <a:effectRef idx="2">
-            <a:schemeClr val="accent1"/>
-          </a:effectRef>
-          <a:fontRef idx="minor">
-            <a:schemeClr val="lt1"/>
-          </a:fontRef>
-        </p:style>
-        <p:txBody>
-          <a:bodyPr rtlCol="0" anchor="ctr"/>
-          <a:lstStyle/>
-          <a:p>
-            <a:pPr algn="ctr"/>
-          </a:p>
-        </p:txBody>
-      </p:sp>
-      <p:sp>
-        <p:nvSpPr>
-          <p:cNvPr id="17" name="Oval 16"/>
-          <p:cNvSpPr/>
-          <p:nvPr/>
-        </p:nvSpPr>
-        <p:spPr>
-          <a:xfrm>
-            <a:off x="3282696" y="4562856"/>
-            <a:ext cx="292608" cy="292608"/>
-          </a:xfrm>
-          <a:prstGeom prst="ellipse">
-            <a:avLst/>
-          </a:prstGeom>
-          <a:solidFill>
-            <a:srgbClr val="B87878"/>
-          </a:solidFill>
-          <a:ln>
-            <a:noFill/>
-          </a:ln>
-          <a:effectLst/>
-        </p:spPr>
-        <p:style>
-          <a:lnRef idx="1">
-            <a:schemeClr val="accent1"/>
-          </a:lnRef>
-          <a:fillRef idx="3">
-            <a:schemeClr val="accent1"/>
-          </a:fillRef>
-          <a:effectRef idx="2">
-            <a:schemeClr val="accent1"/>
-          </a:effectRef>
-          <a:fontRef idx="minor">
-            <a:schemeClr val="lt1"/>
-          </a:fontRef>
-        </p:style>
-        <p:txBody>
-          <a:bodyPr rtlCol="0" anchor="ctr"/>
-          <a:lstStyle/>
-          <a:p>
-            <a:pPr algn="ctr"/>
-          </a:p>
-        </p:txBody>
-      </p:sp>
-      <p:sp>
-        <p:nvSpPr>
-          <p:cNvPr id="18" name="Oval 17"/>
-          <p:cNvSpPr/>
-          <p:nvPr/>
-        </p:nvSpPr>
-        <p:spPr>
-          <a:xfrm>
-            <a:off x="2276856" y="4562856"/>
-            <a:ext cx="292608" cy="292608"/>
-          </a:xfrm>
-          <a:prstGeom prst="ellipse">
-            <a:avLst/>
-          </a:prstGeom>
-          <a:solidFill>
-            <a:srgbClr val="B87878"/>
-          </a:solidFill>
-          <a:ln>
-            <a:noFill/>
-          </a:ln>
-          <a:effectLst/>
-        </p:spPr>
-        <p:style>
-          <a:lnRef idx="1">
-            <a:schemeClr val="accent1"/>
-          </a:lnRef>
-          <a:fillRef idx="3">
-            <a:schemeClr val="accent1"/>
-          </a:fillRef>
-          <a:effectRef idx="2">
-            <a:schemeClr val="accent1"/>
-          </a:effectRef>
-          <a:fontRef idx="minor">
-            <a:schemeClr val="lt1"/>
-          </a:fontRef>
-        </p:style>
-        <p:txBody>
-          <a:bodyPr rtlCol="0" anchor="ctr"/>
-          <a:lstStyle/>
-          <a:p>
-            <a:pPr algn="ctr"/>
-          </a:p>
-        </p:txBody>
-      </p:sp>
-      <p:sp>
-        <p:nvSpPr>
-          <p:cNvPr id="19" name="Oval 18"/>
-          <p:cNvSpPr/>
-          <p:nvPr/>
-        </p:nvSpPr>
-        <p:spPr>
-          <a:xfrm>
-            <a:off x="1773936" y="3694176"/>
-            <a:ext cx="292608" cy="292608"/>
-          </a:xfrm>
-          <a:prstGeom prst="ellipse">
-            <a:avLst/>
-          </a:prstGeom>
-          <a:solidFill>
-            <a:srgbClr val="B87878"/>
-          </a:solidFill>
-          <a:ln>
-            <a:noFill/>
-          </a:ln>
-          <a:effectLst/>
-        </p:spPr>
-        <p:style>
-          <a:lnRef idx="1">
-            <a:schemeClr val="accent1"/>
-          </a:lnRef>
-          <a:fillRef idx="3">
-            <a:schemeClr val="accent1"/>
-          </a:fillRef>
-          <a:effectRef idx="2">
-            <a:schemeClr val="accent1"/>
-          </a:effectRef>
-          <a:fontRef idx="minor">
-            <a:schemeClr val="lt1"/>
-          </a:fontRef>
-        </p:style>
-        <p:txBody>
-          <a:bodyPr rtlCol="0" anchor="ctr"/>
-          <a:lstStyle/>
-          <a:p>
-            <a:pPr algn="ctr"/>
-          </a:p>
-        </p:txBody>
-      </p:sp>
-      <p:sp>
-        <p:nvSpPr>
-          <p:cNvPr id="20" name="Oval 19"/>
-          <p:cNvSpPr/>
-          <p:nvPr/>
-        </p:nvSpPr>
-        <p:spPr>
-          <a:xfrm>
-            <a:off x="2276856" y="2825496"/>
-            <a:ext cx="292608" cy="292608"/>
-          </a:xfrm>
-          <a:prstGeom prst="ellipse">
-            <a:avLst/>
-          </a:prstGeom>
-          <a:solidFill>
-            <a:srgbClr val="B87878"/>
-          </a:solidFill>
-          <a:ln>
-            <a:noFill/>
-          </a:ln>
-          <a:effectLst/>
-        </p:spPr>
-        <p:style>
-          <a:lnRef idx="1">
-            <a:schemeClr val="accent1"/>
-          </a:lnRef>
-          <a:fillRef idx="3">
-            <a:schemeClr val="accent1"/>
-          </a:fillRef>
-          <a:effectRef idx="2">
-            <a:schemeClr val="accent1"/>
-          </a:effectRef>
-          <a:fontRef idx="minor">
-            <a:schemeClr val="lt1"/>
-          </a:fontRef>
-        </p:style>
-        <p:txBody>
-          <a:bodyPr rtlCol="0" anchor="ctr"/>
-          <a:lstStyle/>
-          <a:p>
-            <a:pPr algn="ctr"/>
-          </a:p>
-        </p:txBody>
-      </p:sp>
-      <p:sp>
-        <p:nvSpPr>
-          <p:cNvPr id="21" name="Oval 20"/>
-          <p:cNvSpPr/>
-          <p:nvPr/>
-        </p:nvSpPr>
-        <p:spPr>
-          <a:xfrm>
-            <a:off x="3282696" y="2825496"/>
-            <a:ext cx="292608" cy="292608"/>
-          </a:xfrm>
-          <a:prstGeom prst="ellipse">
-            <a:avLst/>
-          </a:prstGeom>
-          <a:solidFill>
-            <a:srgbClr val="B87878"/>
-          </a:solidFill>
-          <a:ln>
-            <a:noFill/>
-          </a:ln>
-          <a:effectLst/>
-        </p:spPr>
-        <p:style>
-          <a:lnRef idx="1">
-            <a:schemeClr val="accent1"/>
-          </a:lnRef>
-          <a:fillRef idx="3">
-            <a:schemeClr val="accent1"/>
-          </a:fillRef>
-          <a:effectRef idx="2">
-            <a:schemeClr val="accent1"/>
-          </a:effectRef>
-          <a:fontRef idx="minor">
-            <a:schemeClr val="lt1"/>
-          </a:fontRef>
-        </p:style>
-        <p:txBody>
-          <a:bodyPr rtlCol="0" anchor="ctr"/>
-          <a:lstStyle/>
-          <a:p>
-            <a:pPr algn="ctr"/>
-          </a:p>
-        </p:txBody>
-      </p:sp>
-      <p:sp>
-        <p:nvSpPr>
-          <p:cNvPr id="22" name="Oval 21"/>
-          <p:cNvSpPr/>
-          <p:nvPr/>
-        </p:nvSpPr>
-        <p:spPr>
-          <a:xfrm>
-            <a:off x="4242816" y="4517136"/>
-            <a:ext cx="292608" cy="292608"/>
-          </a:xfrm>
-          <a:prstGeom prst="ellipse">
-            <a:avLst/>
-          </a:prstGeom>
-          <a:solidFill>
-            <a:srgbClr val="94A3B8"/>
-          </a:solidFill>
-          <a:ln>
-            <a:noFill/>
-          </a:ln>
-          <a:effectLst/>
-        </p:spPr>
-        <p:style>
-          <a:lnRef idx="1">
-            <a:schemeClr val="accent1"/>
-          </a:lnRef>
-          <a:fillRef idx="3">
-            <a:schemeClr val="accent1"/>
-          </a:fillRef>
-          <a:effectRef idx="2">
-            <a:schemeClr val="accent1"/>
-          </a:effectRef>
-          <a:fontRef idx="minor">
-            <a:schemeClr val="lt1"/>
-          </a:fontRef>
-        </p:style>
-        <p:txBody>
-          <a:bodyPr rtlCol="0" anchor="ctr"/>
-          <a:lstStyle/>
-          <a:p>
-            <a:pPr algn="ctr"/>
-          </a:p>
-        </p:txBody>
-      </p:sp>
-      <p:sp>
-        <p:nvSpPr>
-          <p:cNvPr id="23" name="Oval 22"/>
-          <p:cNvSpPr/>
-          <p:nvPr/>
-        </p:nvSpPr>
-        <p:spPr>
-          <a:xfrm>
-            <a:off x="1408176" y="4700016"/>
-            <a:ext cx="292608" cy="292608"/>
-          </a:xfrm>
-          <a:prstGeom prst="ellipse">
-            <a:avLst/>
-          </a:prstGeom>
-          <a:solidFill>
-            <a:srgbClr val="94A3B8"/>
-          </a:solidFill>
-          <a:ln>
-            <a:noFill/>
-          </a:ln>
-          <a:effectLst/>
-        </p:spPr>
-        <p:style>
-          <a:lnRef idx="1">
-            <a:schemeClr val="accent1"/>
-          </a:lnRef>
-          <a:fillRef idx="3">
-            <a:schemeClr val="accent1"/>
-          </a:fillRef>
-          <a:effectRef idx="2">
-            <a:schemeClr val="accent1"/>
-          </a:effectRef>
-          <a:fontRef idx="minor">
-            <a:schemeClr val="lt1"/>
-          </a:fontRef>
-        </p:style>
-        <p:txBody>
-          <a:bodyPr rtlCol="0" anchor="ctr"/>
-          <a:lstStyle/>
-          <a:p>
-            <a:pPr algn="ctr"/>
-          </a:p>
-        </p:txBody>
-      </p:sp>
-      <p:sp>
-        <p:nvSpPr>
-          <p:cNvPr id="24" name="Oval 23"/>
-          <p:cNvSpPr/>
-          <p:nvPr/>
-        </p:nvSpPr>
-        <p:spPr>
-          <a:xfrm>
-            <a:off x="2724912" y="3639312"/>
-            <a:ext cx="402336" cy="402336"/>
+            <a:off x="777240" y="1984248"/>
+            <a:ext cx="502920" cy="502920"/>
           </a:xfrm>
           <a:prstGeom prst="ellipse">
             <a:avLst/>
@@ -7787,23 +6378,23 @@
                 <a:solidFill>
                   <a:srgbClr val="FFFFFF"/>
                 </a:solidFill>
-                <a:latin typeface="Arial"/>
-              </a:rPr>
-              <a:t>i</a:t>
-            </a:r>
-          </a:p>
-        </p:txBody>
-      </p:sp>
-      <p:sp>
-        <p:nvSpPr>
-          <p:cNvPr id="25" name="TextBox 24"/>
+                <a:latin typeface="Cambria Math"/>
+              </a:rPr>
+              <a:t>Σ</a:t>
+            </a:r>
+          </a:p>
+        </p:txBody>
+      </p:sp>
+      <p:sp>
+        <p:nvSpPr>
+          <p:cNvPr id="8" name="TextBox 7"/>
           <p:cNvSpPr txBox="1"/>
           <p:nvPr/>
         </p:nvSpPr>
         <p:spPr>
           <a:xfrm>
-            <a:off x="777240" y="1874519"/>
-            <a:ext cx="4297680" cy="320040"/>
+            <a:off x="777240" y="2651760"/>
+            <a:ext cx="3154680" cy="411480"/>
           </a:xfrm>
           <a:prstGeom prst="rect">
             <a:avLst/>
@@ -7818,27 +6409,27 @@
           <a:p>
             <a:pPr algn="l"/>
             <a:r>
-              <a:rPr sz="1200" b="1" i="0">
+              <a:rPr sz="1600" b="1" i="0">
                 <a:solidFill>
                   <a:srgbClr val="1E293B"/>
                 </a:solidFill>
                 <a:latin typeface="Arial"/>
               </a:rPr>
-              <a:t>atom i and its neighbourhood (cut-off 6 Å)</a:t>
-            </a:r>
-          </a:p>
-        </p:txBody>
-      </p:sp>
-      <p:sp>
-        <p:nvSpPr>
-          <p:cNvPr id="26" name="TextBox 25"/>
+              <a:t>Locality</a:t>
+            </a:r>
+          </a:p>
+        </p:txBody>
+      </p:sp>
+      <p:sp>
+        <p:nvSpPr>
+          <p:cNvPr id="9" name="TextBox 8"/>
           <p:cNvSpPr txBox="1"/>
           <p:nvPr/>
         </p:nvSpPr>
         <p:spPr>
           <a:xfrm>
-            <a:off x="777240" y="5532120"/>
-            <a:ext cx="4297680" cy="411480"/>
+            <a:off x="777240" y="3108960"/>
+            <a:ext cx="3154680" cy="1097280"/>
           </a:xfrm>
           <a:prstGeom prst="rect">
             <a:avLst/>
@@ -7853,27 +6444,39 @@
           <a:p>
             <a:pPr algn="l"/>
             <a:r>
-              <a:rPr sz="1100" b="0" i="0">
+              <a:rPr sz="1250" b="0" i="0">
                 <a:solidFill>
                   <a:srgbClr val="64748B"/>
                 </a:solidFill>
                 <a:latin typeface="Arial"/>
               </a:rPr>
-              <a:t>nodes = atoms · edges = pairs within the cut-off · each layer passes messages along edges</a:t>
-            </a:r>
-          </a:p>
-        </p:txBody>
-      </p:sp>
-      <p:sp>
-        <p:nvSpPr>
-          <p:cNvPr id="27" name="Rounded Rectangle 26"/>
+              <a:t>Total energy is a sum of atomic energies, each depending only on neighbours within a cut-off (MACE: 6 Å).</a:t>
+            </a:r>
+          </a:p>
+          <a:p>
+            <a:pPr algn="l"/>
+            <a:r>
+              <a:rPr sz="1250" b="0" i="0">
+                <a:solidFill>
+                  <a:srgbClr val="64748B"/>
+                </a:solidFill>
+                <a:latin typeface="Arial"/>
+              </a:rPr>
+              <a:t>This is why a model trained on 4- and 8-atom cells works on any size, and why cost is linear in N.</a:t>
+            </a:r>
+          </a:p>
+        </p:txBody>
+      </p:sp>
+      <p:sp>
+        <p:nvSpPr>
+          <p:cNvPr id="10" name="Rounded Rectangle 9"/>
           <p:cNvSpPr/>
           <p:nvPr/>
         </p:nvSpPr>
         <p:spPr>
           <a:xfrm>
-            <a:off x="5532120" y="1783080"/>
-            <a:ext cx="6080760" cy="960120"/>
+            <a:off x="4279392" y="1783080"/>
+            <a:ext cx="3611880" cy="2514600"/>
           </a:xfrm>
           <a:prstGeom prst="roundRect">
             <a:avLst>
@@ -7881,12 +6484,10 @@
             </a:avLst>
           </a:prstGeom>
           <a:solidFill>
-            <a:srgbClr val="FFFFFF"/>
+            <a:srgbClr val="F5F1F1"/>
           </a:solidFill>
-          <a:ln w="12700">
-            <a:solidFill>
-              <a:srgbClr val="E5E7EB"/>
-            </a:solidFill>
+          <a:ln>
+            <a:noFill/>
           </a:ln>
           <a:effectLst/>
         </p:spPr>
@@ -7914,13 +6515,13 @@
       </p:sp>
       <p:sp>
         <p:nvSpPr>
-          <p:cNvPr id="28" name="Oval 27"/>
+          <p:cNvPr id="11" name="Oval 10"/>
           <p:cNvSpPr/>
           <p:nvPr/>
         </p:nvSpPr>
         <p:spPr>
           <a:xfrm>
-            <a:off x="5669280" y="2011680"/>
+            <a:off x="4507992" y="1984248"/>
             <a:ext cx="502920" cy="502920"/>
           </a:xfrm>
           <a:prstGeom prst="ellipse">
@@ -7954,27 +6555,27 @@
           <a:p>
             <a:pPr algn="ctr"/>
             <a:r>
-              <a:rPr sz="1400" b="1">
+              <a:rPr sz="1300" b="1">
                 <a:solidFill>
                   <a:srgbClr val="FFFFFF"/>
                 </a:solidFill>
-                <a:latin typeface="Arial"/>
-              </a:rPr>
-              <a:t>1</a:t>
-            </a:r>
-          </a:p>
-        </p:txBody>
-      </p:sp>
-      <p:sp>
-        <p:nvSpPr>
-          <p:cNvPr id="29" name="TextBox 28"/>
+                <a:latin typeface="Cambria Math"/>
+              </a:rPr>
+              <a:t>⟳</a:t>
+            </a:r>
+          </a:p>
+        </p:txBody>
+      </p:sp>
+      <p:sp>
+        <p:nvSpPr>
+          <p:cNvPr id="12" name="TextBox 11"/>
           <p:cNvSpPr txBox="1"/>
           <p:nvPr/>
         </p:nvSpPr>
         <p:spPr>
           <a:xfrm>
-            <a:off x="6309360" y="1874519"/>
-            <a:ext cx="5212080" cy="320040"/>
+            <a:off x="4507992" y="2651760"/>
+            <a:ext cx="3154680" cy="411480"/>
           </a:xfrm>
           <a:prstGeom prst="rect">
             <a:avLst/>
@@ -7989,27 +6590,27 @@
           <a:p>
             <a:pPr algn="l"/>
             <a:r>
-              <a:rPr sz="1400" b="1" i="0">
+              <a:rPr sz="1600" b="1" i="0">
                 <a:solidFill>
                   <a:srgbClr val="1E293B"/>
                 </a:solidFill>
                 <a:latin typeface="Arial"/>
               </a:rPr>
-              <a:t>Embed</a:t>
-            </a:r>
-          </a:p>
-        </p:txBody>
-      </p:sp>
-      <p:sp>
-        <p:nvSpPr>
-          <p:cNvPr id="30" name="TextBox 29"/>
+              <a:t>Symmetry</a:t>
+            </a:r>
+          </a:p>
+        </p:txBody>
+      </p:sp>
+      <p:sp>
+        <p:nvSpPr>
+          <p:cNvPr id="13" name="TextBox 12"/>
           <p:cNvSpPr txBox="1"/>
           <p:nvPr/>
         </p:nvSpPr>
         <p:spPr>
           <a:xfrm>
-            <a:off x="6309360" y="2176272"/>
-            <a:ext cx="5212080" cy="548640"/>
+            <a:off x="4507992" y="3108960"/>
+            <a:ext cx="3154680" cy="1097280"/>
           </a:xfrm>
           <a:prstGeom prst="rect">
             <a:avLst/>
@@ -8024,27 +6625,39 @@
           <a:p>
             <a:pPr algn="l"/>
             <a:r>
-              <a:rPr sz="1100" b="0" i="0">
+              <a:rPr sz="1250" b="0" i="0">
                 <a:solidFill>
                   <a:srgbClr val="64748B"/>
                 </a:solidFill>
                 <a:latin typeface="Arial"/>
               </a:rPr>
-              <a:t>Each atom starts with a learned vector for its element.</a:t>
-            </a:r>
-          </a:p>
-        </p:txBody>
-      </p:sp>
-      <p:sp>
-        <p:nvSpPr>
-          <p:cNvPr id="31" name="Rounded Rectangle 30"/>
+              <a:t>Translate, rotate or relabel identical atoms: the energy must not change; forces must rotate along.</a:t>
+            </a:r>
+          </a:p>
+          <a:p>
+            <a:pPr algn="l"/>
+            <a:r>
+              <a:rPr sz="1250" b="0" i="0">
+                <a:solidFill>
+                  <a:srgbClr val="64748B"/>
+                </a:solidFill>
+                <a:latin typeface="Arial"/>
+              </a:rPr>
+              <a:t>Built into the architecture, not learned from data.</a:t>
+            </a:r>
+          </a:p>
+        </p:txBody>
+      </p:sp>
+      <p:sp>
+        <p:nvSpPr>
+          <p:cNvPr id="14" name="Rounded Rectangle 13"/>
           <p:cNvSpPr/>
           <p:nvPr/>
         </p:nvSpPr>
         <p:spPr>
           <a:xfrm>
-            <a:off x="5532120" y="2834639"/>
-            <a:ext cx="6080760" cy="960120"/>
+            <a:off x="8010144" y="1783080"/>
+            <a:ext cx="3611880" cy="2514600"/>
           </a:xfrm>
           <a:prstGeom prst="roundRect">
             <a:avLst>
@@ -8052,12 +6665,10 @@
             </a:avLst>
           </a:prstGeom>
           <a:solidFill>
-            <a:srgbClr val="FFFFFF"/>
+            <a:srgbClr val="F5F1F1"/>
           </a:solidFill>
-          <a:ln w="12700">
-            <a:solidFill>
-              <a:srgbClr val="E5E7EB"/>
-            </a:solidFill>
+          <a:ln>
+            <a:noFill/>
           </a:ln>
           <a:effectLst/>
         </p:spPr>
@@ -8085,13 +6696,13 @@
       </p:sp>
       <p:sp>
         <p:nvSpPr>
-          <p:cNvPr id="32" name="Oval 31"/>
+          <p:cNvPr id="15" name="Oval 14"/>
           <p:cNvSpPr/>
           <p:nvPr/>
         </p:nvSpPr>
         <p:spPr>
           <a:xfrm>
-            <a:off x="5669280" y="3063239"/>
+            <a:off x="8238744" y="1984248"/>
             <a:ext cx="502920" cy="502920"/>
           </a:xfrm>
           <a:prstGeom prst="ellipse">
@@ -8125,27 +6736,27 @@
           <a:p>
             <a:pPr algn="ctr"/>
             <a:r>
-              <a:rPr sz="1400" b="1">
+              <a:rPr sz="1300" b="1">
                 <a:solidFill>
                   <a:srgbClr val="FFFFFF"/>
                 </a:solidFill>
-                <a:latin typeface="Arial"/>
-              </a:rPr>
-              <a:t>2</a:t>
-            </a:r>
-          </a:p>
-        </p:txBody>
-      </p:sp>
-      <p:sp>
-        <p:nvSpPr>
-          <p:cNvPr id="33" name="TextBox 32"/>
+                <a:latin typeface="Cambria Math"/>
+              </a:rPr>
+              <a:t>∇</a:t>
+            </a:r>
+          </a:p>
+        </p:txBody>
+      </p:sp>
+      <p:sp>
+        <p:nvSpPr>
+          <p:cNvPr id="16" name="TextBox 15"/>
           <p:cNvSpPr txBox="1"/>
           <p:nvPr/>
         </p:nvSpPr>
         <p:spPr>
           <a:xfrm>
-            <a:off x="6309360" y="2926079"/>
-            <a:ext cx="5212080" cy="320040"/>
+            <a:off x="8238744" y="2651760"/>
+            <a:ext cx="3154680" cy="411480"/>
           </a:xfrm>
           <a:prstGeom prst="rect">
             <a:avLst/>
@@ -8160,27 +6771,27 @@
           <a:p>
             <a:pPr algn="l"/>
             <a:r>
-              <a:rPr sz="1400" b="1" i="0">
+              <a:rPr sz="1600" b="1" i="0">
                 <a:solidFill>
                   <a:srgbClr val="1E293B"/>
                 </a:solidFill>
                 <a:latin typeface="Arial"/>
               </a:rPr>
-              <a:t>Collect neighbours</a:t>
-            </a:r>
-          </a:p>
-        </p:txBody>
-      </p:sp>
-      <p:sp>
-        <p:nvSpPr>
-          <p:cNvPr id="34" name="TextBox 33"/>
+              <a:t>Forces by differentiation</a:t>
+            </a:r>
+          </a:p>
+        </p:txBody>
+      </p:sp>
+      <p:sp>
+        <p:nvSpPr>
+          <p:cNvPr id="17" name="TextBox 16"/>
           <p:cNvSpPr txBox="1"/>
           <p:nvPr/>
         </p:nvSpPr>
         <p:spPr>
           <a:xfrm>
-            <a:off x="6309360" y="3227832"/>
-            <a:ext cx="5212080" cy="548640"/>
+            <a:off x="8238744" y="3108960"/>
+            <a:ext cx="3154680" cy="1097280"/>
           </a:xfrm>
           <a:prstGeom prst="rect">
             <a:avLst/>
@@ -8195,27 +6806,74 @@
           <a:p>
             <a:pPr algn="l"/>
             <a:r>
-              <a:rPr sz="1100" b="0" i="0">
+              <a:rPr sz="1250" b="0" i="0">
                 <a:solidFill>
                   <a:srgbClr val="64748B"/>
                 </a:solidFill>
                 <a:latin typeface="Arial"/>
               </a:rPr>
-              <a:t>For every neighbour: distance (radial basis) × direction (spherical harmonics) × its features. Summed: a two-body description Aᵢ.</a:t>
-            </a:r>
-          </a:p>
-        </p:txBody>
-      </p:sp>
-      <p:sp>
-        <p:nvSpPr>
-          <p:cNvPr id="35" name="Rounded Rectangle 34"/>
+              <a:t>F = −∂E/∂r, computed exactly by automatic differentiation.</a:t>
+            </a:r>
+          </a:p>
+          <a:p>
+            <a:pPr algn="l"/>
+            <a:r>
+              <a:rPr sz="1250" b="0" i="0">
+                <a:solidFill>
+                  <a:srgbClr val="64748B"/>
+                </a:solidFill>
+                <a:latin typeface="Arial"/>
+              </a:rPr>
+              <a:t>Energy-conserving by construction, and every DFT structure gives 3N force labels — most of the training signal.</a:t>
+            </a:r>
+          </a:p>
+        </p:txBody>
+      </p:sp>
+      <p:sp>
+        <p:nvSpPr>
+          <p:cNvPr id="18" name="TextBox 17"/>
+          <p:cNvSpPr txBox="1"/>
+          <p:nvPr/>
+        </p:nvSpPr>
+        <p:spPr>
+          <a:xfrm>
+            <a:off x="548640" y="4526280"/>
+            <a:ext cx="11064240" cy="274320"/>
+          </a:xfrm>
+          <a:prstGeom prst="rect">
+            <a:avLst/>
+          </a:prstGeom>
+          <a:noFill/>
+        </p:spPr>
+        <p:txBody>
+          <a:bodyPr wrap="square" anchor="t" lIns="45720" rIns="45720" tIns="18288" bIns="18288">
+            <a:spAutoFit/>
+          </a:bodyPr>
+          <a:lstStyle/>
+          <a:p>
+            <a:pPr algn="l"/>
+            <a:r>
+              <a:rPr sz="1100" b="1" i="0">
+                <a:solidFill>
+                  <a:srgbClr val="B87878"/>
+                </a:solidFill>
+                <a:latin typeface="Arial"/>
+              </a:rPr>
+              <a:t>LINEAGE</a:t>
+            </a:r>
+          </a:p>
+        </p:txBody>
+      </p:sp>
+      <p:sp>
+        <p:nvSpPr>
+          <p:cNvPr id="19" name="Rounded Rectangle 18"/>
           <p:cNvSpPr/>
           <p:nvPr/>
         </p:nvSpPr>
         <p:spPr>
           <a:xfrm>
-            <a:off x="5532120" y="3886200"/>
-            <a:ext cx="6080760" cy="960120"/>
+            <a:off x="548640" y="4846320"/>
+            <a:ext cx="2066543" cy="1143000"/>
           </a:xfrm>
           <a:prstGeom prst="roundRect">
             <a:avLst>
@@ -8223,12 +6881,10 @@
             </a:avLst>
           </a:prstGeom>
           <a:solidFill>
-            <a:srgbClr val="FFFFFF"/>
+            <a:srgbClr val="F5F1F1"/>
           </a:solidFill>
-          <a:ln w="12700">
-            <a:solidFill>
-              <a:srgbClr val="E5E7EB"/>
-            </a:solidFill>
+          <a:ln>
+            <a:noFill/>
           </a:ln>
           <a:effectLst/>
         </p:spPr>
@@ -8256,17 +6912,721 @@
       </p:sp>
       <p:sp>
         <p:nvSpPr>
-          <p:cNvPr id="36" name="Oval 35"/>
+          <p:cNvPr id="20" name="TextBox 19"/>
+          <p:cNvSpPr txBox="1"/>
+          <p:nvPr/>
+        </p:nvSpPr>
+        <p:spPr>
+          <a:xfrm>
+            <a:off x="685800" y="4919472"/>
+            <a:ext cx="1828800" cy="274320"/>
+          </a:xfrm>
+          <a:prstGeom prst="rect">
+            <a:avLst/>
+          </a:prstGeom>
+          <a:noFill/>
+        </p:spPr>
+        <p:txBody>
+          <a:bodyPr wrap="square" anchor="t" lIns="45720" rIns="45720" tIns="18288" bIns="18288">
+            <a:spAutoFit/>
+          </a:bodyPr>
+          <a:lstStyle/>
+          <a:p>
+            <a:pPr algn="l"/>
+            <a:r>
+              <a:rPr sz="1100" b="1" i="0">
+                <a:solidFill>
+                  <a:srgbClr val="B87878"/>
+                </a:solidFill>
+                <a:latin typeface="Arial"/>
+              </a:rPr>
+              <a:t>2007</a:t>
+            </a:r>
+          </a:p>
+        </p:txBody>
+      </p:sp>
+      <p:sp>
+        <p:nvSpPr>
+          <p:cNvPr id="21" name="TextBox 20"/>
+          <p:cNvSpPr txBox="1"/>
+          <p:nvPr/>
+        </p:nvSpPr>
+        <p:spPr>
+          <a:xfrm>
+            <a:off x="685800" y="5166360"/>
+            <a:ext cx="1828800" cy="320040"/>
+          </a:xfrm>
+          <a:prstGeom prst="rect">
+            <a:avLst/>
+          </a:prstGeom>
+          <a:noFill/>
+        </p:spPr>
+        <p:txBody>
+          <a:bodyPr wrap="square" anchor="t" lIns="45720" rIns="45720" tIns="18288" bIns="18288">
+            <a:spAutoFit/>
+          </a:bodyPr>
+          <a:lstStyle/>
+          <a:p>
+            <a:pPr algn="l"/>
+            <a:r>
+              <a:rPr sz="1500" b="1" i="0">
+                <a:solidFill>
+                  <a:srgbClr val="1E293B"/>
+                </a:solidFill>
+                <a:latin typeface="Arial"/>
+              </a:rPr>
+              <a:t>Behler–Parrinello</a:t>
+            </a:r>
+          </a:p>
+        </p:txBody>
+      </p:sp>
+      <p:sp>
+        <p:nvSpPr>
+          <p:cNvPr id="22" name="TextBox 21"/>
+          <p:cNvSpPr txBox="1"/>
+          <p:nvPr/>
+        </p:nvSpPr>
+        <p:spPr>
+          <a:xfrm>
+            <a:off x="685800" y="5486400"/>
+            <a:ext cx="1828800" cy="457200"/>
+          </a:xfrm>
+          <a:prstGeom prst="rect">
+            <a:avLst/>
+          </a:prstGeom>
+          <a:noFill/>
+        </p:spPr>
+        <p:txBody>
+          <a:bodyPr wrap="square" anchor="t" lIns="45720" rIns="45720" tIns="18288" bIns="18288">
+            <a:spAutoFit/>
+          </a:bodyPr>
+          <a:lstStyle/>
+          <a:p>
+            <a:pPr algn="l"/>
+            <a:r>
+              <a:rPr sz="1100" b="0" i="0">
+                <a:solidFill>
+                  <a:srgbClr val="64748B"/>
+                </a:solidFill>
+                <a:latin typeface="Arial"/>
+              </a:rPr>
+              <a:t>atomic energies + neural nets</a:t>
+            </a:r>
+          </a:p>
+        </p:txBody>
+      </p:sp>
+      <p:cxnSp>
+        <p:nvCxnSpPr>
+          <p:cNvPr id="23" name="Connector 22"/>
+          <p:cNvCxnSpPr/>
+          <p:nvPr/>
+        </p:nvCxnSpPr>
+        <p:spPr>
+          <a:xfrm>
+            <a:off x="2615184" y="5413248"/>
+            <a:ext cx="182880" cy="0"/>
+          </a:xfrm>
+          <a:prstGeom prst="line">
+            <a:avLst/>
+          </a:prstGeom>
+          <a:ln w="19050">
+            <a:solidFill>
+              <a:srgbClr val="94A3B8"/>
+            </a:solidFill>
+            <a:tailEnd type="triangle" w="med" len="med"/>
+          </a:ln>
+        </p:spPr>
+        <p:style>
+          <a:lnRef idx="2">
+            <a:schemeClr val="accent1"/>
+          </a:lnRef>
+          <a:fillRef idx="0">
+            <a:schemeClr val="accent1"/>
+          </a:fillRef>
+          <a:effectRef idx="1">
+            <a:schemeClr val="accent1"/>
+          </a:effectRef>
+          <a:fontRef idx="minor">
+            <a:schemeClr val="tx1"/>
+          </a:fontRef>
+        </p:style>
+      </p:cxnSp>
+      <p:sp>
+        <p:nvSpPr>
+          <p:cNvPr id="24" name="Rounded Rectangle 23"/>
           <p:cNvSpPr/>
           <p:nvPr/>
         </p:nvSpPr>
         <p:spPr>
           <a:xfrm>
-            <a:off x="5669280" y="4114800"/>
-            <a:ext cx="502920" cy="502920"/>
-          </a:xfrm>
-          <a:prstGeom prst="ellipse">
-            <a:avLst/>
+            <a:off x="2798064" y="4846320"/>
+            <a:ext cx="2066543" cy="1143000"/>
+          </a:xfrm>
+          <a:prstGeom prst="roundRect">
+            <a:avLst>
+              <a:gd name="adj" fmla="val 8000"/>
+            </a:avLst>
+          </a:prstGeom>
+          <a:solidFill>
+            <a:srgbClr val="F5F1F1"/>
+          </a:solidFill>
+          <a:ln>
+            <a:noFill/>
+          </a:ln>
+          <a:effectLst/>
+        </p:spPr>
+        <p:style>
+          <a:lnRef idx="1">
+            <a:schemeClr val="accent1"/>
+          </a:lnRef>
+          <a:fillRef idx="3">
+            <a:schemeClr val="accent1"/>
+          </a:fillRef>
+          <a:effectRef idx="2">
+            <a:schemeClr val="accent1"/>
+          </a:effectRef>
+          <a:fontRef idx="minor">
+            <a:schemeClr val="lt1"/>
+          </a:fontRef>
+        </p:style>
+        <p:txBody>
+          <a:bodyPr rtlCol="0" anchor="ctr"/>
+          <a:lstStyle/>
+          <a:p>
+            <a:pPr algn="ctr"/>
+          </a:p>
+        </p:txBody>
+      </p:sp>
+      <p:sp>
+        <p:nvSpPr>
+          <p:cNvPr id="25" name="TextBox 24"/>
+          <p:cNvSpPr txBox="1"/>
+          <p:nvPr/>
+        </p:nvSpPr>
+        <p:spPr>
+          <a:xfrm>
+            <a:off x="2935224" y="4919472"/>
+            <a:ext cx="1828800" cy="274320"/>
+          </a:xfrm>
+          <a:prstGeom prst="rect">
+            <a:avLst/>
+          </a:prstGeom>
+          <a:noFill/>
+        </p:spPr>
+        <p:txBody>
+          <a:bodyPr wrap="square" anchor="t" lIns="45720" rIns="45720" tIns="18288" bIns="18288">
+            <a:spAutoFit/>
+          </a:bodyPr>
+          <a:lstStyle/>
+          <a:p>
+            <a:pPr algn="l"/>
+            <a:r>
+              <a:rPr sz="1100" b="1" i="0">
+                <a:solidFill>
+                  <a:srgbClr val="B87878"/>
+                </a:solidFill>
+                <a:latin typeface="Arial"/>
+              </a:rPr>
+              <a:t>2010</a:t>
+            </a:r>
+          </a:p>
+        </p:txBody>
+      </p:sp>
+      <p:sp>
+        <p:nvSpPr>
+          <p:cNvPr id="26" name="TextBox 25"/>
+          <p:cNvSpPr txBox="1"/>
+          <p:nvPr/>
+        </p:nvSpPr>
+        <p:spPr>
+          <a:xfrm>
+            <a:off x="2935224" y="5166360"/>
+            <a:ext cx="1828800" cy="320040"/>
+          </a:xfrm>
+          <a:prstGeom prst="rect">
+            <a:avLst/>
+          </a:prstGeom>
+          <a:noFill/>
+        </p:spPr>
+        <p:txBody>
+          <a:bodyPr wrap="square" anchor="t" lIns="45720" rIns="45720" tIns="18288" bIns="18288">
+            <a:spAutoFit/>
+          </a:bodyPr>
+          <a:lstStyle/>
+          <a:p>
+            <a:pPr algn="l"/>
+            <a:r>
+              <a:rPr sz="1500" b="1" i="0">
+                <a:solidFill>
+                  <a:srgbClr val="1E293B"/>
+                </a:solidFill>
+                <a:latin typeface="Arial"/>
+              </a:rPr>
+              <a:t>GAP</a:t>
+            </a:r>
+          </a:p>
+        </p:txBody>
+      </p:sp>
+      <p:sp>
+        <p:nvSpPr>
+          <p:cNvPr id="27" name="TextBox 26"/>
+          <p:cNvSpPr txBox="1"/>
+          <p:nvPr/>
+        </p:nvSpPr>
+        <p:spPr>
+          <a:xfrm>
+            <a:off x="2935224" y="5486400"/>
+            <a:ext cx="1828800" cy="457200"/>
+          </a:xfrm>
+          <a:prstGeom prst="rect">
+            <a:avLst/>
+          </a:prstGeom>
+          <a:noFill/>
+        </p:spPr>
+        <p:txBody>
+          <a:bodyPr wrap="square" anchor="t" lIns="45720" rIns="45720" tIns="18288" bIns="18288">
+            <a:spAutoFit/>
+          </a:bodyPr>
+          <a:lstStyle/>
+          <a:p>
+            <a:pPr algn="l"/>
+            <a:r>
+              <a:rPr sz="1100" b="0" i="0">
+                <a:solidFill>
+                  <a:srgbClr val="64748B"/>
+                </a:solidFill>
+                <a:latin typeface="Arial"/>
+              </a:rPr>
+              <a:t>Gaussian processes</a:t>
+            </a:r>
+          </a:p>
+        </p:txBody>
+      </p:sp>
+      <p:cxnSp>
+        <p:nvCxnSpPr>
+          <p:cNvPr id="28" name="Connector 27"/>
+          <p:cNvCxnSpPr/>
+          <p:nvPr/>
+        </p:nvCxnSpPr>
+        <p:spPr>
+          <a:xfrm>
+            <a:off x="4864608" y="5413248"/>
+            <a:ext cx="182880" cy="0"/>
+          </a:xfrm>
+          <a:prstGeom prst="line">
+            <a:avLst/>
+          </a:prstGeom>
+          <a:ln w="19050">
+            <a:solidFill>
+              <a:srgbClr val="94A3B8"/>
+            </a:solidFill>
+            <a:tailEnd type="triangle" w="med" len="med"/>
+          </a:ln>
+        </p:spPr>
+        <p:style>
+          <a:lnRef idx="2">
+            <a:schemeClr val="accent1"/>
+          </a:lnRef>
+          <a:fillRef idx="0">
+            <a:schemeClr val="accent1"/>
+          </a:fillRef>
+          <a:effectRef idx="1">
+            <a:schemeClr val="accent1"/>
+          </a:effectRef>
+          <a:fontRef idx="minor">
+            <a:schemeClr val="tx1"/>
+          </a:fontRef>
+        </p:style>
+      </p:cxnSp>
+      <p:sp>
+        <p:nvSpPr>
+          <p:cNvPr id="29" name="Rounded Rectangle 28"/>
+          <p:cNvSpPr/>
+          <p:nvPr/>
+        </p:nvSpPr>
+        <p:spPr>
+          <a:xfrm>
+            <a:off x="5047488" y="4846320"/>
+            <a:ext cx="2066543" cy="1143000"/>
+          </a:xfrm>
+          <a:prstGeom prst="roundRect">
+            <a:avLst>
+              <a:gd name="adj" fmla="val 8000"/>
+            </a:avLst>
+          </a:prstGeom>
+          <a:solidFill>
+            <a:srgbClr val="F5F1F1"/>
+          </a:solidFill>
+          <a:ln>
+            <a:noFill/>
+          </a:ln>
+          <a:effectLst/>
+        </p:spPr>
+        <p:style>
+          <a:lnRef idx="1">
+            <a:schemeClr val="accent1"/>
+          </a:lnRef>
+          <a:fillRef idx="3">
+            <a:schemeClr val="accent1"/>
+          </a:fillRef>
+          <a:effectRef idx="2">
+            <a:schemeClr val="accent1"/>
+          </a:effectRef>
+          <a:fontRef idx="minor">
+            <a:schemeClr val="lt1"/>
+          </a:fontRef>
+        </p:style>
+        <p:txBody>
+          <a:bodyPr rtlCol="0" anchor="ctr"/>
+          <a:lstStyle/>
+          <a:p>
+            <a:pPr algn="ctr"/>
+          </a:p>
+        </p:txBody>
+      </p:sp>
+      <p:sp>
+        <p:nvSpPr>
+          <p:cNvPr id="30" name="TextBox 29"/>
+          <p:cNvSpPr txBox="1"/>
+          <p:nvPr/>
+        </p:nvSpPr>
+        <p:spPr>
+          <a:xfrm>
+            <a:off x="5184648" y="4919472"/>
+            <a:ext cx="1828800" cy="274320"/>
+          </a:xfrm>
+          <a:prstGeom prst="rect">
+            <a:avLst/>
+          </a:prstGeom>
+          <a:noFill/>
+        </p:spPr>
+        <p:txBody>
+          <a:bodyPr wrap="square" anchor="t" lIns="45720" rIns="45720" tIns="18288" bIns="18288">
+            <a:spAutoFit/>
+          </a:bodyPr>
+          <a:lstStyle/>
+          <a:p>
+            <a:pPr algn="l"/>
+            <a:r>
+              <a:rPr sz="1100" b="1" i="0">
+                <a:solidFill>
+                  <a:srgbClr val="B87878"/>
+                </a:solidFill>
+                <a:latin typeface="Arial"/>
+              </a:rPr>
+              <a:t>2019</a:t>
+            </a:r>
+          </a:p>
+        </p:txBody>
+      </p:sp>
+      <p:sp>
+        <p:nvSpPr>
+          <p:cNvPr id="31" name="TextBox 30"/>
+          <p:cNvSpPr txBox="1"/>
+          <p:nvPr/>
+        </p:nvSpPr>
+        <p:spPr>
+          <a:xfrm>
+            <a:off x="5184648" y="5166360"/>
+            <a:ext cx="1828800" cy="320040"/>
+          </a:xfrm>
+          <a:prstGeom prst="rect">
+            <a:avLst/>
+          </a:prstGeom>
+          <a:noFill/>
+        </p:spPr>
+        <p:txBody>
+          <a:bodyPr wrap="square" anchor="t" lIns="45720" rIns="45720" tIns="18288" bIns="18288">
+            <a:spAutoFit/>
+          </a:bodyPr>
+          <a:lstStyle/>
+          <a:p>
+            <a:pPr algn="l"/>
+            <a:r>
+              <a:rPr sz="1500" b="1" i="0">
+                <a:solidFill>
+                  <a:srgbClr val="1E293B"/>
+                </a:solidFill>
+                <a:latin typeface="Arial"/>
+              </a:rPr>
+              <a:t>ACE</a:t>
+            </a:r>
+          </a:p>
+        </p:txBody>
+      </p:sp>
+      <p:sp>
+        <p:nvSpPr>
+          <p:cNvPr id="32" name="TextBox 31"/>
+          <p:cNvSpPr txBox="1"/>
+          <p:nvPr/>
+        </p:nvSpPr>
+        <p:spPr>
+          <a:xfrm>
+            <a:off x="5184648" y="5486400"/>
+            <a:ext cx="1828800" cy="457200"/>
+          </a:xfrm>
+          <a:prstGeom prst="rect">
+            <a:avLst/>
+          </a:prstGeom>
+          <a:noFill/>
+        </p:spPr>
+        <p:txBody>
+          <a:bodyPr wrap="square" anchor="t" lIns="45720" rIns="45720" tIns="18288" bIns="18288">
+            <a:spAutoFit/>
+          </a:bodyPr>
+          <a:lstStyle/>
+          <a:p>
+            <a:pPr algn="l"/>
+            <a:r>
+              <a:rPr sz="1100" b="0" i="0">
+                <a:solidFill>
+                  <a:srgbClr val="64748B"/>
+                </a:solidFill>
+                <a:latin typeface="Arial"/>
+              </a:rPr>
+              <a:t>complete many-body basis</a:t>
+            </a:r>
+          </a:p>
+        </p:txBody>
+      </p:sp>
+      <p:cxnSp>
+        <p:nvCxnSpPr>
+          <p:cNvPr id="33" name="Connector 32"/>
+          <p:cNvCxnSpPr/>
+          <p:nvPr/>
+        </p:nvCxnSpPr>
+        <p:spPr>
+          <a:xfrm>
+            <a:off x="7114031" y="5413248"/>
+            <a:ext cx="182881" cy="0"/>
+          </a:xfrm>
+          <a:prstGeom prst="line">
+            <a:avLst/>
+          </a:prstGeom>
+          <a:ln w="19050">
+            <a:solidFill>
+              <a:srgbClr val="94A3B8"/>
+            </a:solidFill>
+            <a:tailEnd type="triangle" w="med" len="med"/>
+          </a:ln>
+        </p:spPr>
+        <p:style>
+          <a:lnRef idx="2">
+            <a:schemeClr val="accent1"/>
+          </a:lnRef>
+          <a:fillRef idx="0">
+            <a:schemeClr val="accent1"/>
+          </a:fillRef>
+          <a:effectRef idx="1">
+            <a:schemeClr val="accent1"/>
+          </a:effectRef>
+          <a:fontRef idx="minor">
+            <a:schemeClr val="tx1"/>
+          </a:fontRef>
+        </p:style>
+      </p:cxnSp>
+      <p:sp>
+        <p:nvSpPr>
+          <p:cNvPr id="34" name="Rounded Rectangle 33"/>
+          <p:cNvSpPr/>
+          <p:nvPr/>
+        </p:nvSpPr>
+        <p:spPr>
+          <a:xfrm>
+            <a:off x="7296912" y="4846320"/>
+            <a:ext cx="2066543" cy="1143000"/>
+          </a:xfrm>
+          <a:prstGeom prst="roundRect">
+            <a:avLst>
+              <a:gd name="adj" fmla="val 8000"/>
+            </a:avLst>
+          </a:prstGeom>
+          <a:solidFill>
+            <a:srgbClr val="F5F1F1"/>
+          </a:solidFill>
+          <a:ln>
+            <a:noFill/>
+          </a:ln>
+          <a:effectLst/>
+        </p:spPr>
+        <p:style>
+          <a:lnRef idx="1">
+            <a:schemeClr val="accent1"/>
+          </a:lnRef>
+          <a:fillRef idx="3">
+            <a:schemeClr val="accent1"/>
+          </a:fillRef>
+          <a:effectRef idx="2">
+            <a:schemeClr val="accent1"/>
+          </a:effectRef>
+          <a:fontRef idx="minor">
+            <a:schemeClr val="lt1"/>
+          </a:fontRef>
+        </p:style>
+        <p:txBody>
+          <a:bodyPr rtlCol="0" anchor="ctr"/>
+          <a:lstStyle/>
+          <a:p>
+            <a:pPr algn="ctr"/>
+          </a:p>
+        </p:txBody>
+      </p:sp>
+      <p:sp>
+        <p:nvSpPr>
+          <p:cNvPr id="35" name="TextBox 34"/>
+          <p:cNvSpPr txBox="1"/>
+          <p:nvPr/>
+        </p:nvSpPr>
+        <p:spPr>
+          <a:xfrm>
+            <a:off x="7434071" y="4919472"/>
+            <a:ext cx="1828800" cy="274320"/>
+          </a:xfrm>
+          <a:prstGeom prst="rect">
+            <a:avLst/>
+          </a:prstGeom>
+          <a:noFill/>
+        </p:spPr>
+        <p:txBody>
+          <a:bodyPr wrap="square" anchor="t" lIns="45720" rIns="45720" tIns="18288" bIns="18288">
+            <a:spAutoFit/>
+          </a:bodyPr>
+          <a:lstStyle/>
+          <a:p>
+            <a:pPr algn="l"/>
+            <a:r>
+              <a:rPr sz="1100" b="1" i="0">
+                <a:solidFill>
+                  <a:srgbClr val="B87878"/>
+                </a:solidFill>
+                <a:latin typeface="Arial"/>
+              </a:rPr>
+              <a:t>2022</a:t>
+            </a:r>
+          </a:p>
+        </p:txBody>
+      </p:sp>
+      <p:sp>
+        <p:nvSpPr>
+          <p:cNvPr id="36" name="TextBox 35"/>
+          <p:cNvSpPr txBox="1"/>
+          <p:nvPr/>
+        </p:nvSpPr>
+        <p:spPr>
+          <a:xfrm>
+            <a:off x="7434071" y="5166360"/>
+            <a:ext cx="1828800" cy="320040"/>
+          </a:xfrm>
+          <a:prstGeom prst="rect">
+            <a:avLst/>
+          </a:prstGeom>
+          <a:noFill/>
+        </p:spPr>
+        <p:txBody>
+          <a:bodyPr wrap="square" anchor="t" lIns="45720" rIns="45720" tIns="18288" bIns="18288">
+            <a:spAutoFit/>
+          </a:bodyPr>
+          <a:lstStyle/>
+          <a:p>
+            <a:pPr algn="l"/>
+            <a:r>
+              <a:rPr sz="1500" b="1" i="0">
+                <a:solidFill>
+                  <a:srgbClr val="1E293B"/>
+                </a:solidFill>
+                <a:latin typeface="Arial"/>
+              </a:rPr>
+              <a:t>NequIP</a:t>
+            </a:r>
+          </a:p>
+        </p:txBody>
+      </p:sp>
+      <p:sp>
+        <p:nvSpPr>
+          <p:cNvPr id="37" name="TextBox 36"/>
+          <p:cNvSpPr txBox="1"/>
+          <p:nvPr/>
+        </p:nvSpPr>
+        <p:spPr>
+          <a:xfrm>
+            <a:off x="7434071" y="5486400"/>
+            <a:ext cx="1828800" cy="457200"/>
+          </a:xfrm>
+          <a:prstGeom prst="rect">
+            <a:avLst/>
+          </a:prstGeom>
+          <a:noFill/>
+        </p:spPr>
+        <p:txBody>
+          <a:bodyPr wrap="square" anchor="t" lIns="45720" rIns="45720" tIns="18288" bIns="18288">
+            <a:spAutoFit/>
+          </a:bodyPr>
+          <a:lstStyle/>
+          <a:p>
+            <a:pPr algn="l"/>
+            <a:r>
+              <a:rPr sz="1100" b="0" i="0">
+                <a:solidFill>
+                  <a:srgbClr val="64748B"/>
+                </a:solidFill>
+                <a:latin typeface="Arial"/>
+              </a:rPr>
+              <a:t>equivariant graph nets</a:t>
+            </a:r>
+          </a:p>
+        </p:txBody>
+      </p:sp>
+      <p:cxnSp>
+        <p:nvCxnSpPr>
+          <p:cNvPr id="38" name="Connector 37"/>
+          <p:cNvCxnSpPr/>
+          <p:nvPr/>
+        </p:nvCxnSpPr>
+        <p:spPr>
+          <a:xfrm>
+            <a:off x="9363455" y="5413248"/>
+            <a:ext cx="182881" cy="0"/>
+          </a:xfrm>
+          <a:prstGeom prst="line">
+            <a:avLst/>
+          </a:prstGeom>
+          <a:ln w="19050">
+            <a:solidFill>
+              <a:srgbClr val="94A3B8"/>
+            </a:solidFill>
+            <a:tailEnd type="triangle" w="med" len="med"/>
+          </a:ln>
+        </p:spPr>
+        <p:style>
+          <a:lnRef idx="2">
+            <a:schemeClr val="accent1"/>
+          </a:lnRef>
+          <a:fillRef idx="0">
+            <a:schemeClr val="accent1"/>
+          </a:fillRef>
+          <a:effectRef idx="1">
+            <a:schemeClr val="accent1"/>
+          </a:effectRef>
+          <a:fontRef idx="minor">
+            <a:schemeClr val="tx1"/>
+          </a:fontRef>
+        </p:style>
+      </p:cxnSp>
+      <p:sp>
+        <p:nvSpPr>
+          <p:cNvPr id="39" name="Rounded Rectangle 38"/>
+          <p:cNvSpPr/>
+          <p:nvPr/>
+        </p:nvSpPr>
+        <p:spPr>
+          <a:xfrm>
+            <a:off x="9546336" y="4846320"/>
+            <a:ext cx="2066543" cy="1143000"/>
+          </a:xfrm>
+          <a:prstGeom prst="roundRect">
+            <a:avLst>
+              <a:gd name="adj" fmla="val 8000"/>
+            </a:avLst>
           </a:prstGeom>
           <a:solidFill>
             <a:srgbClr val="500000"/>
@@ -8291,32 +7651,23 @@
           </a:fontRef>
         </p:style>
         <p:txBody>
-          <a:bodyPr rtlCol="0" anchor="ctr" lIns="0" rIns="0" tIns="0" bIns="0"/>
+          <a:bodyPr rtlCol="0" anchor="ctr"/>
           <a:lstStyle/>
           <a:p>
             <a:pPr algn="ctr"/>
-            <a:r>
-              <a:rPr sz="1400" b="1">
-                <a:solidFill>
-                  <a:srgbClr val="FFFFFF"/>
-                </a:solidFill>
-                <a:latin typeface="Arial"/>
-              </a:rPr>
-              <a:t>3</a:t>
-            </a:r>
-          </a:p>
-        </p:txBody>
-      </p:sp>
-      <p:sp>
-        <p:nvSpPr>
-          <p:cNvPr id="37" name="TextBox 36"/>
+          </a:p>
+        </p:txBody>
+      </p:sp>
+      <p:sp>
+        <p:nvSpPr>
+          <p:cNvPr id="40" name="TextBox 39"/>
           <p:cNvSpPr txBox="1"/>
           <p:nvPr/>
         </p:nvSpPr>
         <p:spPr>
           <a:xfrm>
-            <a:off x="6309360" y="3977639"/>
-            <a:ext cx="5212080" cy="320040"/>
+            <a:off x="9683496" y="4919472"/>
+            <a:ext cx="1828800" cy="274320"/>
           </a:xfrm>
           <a:prstGeom prst="rect">
             <a:avLst/>
@@ -8331,27 +7682,27 @@
           <a:p>
             <a:pPr algn="l"/>
             <a:r>
-              <a:rPr sz="1400" b="1" i="0">
-                <a:solidFill>
-                  <a:srgbClr val="1E293B"/>
-                </a:solidFill>
-                <a:latin typeface="Arial"/>
-              </a:rPr>
-              <a:t>Multiply</a:t>
-            </a:r>
-          </a:p>
-        </p:txBody>
-      </p:sp>
-      <p:sp>
-        <p:nvSpPr>
-          <p:cNvPr id="38" name="TextBox 37"/>
+              <a:rPr sz="1100" b="1" i="0">
+                <a:solidFill>
+                  <a:srgbClr val="E3C4C4"/>
+                </a:solidFill>
+                <a:latin typeface="Arial"/>
+              </a:rPr>
+              <a:t>2022</a:t>
+            </a:r>
+          </a:p>
+        </p:txBody>
+      </p:sp>
+      <p:sp>
+        <p:nvSpPr>
+          <p:cNvPr id="41" name="TextBox 40"/>
           <p:cNvSpPr txBox="1"/>
           <p:nvPr/>
         </p:nvSpPr>
         <p:spPr>
           <a:xfrm>
-            <a:off x="6309360" y="4279392"/>
-            <a:ext cx="5212080" cy="548640"/>
+            <a:off x="9683496" y="5166360"/>
+            <a:ext cx="1828800" cy="320040"/>
           </a:xfrm>
           <a:prstGeom prst="rect">
             <a:avLst/>
@@ -8366,128 +7717,27 @@
           <a:p>
             <a:pPr algn="l"/>
             <a:r>
-              <a:rPr sz="1100" b="0" i="0">
-                <a:solidFill>
-                  <a:srgbClr val="64748B"/>
-                </a:solidFill>
-                <a:latin typeface="Arial"/>
-              </a:rPr>
-              <a:t>Products of Aᵢ with itself encode angles and dihedrals — many-body information in one message (body order 4). This is the ACE idea.</a:t>
-            </a:r>
-          </a:p>
-        </p:txBody>
-      </p:sp>
-      <p:sp>
-        <p:nvSpPr>
-          <p:cNvPr id="39" name="Rounded Rectangle 38"/>
-          <p:cNvSpPr/>
-          <p:nvPr/>
-        </p:nvSpPr>
-        <p:spPr>
-          <a:xfrm>
-            <a:off x="5532120" y="4937760"/>
-            <a:ext cx="6080760" cy="960120"/>
-          </a:xfrm>
-          <a:prstGeom prst="roundRect">
-            <a:avLst>
-              <a:gd name="adj" fmla="val 8000"/>
-            </a:avLst>
-          </a:prstGeom>
-          <a:solidFill>
-            <a:srgbClr val="FFFFFF"/>
-          </a:solidFill>
-          <a:ln w="12700">
-            <a:solidFill>
-              <a:srgbClr val="E5E7EB"/>
-            </a:solidFill>
-          </a:ln>
-          <a:effectLst/>
-        </p:spPr>
-        <p:style>
-          <a:lnRef idx="1">
-            <a:schemeClr val="accent1"/>
-          </a:lnRef>
-          <a:fillRef idx="3">
-            <a:schemeClr val="accent1"/>
-          </a:fillRef>
-          <a:effectRef idx="2">
-            <a:schemeClr val="accent1"/>
-          </a:effectRef>
-          <a:fontRef idx="minor">
-            <a:schemeClr val="lt1"/>
-          </a:fontRef>
-        </p:style>
-        <p:txBody>
-          <a:bodyPr rtlCol="0" anchor="ctr"/>
-          <a:lstStyle/>
-          <a:p>
-            <a:pPr algn="ctr"/>
-          </a:p>
-        </p:txBody>
-      </p:sp>
-      <p:sp>
-        <p:nvSpPr>
-          <p:cNvPr id="40" name="Oval 39"/>
-          <p:cNvSpPr/>
-          <p:nvPr/>
-        </p:nvSpPr>
-        <p:spPr>
-          <a:xfrm>
-            <a:off x="5669280" y="5166360"/>
-            <a:ext cx="502920" cy="502920"/>
-          </a:xfrm>
-          <a:prstGeom prst="ellipse">
-            <a:avLst/>
-          </a:prstGeom>
-          <a:solidFill>
-            <a:srgbClr val="500000"/>
-          </a:solidFill>
-          <a:ln>
-            <a:noFill/>
-          </a:ln>
-          <a:effectLst/>
-        </p:spPr>
-        <p:style>
-          <a:lnRef idx="1">
-            <a:schemeClr val="accent1"/>
-          </a:lnRef>
-          <a:fillRef idx="3">
-            <a:schemeClr val="accent1"/>
-          </a:fillRef>
-          <a:effectRef idx="2">
-            <a:schemeClr val="accent1"/>
-          </a:effectRef>
-          <a:fontRef idx="minor">
-            <a:schemeClr val="lt1"/>
-          </a:fontRef>
-        </p:style>
-        <p:txBody>
-          <a:bodyPr rtlCol="0" anchor="ctr" lIns="0" rIns="0" tIns="0" bIns="0"/>
-          <a:lstStyle/>
-          <a:p>
-            <a:pPr algn="ctr"/>
-            <a:r>
-              <a:rPr sz="1400" b="1">
+              <a:rPr sz="1500" b="1" i="0">
                 <a:solidFill>
                   <a:srgbClr val="FFFFFF"/>
                 </a:solidFill>
                 <a:latin typeface="Arial"/>
               </a:rPr>
-              <a:t>4</a:t>
-            </a:r>
-          </a:p>
-        </p:txBody>
-      </p:sp>
-      <p:sp>
-        <p:nvSpPr>
-          <p:cNvPr id="41" name="TextBox 40"/>
+              <a:t>MACE</a:t>
+            </a:r>
+          </a:p>
+        </p:txBody>
+      </p:sp>
+      <p:sp>
+        <p:nvSpPr>
+          <p:cNvPr id="42" name="TextBox 41"/>
           <p:cNvSpPr txBox="1"/>
           <p:nvPr/>
         </p:nvSpPr>
         <p:spPr>
           <a:xfrm>
-            <a:off x="6309360" y="5029200"/>
-            <a:ext cx="5212080" cy="320040"/>
+            <a:off x="9683496" y="5486400"/>
+            <a:ext cx="1828800" cy="457200"/>
           </a:xfrm>
           <a:prstGeom prst="rect">
             <a:avLst/>
@@ -8502,27 +7752,27 @@
           <a:p>
             <a:pPr algn="l"/>
             <a:r>
-              <a:rPr sz="1400" b="1" i="0">
-                <a:solidFill>
-                  <a:srgbClr val="1E293B"/>
-                </a:solidFill>
-                <a:latin typeface="Arial"/>
-              </a:rPr>
-              <a:t>Update, read out, repeat</a:t>
-            </a:r>
-          </a:p>
-        </p:txBody>
-      </p:sp>
-      <p:sp>
-        <p:nvSpPr>
-          <p:cNvPr id="42" name="TextBox 41"/>
+              <a:rPr sz="1100" b="0" i="0">
+                <a:solidFill>
+                  <a:srgbClr val="E3C4C4"/>
+                </a:solidFill>
+                <a:latin typeface="Arial"/>
+              </a:rPr>
+              <a:t>ACE products inside an equivariant GNN</a:t>
+            </a:r>
+          </a:p>
+        </p:txBody>
+      </p:sp>
+      <p:sp>
+        <p:nvSpPr>
+          <p:cNvPr id="43" name="TextBox 42"/>
           <p:cNvSpPr txBox="1"/>
           <p:nvPr/>
         </p:nvSpPr>
         <p:spPr>
           <a:xfrm>
-            <a:off x="6309360" y="5330952"/>
-            <a:ext cx="5212080" cy="548640"/>
+            <a:off x="548640" y="6428232"/>
+            <a:ext cx="9601200" cy="228600"/>
           </a:xfrm>
           <a:prstGeom prst="rect">
             <a:avLst/>
@@ -8537,83 +7787,13 @@
           <a:p>
             <a:pPr algn="l"/>
             <a:r>
-              <a:rPr sz="1100" b="0" i="0">
-                <a:solidFill>
-                  <a:srgbClr val="64748B"/>
-                </a:solidFill>
-                <a:latin typeface="Arial"/>
-              </a:rPr>
-              <a:t>Update the atom's features; after 2 layers a readout gives Eᵢ. Total E = Σ Eᵢ; forces = −∂E/∂r.</a:t>
-            </a:r>
-          </a:p>
-        </p:txBody>
-      </p:sp>
-      <p:sp>
-        <p:nvSpPr>
-          <p:cNvPr id="43" name="TextBox 42"/>
-          <p:cNvSpPr txBox="1"/>
-          <p:nvPr/>
-        </p:nvSpPr>
-        <p:spPr>
-          <a:xfrm>
-            <a:off x="5532120" y="6035040"/>
-            <a:ext cx="6080760" cy="320040"/>
-          </a:xfrm>
-          <a:prstGeom prst="rect">
-            <a:avLst/>
-          </a:prstGeom>
-          <a:noFill/>
-        </p:spPr>
-        <p:txBody>
-          <a:bodyPr wrap="square" anchor="t" lIns="45720" rIns="45720" tIns="18288" bIns="18288">
-            <a:spAutoFit/>
-          </a:bodyPr>
-          <a:lstStyle/>
-          <a:p>
-            <a:pPr algn="l"/>
-            <a:r>
-              <a:rPr sz="1100" b="1" i="0">
-                <a:solidFill>
-                  <a:srgbClr val="500000"/>
-                </a:solidFill>
-                <a:latin typeface="Arial"/>
-              </a:rPr>
-              <a:t>2 layers × 6 Å = 12 Å receptive field.  MACE-MP-0: 1.5 M structures, 89 elements, PBE.</a:t>
-            </a:r>
-          </a:p>
-        </p:txBody>
-      </p:sp>
-      <p:sp>
-        <p:nvSpPr>
-          <p:cNvPr id="44" name="TextBox 43"/>
-          <p:cNvSpPr txBox="1"/>
-          <p:nvPr/>
-        </p:nvSpPr>
-        <p:spPr>
-          <a:xfrm>
-            <a:off x="548640" y="6428232"/>
-            <a:ext cx="9601200" cy="228600"/>
-          </a:xfrm>
-          <a:prstGeom prst="rect">
-            <a:avLst/>
-          </a:prstGeom>
-          <a:noFill/>
-        </p:spPr>
-        <p:txBody>
-          <a:bodyPr wrap="square" anchor="t" lIns="45720" rIns="45720" tIns="18288" bIns="18288">
-            <a:spAutoFit/>
-          </a:bodyPr>
-          <a:lstStyle/>
-          <a:p>
-            <a:pPr algn="l"/>
-            <a:r>
               <a:rPr sz="900" b="0" i="0">
                 <a:solidFill>
                   <a:srgbClr val="94A3B8"/>
                 </a:solidFill>
                 <a:latin typeface="Arial"/>
               </a:rPr>
-              <a:t>Batatia, Kovács, Simm, Ortner &amp; Csányi, NeurIPS 2022; Batatia et al., arXiv:2401.00096 (MACE-MP-0)</a:t>
+              <a:t>Behler &amp; Parrinello 2007 · Bartók et al. 2010 · Drautz 2019 · Batzner et al. 2022 · Batatia et al. NeurIPS 2022</a:t>
             </a:r>
           </a:p>
         </p:txBody>
@@ -8666,7 +7846,7 @@
                 </a:solidFill>
                 <a:latin typeface="Arial"/>
               </a:rPr>
-              <a:t>BACKUP · SYMMETRY</a:t>
+              <a:t>BACKUP · THE MODEL</a:t>
             </a:r>
           </a:p>
         </p:txBody>
@@ -8701,7 +7881,7 @@
                 </a:solidFill>
                 <a:latin typeface="Arial"/>
               </a:rPr>
-              <a:t>Equivariance for absolute beginners</a:t>
+              <a:t>MACE: a graph of atoms passing messages</a:t>
             </a:r>
           </a:p>
         </p:txBody>
@@ -8736,7 +7916,7 @@
                 </a:solidFill>
                 <a:latin typeface="Arial"/>
               </a:rPr>
-              <a:t>Rotate the input and the output rotates with it — exactly, not approximately</a:t>
+              <a:t>Two layers, many-body messages, exact rotational symmetry</a:t>
             </a:r>
           </a:p>
         </p:txBody>
@@ -8771,7 +7951,7 @@
                 </a:solidFill>
                 <a:latin typeface="Arial"/>
               </a:rPr>
-              <a:t>15</a:t>
+              <a:t>14</a:t>
             </a:r>
           </a:p>
         </p:txBody>
@@ -8785,7 +7965,7 @@
         <p:spPr>
           <a:xfrm>
             <a:off x="548640" y="1783080"/>
-            <a:ext cx="5532120" cy="3246120"/>
+            <a:ext cx="4754880" cy="4206240"/>
           </a:xfrm>
           <a:prstGeom prst="roundRect">
             <a:avLst>
@@ -8824,74 +8004,83 @@
       </p:sp>
       <p:sp>
         <p:nvSpPr>
-          <p:cNvPr id="7" name="TextBox 6"/>
-          <p:cNvSpPr txBox="1"/>
-          <p:nvPr/>
-        </p:nvSpPr>
-        <p:spPr>
-          <a:xfrm>
-            <a:off x="777240" y="1920240"/>
-            <a:ext cx="5120640" cy="365760"/>
-          </a:xfrm>
-          <a:prstGeom prst="rect">
+          <p:cNvPr id="7" name="Oval 6"/>
+          <p:cNvSpPr/>
+          <p:nvPr/>
+        </p:nvSpPr>
+        <p:spPr>
+          <a:xfrm>
+            <a:off x="1188720" y="2103120"/>
+            <a:ext cx="3474720" cy="3474720"/>
+          </a:xfrm>
+          <a:prstGeom prst="ellipse">
             <a:avLst/>
           </a:prstGeom>
           <a:noFill/>
-        </p:spPr>
-        <p:txBody>
-          <a:bodyPr wrap="square" anchor="t" lIns="45720" rIns="45720" tIns="18288" bIns="18288">
-            <a:spAutoFit/>
-          </a:bodyPr>
-          <a:lstStyle/>
-          <a:p>
-            <a:pPr algn="l"/>
-            <a:r>
-              <a:rPr sz="1600" b="1" i="0">
-                <a:solidFill>
-                  <a:srgbClr val="1E293B"/>
-                </a:solidFill>
-                <a:latin typeface="Arial"/>
-              </a:rPr>
-              <a:t>Invariant: the energy</a:t>
-            </a:r>
-          </a:p>
-        </p:txBody>
-      </p:sp>
-      <p:sp>
-        <p:nvSpPr>
-          <p:cNvPr id="8" name="TextBox 7"/>
-          <p:cNvSpPr txBox="1"/>
-          <p:nvPr/>
-        </p:nvSpPr>
-        <p:spPr>
-          <a:xfrm>
-            <a:off x="777240" y="2286000"/>
-            <a:ext cx="5120640" cy="365760"/>
-          </a:xfrm>
-          <a:prstGeom prst="rect">
-            <a:avLst/>
-          </a:prstGeom>
-          <a:noFill/>
-        </p:spPr>
-        <p:txBody>
-          <a:bodyPr wrap="square" anchor="t" lIns="45720" rIns="45720" tIns="18288" bIns="18288">
-            <a:spAutoFit/>
-          </a:bodyPr>
-          <a:lstStyle/>
-          <a:p>
-            <a:pPr algn="l"/>
-            <a:r>
-              <a:rPr sz="1200" b="0" i="0">
-                <a:solidFill>
-                  <a:srgbClr val="64748B"/>
-                </a:solidFill>
-                <a:latin typeface="Arial"/>
-              </a:rPr>
-              <a:t>Rotate the molecule → the same number comes out</a:t>
-            </a:r>
-          </a:p>
-        </p:txBody>
-      </p:sp>
+          <a:ln w="15875">
+            <a:solidFill>
+              <a:srgbClr val="B87878"/>
+            </a:solidFill>
+            <a:prstDash val="dash"/>
+          </a:ln>
+        </p:spPr>
+        <p:style>
+          <a:lnRef idx="1">
+            <a:schemeClr val="accent1"/>
+          </a:lnRef>
+          <a:fillRef idx="3">
+            <a:schemeClr val="accent1"/>
+          </a:fillRef>
+          <a:effectRef idx="2">
+            <a:schemeClr val="accent1"/>
+          </a:effectRef>
+          <a:fontRef idx="minor">
+            <a:schemeClr val="lt1"/>
+          </a:fontRef>
+        </p:style>
+        <p:txBody>
+          <a:bodyPr rtlCol="0" anchor="ctr"/>
+          <a:lstStyle/>
+          <a:p>
+            <a:pPr algn="ctr"/>
+          </a:p>
+        </p:txBody>
+      </p:sp>
+      <p:cxnSp>
+        <p:nvCxnSpPr>
+          <p:cNvPr id="8" name="Connector 7"/>
+          <p:cNvCxnSpPr/>
+          <p:nvPr/>
+        </p:nvCxnSpPr>
+        <p:spPr>
+          <a:xfrm>
+            <a:off x="2926080" y="3840480"/>
+            <a:ext cx="1005840" cy="0"/>
+          </a:xfrm>
+          <a:prstGeom prst="line">
+            <a:avLst/>
+          </a:prstGeom>
+          <a:ln w="15875">
+            <a:solidFill>
+              <a:srgbClr val="94A3B8"/>
+            </a:solidFill>
+          </a:ln>
+        </p:spPr>
+        <p:style>
+          <a:lnRef idx="2">
+            <a:schemeClr val="accent1"/>
+          </a:lnRef>
+          <a:fillRef idx="0">
+            <a:schemeClr val="accent1"/>
+          </a:fillRef>
+          <a:effectRef idx="1">
+            <a:schemeClr val="accent1"/>
+          </a:effectRef>
+          <a:fontRef idx="minor">
+            <a:schemeClr val="tx1"/>
+          </a:fontRef>
+        </p:style>
+      </p:cxnSp>
       <p:cxnSp>
         <p:nvCxnSpPr>
           <p:cNvPr id="9" name="Connector 8"/>
@@ -8900,8 +8089,8 @@
         </p:nvCxnSpPr>
         <p:spPr>
           <a:xfrm>
-            <a:off x="2011680" y="3291840"/>
-            <a:ext cx="548640" cy="868680"/>
+            <a:off x="2926080" y="3840480"/>
+            <a:ext cx="502920" cy="868680"/>
           </a:xfrm>
           <a:prstGeom prst="line">
             <a:avLst/>
@@ -8935,8 +8124,8 @@
         </p:nvCxnSpPr>
         <p:spPr>
           <a:xfrm flipH="1">
-            <a:off x="1463040" y="4160520"/>
-            <a:ext cx="1097280" cy="0"/>
+            <a:off x="2423160" y="3840480"/>
+            <a:ext cx="502920" cy="868680"/>
           </a:xfrm>
           <a:prstGeom prst="line">
             <a:avLst/>
@@ -8969,211 +8158,9 @@
           <p:nvPr/>
         </p:nvCxnSpPr>
         <p:spPr>
-          <a:xfrm flipV="1">
-            <a:off x="1463040" y="3291840"/>
-            <a:ext cx="548640" cy="868680"/>
-          </a:xfrm>
-          <a:prstGeom prst="line">
-            <a:avLst/>
-          </a:prstGeom>
-          <a:ln w="15875">
-            <a:solidFill>
-              <a:srgbClr val="94A3B8"/>
-            </a:solidFill>
-          </a:ln>
-        </p:spPr>
-        <p:style>
-          <a:lnRef idx="2">
-            <a:schemeClr val="accent1"/>
-          </a:lnRef>
-          <a:fillRef idx="0">
-            <a:schemeClr val="accent1"/>
-          </a:fillRef>
-          <a:effectRef idx="1">
-            <a:schemeClr val="accent1"/>
-          </a:effectRef>
-          <a:fontRef idx="minor">
-            <a:schemeClr val="tx1"/>
-          </a:fontRef>
-        </p:style>
-      </p:cxnSp>
-      <p:sp>
-        <p:nvSpPr>
-          <p:cNvPr id="12" name="Oval 11"/>
-          <p:cNvSpPr/>
-          <p:nvPr/>
-        </p:nvSpPr>
-        <p:spPr>
-          <a:xfrm>
-            <a:off x="1856232" y="3136392"/>
-            <a:ext cx="310896" cy="310896"/>
-          </a:xfrm>
-          <a:prstGeom prst="ellipse">
-            <a:avLst/>
-          </a:prstGeom>
-          <a:solidFill>
-            <a:srgbClr val="500000"/>
-          </a:solidFill>
-          <a:ln>
-            <a:noFill/>
-          </a:ln>
-          <a:effectLst/>
-        </p:spPr>
-        <p:style>
-          <a:lnRef idx="1">
-            <a:schemeClr val="accent1"/>
-          </a:lnRef>
-          <a:fillRef idx="3">
-            <a:schemeClr val="accent1"/>
-          </a:fillRef>
-          <a:effectRef idx="2">
-            <a:schemeClr val="accent1"/>
-          </a:effectRef>
-          <a:fontRef idx="minor">
-            <a:schemeClr val="lt1"/>
-          </a:fontRef>
-        </p:style>
-        <p:txBody>
-          <a:bodyPr rtlCol="0" anchor="ctr"/>
-          <a:lstStyle/>
-          <a:p>
-            <a:pPr algn="ctr"/>
-          </a:p>
-        </p:txBody>
-      </p:sp>
-      <p:sp>
-        <p:nvSpPr>
-          <p:cNvPr id="13" name="Oval 12"/>
-          <p:cNvSpPr/>
-          <p:nvPr/>
-        </p:nvSpPr>
-        <p:spPr>
-          <a:xfrm>
-            <a:off x="2404872" y="4005072"/>
-            <a:ext cx="310896" cy="310896"/>
-          </a:xfrm>
-          <a:prstGeom prst="ellipse">
-            <a:avLst/>
-          </a:prstGeom>
-          <a:solidFill>
-            <a:srgbClr val="B87878"/>
-          </a:solidFill>
-          <a:ln>
-            <a:noFill/>
-          </a:ln>
-          <a:effectLst/>
-        </p:spPr>
-        <p:style>
-          <a:lnRef idx="1">
-            <a:schemeClr val="accent1"/>
-          </a:lnRef>
-          <a:fillRef idx="3">
-            <a:schemeClr val="accent1"/>
-          </a:fillRef>
-          <a:effectRef idx="2">
-            <a:schemeClr val="accent1"/>
-          </a:effectRef>
-          <a:fontRef idx="minor">
-            <a:schemeClr val="lt1"/>
-          </a:fontRef>
-        </p:style>
-        <p:txBody>
-          <a:bodyPr rtlCol="0" anchor="ctr"/>
-          <a:lstStyle/>
-          <a:p>
-            <a:pPr algn="ctr"/>
-          </a:p>
-        </p:txBody>
-      </p:sp>
-      <p:sp>
-        <p:nvSpPr>
-          <p:cNvPr id="14" name="Oval 13"/>
-          <p:cNvSpPr/>
-          <p:nvPr/>
-        </p:nvSpPr>
-        <p:spPr>
-          <a:xfrm>
-            <a:off x="1307592" y="4005072"/>
-            <a:ext cx="310896" cy="310896"/>
-          </a:xfrm>
-          <a:prstGeom prst="ellipse">
-            <a:avLst/>
-          </a:prstGeom>
-          <a:solidFill>
-            <a:srgbClr val="B87878"/>
-          </a:solidFill>
-          <a:ln>
-            <a:noFill/>
-          </a:ln>
-          <a:effectLst/>
-        </p:spPr>
-        <p:style>
-          <a:lnRef idx="1">
-            <a:schemeClr val="accent1"/>
-          </a:lnRef>
-          <a:fillRef idx="3">
-            <a:schemeClr val="accent1"/>
-          </a:fillRef>
-          <a:effectRef idx="2">
-            <a:schemeClr val="accent1"/>
-          </a:effectRef>
-          <a:fontRef idx="minor">
-            <a:schemeClr val="lt1"/>
-          </a:fontRef>
-        </p:style>
-        <p:txBody>
-          <a:bodyPr rtlCol="0" anchor="ctr"/>
-          <a:lstStyle/>
-          <a:p>
-            <a:pPr algn="ctr"/>
-          </a:p>
-        </p:txBody>
-      </p:sp>
-      <p:sp>
-        <p:nvSpPr>
-          <p:cNvPr id="15" name="TextBox 14"/>
-          <p:cNvSpPr txBox="1"/>
-          <p:nvPr/>
-        </p:nvSpPr>
-        <p:spPr>
-          <a:xfrm>
-            <a:off x="1188720" y="4480560"/>
-            <a:ext cx="1645920" cy="320040"/>
-          </a:xfrm>
-          <a:prstGeom prst="rect">
-            <a:avLst/>
-          </a:prstGeom>
-          <a:noFill/>
-        </p:spPr>
-        <p:txBody>
-          <a:bodyPr wrap="square" anchor="t" lIns="45720" rIns="45720" tIns="18288" bIns="18288">
-            <a:spAutoFit/>
-          </a:bodyPr>
-          <a:lstStyle/>
-          <a:p>
-            <a:pPr algn="ctr"/>
-            <a:r>
-              <a:rPr sz="1200" b="1" i="0">
-                <a:solidFill>
-                  <a:srgbClr val="500000"/>
-                </a:solidFill>
-                <a:latin typeface="Cambria Math"/>
-              </a:rPr>
-              <a:t>E = −3.72 eV</a:t>
-            </a:r>
-          </a:p>
-        </p:txBody>
-      </p:sp>
-      <p:cxnSp>
-        <p:nvCxnSpPr>
-          <p:cNvPr id="16" name="Connector 15"/>
-          <p:cNvCxnSpPr/>
-          <p:nvPr/>
-        </p:nvCxnSpPr>
-        <p:spPr>
-          <a:xfrm>
-            <a:off x="4663440" y="3291840"/>
-            <a:ext cx="548639" cy="868680"/>
+          <a:xfrm flipH="1">
+            <a:off x="1920240" y="3840480"/>
+            <a:ext cx="1005840" cy="0"/>
           </a:xfrm>
           <a:prstGeom prst="line">
             <a:avLst/>
@@ -9201,14 +8188,14 @@
       </p:cxnSp>
       <p:cxnSp>
         <p:nvCxnSpPr>
-          <p:cNvPr id="17" name="Connector 16"/>
+          <p:cNvPr id="12" name="Connector 11"/>
           <p:cNvCxnSpPr/>
           <p:nvPr/>
         </p:nvCxnSpPr>
         <p:spPr>
-          <a:xfrm flipH="1">
-            <a:off x="4114800" y="4160520"/>
-            <a:ext cx="1097279" cy="0"/>
+          <a:xfrm flipH="1" flipV="1">
+            <a:off x="2423160" y="2971800"/>
+            <a:ext cx="502920" cy="868680"/>
           </a:xfrm>
           <a:prstGeom prst="line">
             <a:avLst/>
@@ -9236,402 +8223,14 @@
       </p:cxnSp>
       <p:cxnSp>
         <p:nvCxnSpPr>
-          <p:cNvPr id="18" name="Connector 17"/>
+          <p:cNvPr id="13" name="Connector 12"/>
           <p:cNvCxnSpPr/>
           <p:nvPr/>
         </p:nvCxnSpPr>
         <p:spPr>
           <a:xfrm flipV="1">
-            <a:off x="4114800" y="3291840"/>
-            <a:ext cx="548640" cy="868680"/>
-          </a:xfrm>
-          <a:prstGeom prst="line">
-            <a:avLst/>
-          </a:prstGeom>
-          <a:ln w="15875">
-            <a:solidFill>
-              <a:srgbClr val="94A3B8"/>
-            </a:solidFill>
-          </a:ln>
-        </p:spPr>
-        <p:style>
-          <a:lnRef idx="2">
-            <a:schemeClr val="accent1"/>
-          </a:lnRef>
-          <a:fillRef idx="0">
-            <a:schemeClr val="accent1"/>
-          </a:fillRef>
-          <a:effectRef idx="1">
-            <a:schemeClr val="accent1"/>
-          </a:effectRef>
-          <a:fontRef idx="minor">
-            <a:schemeClr val="tx1"/>
-          </a:fontRef>
-        </p:style>
-      </p:cxnSp>
-      <p:sp>
-        <p:nvSpPr>
-          <p:cNvPr id="19" name="Oval 18"/>
-          <p:cNvSpPr/>
-          <p:nvPr/>
-        </p:nvSpPr>
-        <p:spPr>
-          <a:xfrm>
-            <a:off x="4507992" y="3136392"/>
-            <a:ext cx="310896" cy="310896"/>
-          </a:xfrm>
-          <a:prstGeom prst="ellipse">
-            <a:avLst/>
-          </a:prstGeom>
-          <a:solidFill>
-            <a:srgbClr val="500000"/>
-          </a:solidFill>
-          <a:ln>
-            <a:noFill/>
-          </a:ln>
-          <a:effectLst/>
-        </p:spPr>
-        <p:style>
-          <a:lnRef idx="1">
-            <a:schemeClr val="accent1"/>
-          </a:lnRef>
-          <a:fillRef idx="3">
-            <a:schemeClr val="accent1"/>
-          </a:fillRef>
-          <a:effectRef idx="2">
-            <a:schemeClr val="accent1"/>
-          </a:effectRef>
-          <a:fontRef idx="minor">
-            <a:schemeClr val="lt1"/>
-          </a:fontRef>
-        </p:style>
-        <p:txBody>
-          <a:bodyPr rtlCol="0" anchor="ctr"/>
-          <a:lstStyle/>
-          <a:p>
-            <a:pPr algn="ctr"/>
-          </a:p>
-        </p:txBody>
-      </p:sp>
-      <p:sp>
-        <p:nvSpPr>
-          <p:cNvPr id="20" name="Oval 19"/>
-          <p:cNvSpPr/>
-          <p:nvPr/>
-        </p:nvSpPr>
-        <p:spPr>
-          <a:xfrm>
-            <a:off x="5056631" y="4005072"/>
-            <a:ext cx="310896" cy="310896"/>
-          </a:xfrm>
-          <a:prstGeom prst="ellipse">
-            <a:avLst/>
-          </a:prstGeom>
-          <a:solidFill>
-            <a:srgbClr val="B87878"/>
-          </a:solidFill>
-          <a:ln>
-            <a:noFill/>
-          </a:ln>
-          <a:effectLst/>
-        </p:spPr>
-        <p:style>
-          <a:lnRef idx="1">
-            <a:schemeClr val="accent1"/>
-          </a:lnRef>
-          <a:fillRef idx="3">
-            <a:schemeClr val="accent1"/>
-          </a:fillRef>
-          <a:effectRef idx="2">
-            <a:schemeClr val="accent1"/>
-          </a:effectRef>
-          <a:fontRef idx="minor">
-            <a:schemeClr val="lt1"/>
-          </a:fontRef>
-        </p:style>
-        <p:txBody>
-          <a:bodyPr rtlCol="0" anchor="ctr"/>
-          <a:lstStyle/>
-          <a:p>
-            <a:pPr algn="ctr"/>
-          </a:p>
-        </p:txBody>
-      </p:sp>
-      <p:sp>
-        <p:nvSpPr>
-          <p:cNvPr id="21" name="Oval 20"/>
-          <p:cNvSpPr/>
-          <p:nvPr/>
-        </p:nvSpPr>
-        <p:spPr>
-          <a:xfrm>
-            <a:off x="3959352" y="4005072"/>
-            <a:ext cx="310896" cy="310896"/>
-          </a:xfrm>
-          <a:prstGeom prst="ellipse">
-            <a:avLst/>
-          </a:prstGeom>
-          <a:solidFill>
-            <a:srgbClr val="B87878"/>
-          </a:solidFill>
-          <a:ln>
-            <a:noFill/>
-          </a:ln>
-          <a:effectLst/>
-        </p:spPr>
-        <p:style>
-          <a:lnRef idx="1">
-            <a:schemeClr val="accent1"/>
-          </a:lnRef>
-          <a:fillRef idx="3">
-            <a:schemeClr val="accent1"/>
-          </a:fillRef>
-          <a:effectRef idx="2">
-            <a:schemeClr val="accent1"/>
-          </a:effectRef>
-          <a:fontRef idx="minor">
-            <a:schemeClr val="lt1"/>
-          </a:fontRef>
-        </p:style>
-        <p:txBody>
-          <a:bodyPr rtlCol="0" anchor="ctr"/>
-          <a:lstStyle/>
-          <a:p>
-            <a:pPr algn="ctr"/>
-          </a:p>
-        </p:txBody>
-      </p:sp>
-      <p:sp>
-        <p:nvSpPr>
-          <p:cNvPr id="22" name="TextBox 21"/>
-          <p:cNvSpPr txBox="1"/>
-          <p:nvPr/>
-        </p:nvSpPr>
-        <p:spPr>
-          <a:xfrm>
-            <a:off x="3840479" y="4480560"/>
-            <a:ext cx="1645920" cy="320040"/>
-          </a:xfrm>
-          <a:prstGeom prst="rect">
-            <a:avLst/>
-          </a:prstGeom>
-          <a:noFill/>
-        </p:spPr>
-        <p:txBody>
-          <a:bodyPr wrap="square" anchor="t" lIns="45720" rIns="45720" tIns="18288" bIns="18288">
-            <a:spAutoFit/>
-          </a:bodyPr>
-          <a:lstStyle/>
-          <a:p>
-            <a:pPr algn="ctr"/>
-            <a:r>
-              <a:rPr sz="1200" b="1" i="0">
-                <a:solidFill>
-                  <a:srgbClr val="500000"/>
-                </a:solidFill>
-                <a:latin typeface="Cambria Math"/>
-              </a:rPr>
-              <a:t>E = −3.72 eV</a:t>
-            </a:r>
-          </a:p>
-        </p:txBody>
-      </p:sp>
-      <p:sp>
-        <p:nvSpPr>
-          <p:cNvPr id="23" name="TextBox 22"/>
-          <p:cNvSpPr txBox="1"/>
-          <p:nvPr/>
-        </p:nvSpPr>
-        <p:spPr>
-          <a:xfrm>
-            <a:off x="3063240" y="3657600"/>
-            <a:ext cx="548640" cy="365760"/>
-          </a:xfrm>
-          <a:prstGeom prst="rect">
-            <a:avLst/>
-          </a:prstGeom>
-          <a:noFill/>
-        </p:spPr>
-        <p:txBody>
-          <a:bodyPr wrap="square" anchor="t" lIns="45720" rIns="45720" tIns="18288" bIns="18288">
-            <a:spAutoFit/>
-          </a:bodyPr>
-          <a:lstStyle/>
-          <a:p>
-            <a:pPr algn="ctr"/>
-            <a:r>
-              <a:rPr sz="2000" b="1" i="0">
-                <a:solidFill>
-                  <a:srgbClr val="64748B"/>
-                </a:solidFill>
-                <a:latin typeface="Arial"/>
-              </a:rPr>
-              <a:t>→</a:t>
-            </a:r>
-          </a:p>
-        </p:txBody>
-      </p:sp>
-      <p:sp>
-        <p:nvSpPr>
-          <p:cNvPr id="24" name="TextBox 23"/>
-          <p:cNvSpPr txBox="1"/>
-          <p:nvPr/>
-        </p:nvSpPr>
-        <p:spPr>
-          <a:xfrm>
-            <a:off x="777240" y="4572000"/>
-            <a:ext cx="5120640" cy="365760"/>
-          </a:xfrm>
-          <a:prstGeom prst="rect">
-            <a:avLst/>
-          </a:prstGeom>
-          <a:noFill/>
-        </p:spPr>
-        <p:txBody>
-          <a:bodyPr wrap="square" anchor="t" lIns="45720" rIns="45720" tIns="18288" bIns="18288">
-            <a:spAutoFit/>
-          </a:bodyPr>
-          <a:lstStyle/>
-          <a:p>
-            <a:pPr algn="ctr"/>
-            <a:r>
-              <a:rPr sz="1100" b="0" i="1">
-                <a:solidFill>
-                  <a:srgbClr val="64748B"/>
-                </a:solidFill>
-                <a:latin typeface="Arial"/>
-              </a:rPr>
-              <a:t>same energy</a:t>
-            </a:r>
-          </a:p>
-        </p:txBody>
-      </p:sp>
-      <p:sp>
-        <p:nvSpPr>
-          <p:cNvPr id="25" name="Rounded Rectangle 24"/>
-          <p:cNvSpPr/>
-          <p:nvPr/>
-        </p:nvSpPr>
-        <p:spPr>
-          <a:xfrm>
-            <a:off x="6080760" y="1783080"/>
-            <a:ext cx="5532120" cy="3246120"/>
-          </a:xfrm>
-          <a:prstGeom prst="roundRect">
-            <a:avLst>
-              <a:gd name="adj" fmla="val 8000"/>
-            </a:avLst>
-          </a:prstGeom>
-          <a:solidFill>
-            <a:srgbClr val="F5F1F1"/>
-          </a:solidFill>
-          <a:ln>
-            <a:noFill/>
-          </a:ln>
-          <a:effectLst/>
-        </p:spPr>
-        <p:style>
-          <a:lnRef idx="1">
-            <a:schemeClr val="accent1"/>
-          </a:lnRef>
-          <a:fillRef idx="3">
-            <a:schemeClr val="accent1"/>
-          </a:fillRef>
-          <a:effectRef idx="2">
-            <a:schemeClr val="accent1"/>
-          </a:effectRef>
-          <a:fontRef idx="minor">
-            <a:schemeClr val="lt1"/>
-          </a:fontRef>
-        </p:style>
-        <p:txBody>
-          <a:bodyPr rtlCol="0" anchor="ctr"/>
-          <a:lstStyle/>
-          <a:p>
-            <a:pPr algn="ctr"/>
-          </a:p>
-        </p:txBody>
-      </p:sp>
-      <p:sp>
-        <p:nvSpPr>
-          <p:cNvPr id="26" name="TextBox 25"/>
-          <p:cNvSpPr txBox="1"/>
-          <p:nvPr/>
-        </p:nvSpPr>
-        <p:spPr>
-          <a:xfrm>
-            <a:off x="6309360" y="1920240"/>
-            <a:ext cx="5120640" cy="365760"/>
-          </a:xfrm>
-          <a:prstGeom prst="rect">
-            <a:avLst/>
-          </a:prstGeom>
-          <a:noFill/>
-        </p:spPr>
-        <p:txBody>
-          <a:bodyPr wrap="square" anchor="t" lIns="45720" rIns="45720" tIns="18288" bIns="18288">
-            <a:spAutoFit/>
-          </a:bodyPr>
-          <a:lstStyle/>
-          <a:p>
-            <a:pPr algn="l"/>
-            <a:r>
-              <a:rPr sz="1600" b="1" i="0">
-                <a:solidFill>
-                  <a:srgbClr val="1E293B"/>
-                </a:solidFill>
-                <a:latin typeface="Arial"/>
-              </a:rPr>
-              <a:t>Equivariant: the forces</a:t>
-            </a:r>
-          </a:p>
-        </p:txBody>
-      </p:sp>
-      <p:sp>
-        <p:nvSpPr>
-          <p:cNvPr id="27" name="TextBox 26"/>
-          <p:cNvSpPr txBox="1"/>
-          <p:nvPr/>
-        </p:nvSpPr>
-        <p:spPr>
-          <a:xfrm>
-            <a:off x="6309360" y="2286000"/>
-            <a:ext cx="5120640" cy="365760"/>
-          </a:xfrm>
-          <a:prstGeom prst="rect">
-            <a:avLst/>
-          </a:prstGeom>
-          <a:noFill/>
-        </p:spPr>
-        <p:txBody>
-          <a:bodyPr wrap="square" anchor="t" lIns="45720" rIns="45720" tIns="18288" bIns="18288">
-            <a:spAutoFit/>
-          </a:bodyPr>
-          <a:lstStyle/>
-          <a:p>
-            <a:pPr algn="l"/>
-            <a:r>
-              <a:rPr sz="1200" b="0" i="0">
-                <a:solidFill>
-                  <a:srgbClr val="64748B"/>
-                </a:solidFill>
-                <a:latin typeface="Arial"/>
-              </a:rPr>
-              <a:t>Rotate the molecule → the force arrows rotate with it</a:t>
-            </a:r>
-          </a:p>
-        </p:txBody>
-      </p:sp>
-      <p:cxnSp>
-        <p:nvCxnSpPr>
-          <p:cNvPr id="28" name="Connector 27"/>
-          <p:cNvCxnSpPr/>
-          <p:nvPr/>
-        </p:nvCxnSpPr>
-        <p:spPr>
-          <a:xfrm>
-            <a:off x="7543800" y="3291840"/>
-            <a:ext cx="548640" cy="868680"/>
+            <a:off x="2926080" y="2971800"/>
+            <a:ext cx="502920" cy="868680"/>
           </a:xfrm>
           <a:prstGeom prst="line">
             <a:avLst/>
@@ -9659,14 +8258,14 @@
       </p:cxnSp>
       <p:cxnSp>
         <p:nvCxnSpPr>
-          <p:cNvPr id="29" name="Connector 28"/>
+          <p:cNvPr id="14" name="Connector 13"/>
           <p:cNvCxnSpPr/>
           <p:nvPr/>
         </p:nvCxnSpPr>
         <p:spPr>
-          <a:xfrm flipH="1">
-            <a:off x="6995160" y="4160520"/>
-            <a:ext cx="1097280" cy="0"/>
+          <a:xfrm>
+            <a:off x="2926080" y="3840480"/>
+            <a:ext cx="1463040" cy="822960"/>
           </a:xfrm>
           <a:prstGeom prst="line">
             <a:avLst/>
@@ -9694,14 +8293,14 @@
       </p:cxnSp>
       <p:cxnSp>
         <p:nvCxnSpPr>
-          <p:cNvPr id="30" name="Connector 29"/>
+          <p:cNvPr id="15" name="Connector 14"/>
           <p:cNvCxnSpPr/>
           <p:nvPr/>
         </p:nvCxnSpPr>
         <p:spPr>
-          <a:xfrm flipV="1">
-            <a:off x="6995160" y="3291840"/>
-            <a:ext cx="548640" cy="868680"/>
+          <a:xfrm flipH="1">
+            <a:off x="1554480" y="3840480"/>
+            <a:ext cx="1371600" cy="1005840"/>
           </a:xfrm>
           <a:prstGeom prst="line">
             <a:avLst/>
@@ -9729,14 +8328,366 @@
       </p:cxnSp>
       <p:sp>
         <p:nvSpPr>
-          <p:cNvPr id="31" name="Oval 30"/>
+          <p:cNvPr id="16" name="Oval 15"/>
           <p:cNvSpPr/>
           <p:nvPr/>
         </p:nvSpPr>
         <p:spPr>
           <a:xfrm>
-            <a:off x="7388352" y="3136392"/>
-            <a:ext cx="310896" cy="310896"/>
+            <a:off x="3785616" y="3694176"/>
+            <a:ext cx="292608" cy="292608"/>
+          </a:xfrm>
+          <a:prstGeom prst="ellipse">
+            <a:avLst/>
+          </a:prstGeom>
+          <a:solidFill>
+            <a:srgbClr val="B87878"/>
+          </a:solidFill>
+          <a:ln>
+            <a:noFill/>
+          </a:ln>
+          <a:effectLst/>
+        </p:spPr>
+        <p:style>
+          <a:lnRef idx="1">
+            <a:schemeClr val="accent1"/>
+          </a:lnRef>
+          <a:fillRef idx="3">
+            <a:schemeClr val="accent1"/>
+          </a:fillRef>
+          <a:effectRef idx="2">
+            <a:schemeClr val="accent1"/>
+          </a:effectRef>
+          <a:fontRef idx="minor">
+            <a:schemeClr val="lt1"/>
+          </a:fontRef>
+        </p:style>
+        <p:txBody>
+          <a:bodyPr rtlCol="0" anchor="ctr"/>
+          <a:lstStyle/>
+          <a:p>
+            <a:pPr algn="ctr"/>
+          </a:p>
+        </p:txBody>
+      </p:sp>
+      <p:sp>
+        <p:nvSpPr>
+          <p:cNvPr id="17" name="Oval 16"/>
+          <p:cNvSpPr/>
+          <p:nvPr/>
+        </p:nvSpPr>
+        <p:spPr>
+          <a:xfrm>
+            <a:off x="3282696" y="4562856"/>
+            <a:ext cx="292608" cy="292608"/>
+          </a:xfrm>
+          <a:prstGeom prst="ellipse">
+            <a:avLst/>
+          </a:prstGeom>
+          <a:solidFill>
+            <a:srgbClr val="B87878"/>
+          </a:solidFill>
+          <a:ln>
+            <a:noFill/>
+          </a:ln>
+          <a:effectLst/>
+        </p:spPr>
+        <p:style>
+          <a:lnRef idx="1">
+            <a:schemeClr val="accent1"/>
+          </a:lnRef>
+          <a:fillRef idx="3">
+            <a:schemeClr val="accent1"/>
+          </a:fillRef>
+          <a:effectRef idx="2">
+            <a:schemeClr val="accent1"/>
+          </a:effectRef>
+          <a:fontRef idx="minor">
+            <a:schemeClr val="lt1"/>
+          </a:fontRef>
+        </p:style>
+        <p:txBody>
+          <a:bodyPr rtlCol="0" anchor="ctr"/>
+          <a:lstStyle/>
+          <a:p>
+            <a:pPr algn="ctr"/>
+          </a:p>
+        </p:txBody>
+      </p:sp>
+      <p:sp>
+        <p:nvSpPr>
+          <p:cNvPr id="18" name="Oval 17"/>
+          <p:cNvSpPr/>
+          <p:nvPr/>
+        </p:nvSpPr>
+        <p:spPr>
+          <a:xfrm>
+            <a:off x="2276856" y="4562856"/>
+            <a:ext cx="292608" cy="292608"/>
+          </a:xfrm>
+          <a:prstGeom prst="ellipse">
+            <a:avLst/>
+          </a:prstGeom>
+          <a:solidFill>
+            <a:srgbClr val="B87878"/>
+          </a:solidFill>
+          <a:ln>
+            <a:noFill/>
+          </a:ln>
+          <a:effectLst/>
+        </p:spPr>
+        <p:style>
+          <a:lnRef idx="1">
+            <a:schemeClr val="accent1"/>
+          </a:lnRef>
+          <a:fillRef idx="3">
+            <a:schemeClr val="accent1"/>
+          </a:fillRef>
+          <a:effectRef idx="2">
+            <a:schemeClr val="accent1"/>
+          </a:effectRef>
+          <a:fontRef idx="minor">
+            <a:schemeClr val="lt1"/>
+          </a:fontRef>
+        </p:style>
+        <p:txBody>
+          <a:bodyPr rtlCol="0" anchor="ctr"/>
+          <a:lstStyle/>
+          <a:p>
+            <a:pPr algn="ctr"/>
+          </a:p>
+        </p:txBody>
+      </p:sp>
+      <p:sp>
+        <p:nvSpPr>
+          <p:cNvPr id="19" name="Oval 18"/>
+          <p:cNvSpPr/>
+          <p:nvPr/>
+        </p:nvSpPr>
+        <p:spPr>
+          <a:xfrm>
+            <a:off x="1773936" y="3694176"/>
+            <a:ext cx="292608" cy="292608"/>
+          </a:xfrm>
+          <a:prstGeom prst="ellipse">
+            <a:avLst/>
+          </a:prstGeom>
+          <a:solidFill>
+            <a:srgbClr val="B87878"/>
+          </a:solidFill>
+          <a:ln>
+            <a:noFill/>
+          </a:ln>
+          <a:effectLst/>
+        </p:spPr>
+        <p:style>
+          <a:lnRef idx="1">
+            <a:schemeClr val="accent1"/>
+          </a:lnRef>
+          <a:fillRef idx="3">
+            <a:schemeClr val="accent1"/>
+          </a:fillRef>
+          <a:effectRef idx="2">
+            <a:schemeClr val="accent1"/>
+          </a:effectRef>
+          <a:fontRef idx="minor">
+            <a:schemeClr val="lt1"/>
+          </a:fontRef>
+        </p:style>
+        <p:txBody>
+          <a:bodyPr rtlCol="0" anchor="ctr"/>
+          <a:lstStyle/>
+          <a:p>
+            <a:pPr algn="ctr"/>
+          </a:p>
+        </p:txBody>
+      </p:sp>
+      <p:sp>
+        <p:nvSpPr>
+          <p:cNvPr id="20" name="Oval 19"/>
+          <p:cNvSpPr/>
+          <p:nvPr/>
+        </p:nvSpPr>
+        <p:spPr>
+          <a:xfrm>
+            <a:off x="2276856" y="2825496"/>
+            <a:ext cx="292608" cy="292608"/>
+          </a:xfrm>
+          <a:prstGeom prst="ellipse">
+            <a:avLst/>
+          </a:prstGeom>
+          <a:solidFill>
+            <a:srgbClr val="B87878"/>
+          </a:solidFill>
+          <a:ln>
+            <a:noFill/>
+          </a:ln>
+          <a:effectLst/>
+        </p:spPr>
+        <p:style>
+          <a:lnRef idx="1">
+            <a:schemeClr val="accent1"/>
+          </a:lnRef>
+          <a:fillRef idx="3">
+            <a:schemeClr val="accent1"/>
+          </a:fillRef>
+          <a:effectRef idx="2">
+            <a:schemeClr val="accent1"/>
+          </a:effectRef>
+          <a:fontRef idx="minor">
+            <a:schemeClr val="lt1"/>
+          </a:fontRef>
+        </p:style>
+        <p:txBody>
+          <a:bodyPr rtlCol="0" anchor="ctr"/>
+          <a:lstStyle/>
+          <a:p>
+            <a:pPr algn="ctr"/>
+          </a:p>
+        </p:txBody>
+      </p:sp>
+      <p:sp>
+        <p:nvSpPr>
+          <p:cNvPr id="21" name="Oval 20"/>
+          <p:cNvSpPr/>
+          <p:nvPr/>
+        </p:nvSpPr>
+        <p:spPr>
+          <a:xfrm>
+            <a:off x="3282696" y="2825496"/>
+            <a:ext cx="292608" cy="292608"/>
+          </a:xfrm>
+          <a:prstGeom prst="ellipse">
+            <a:avLst/>
+          </a:prstGeom>
+          <a:solidFill>
+            <a:srgbClr val="B87878"/>
+          </a:solidFill>
+          <a:ln>
+            <a:noFill/>
+          </a:ln>
+          <a:effectLst/>
+        </p:spPr>
+        <p:style>
+          <a:lnRef idx="1">
+            <a:schemeClr val="accent1"/>
+          </a:lnRef>
+          <a:fillRef idx="3">
+            <a:schemeClr val="accent1"/>
+          </a:fillRef>
+          <a:effectRef idx="2">
+            <a:schemeClr val="accent1"/>
+          </a:effectRef>
+          <a:fontRef idx="minor">
+            <a:schemeClr val="lt1"/>
+          </a:fontRef>
+        </p:style>
+        <p:txBody>
+          <a:bodyPr rtlCol="0" anchor="ctr"/>
+          <a:lstStyle/>
+          <a:p>
+            <a:pPr algn="ctr"/>
+          </a:p>
+        </p:txBody>
+      </p:sp>
+      <p:sp>
+        <p:nvSpPr>
+          <p:cNvPr id="22" name="Oval 21"/>
+          <p:cNvSpPr/>
+          <p:nvPr/>
+        </p:nvSpPr>
+        <p:spPr>
+          <a:xfrm>
+            <a:off x="4242816" y="4517136"/>
+            <a:ext cx="292608" cy="292608"/>
+          </a:xfrm>
+          <a:prstGeom prst="ellipse">
+            <a:avLst/>
+          </a:prstGeom>
+          <a:solidFill>
+            <a:srgbClr val="94A3B8"/>
+          </a:solidFill>
+          <a:ln>
+            <a:noFill/>
+          </a:ln>
+          <a:effectLst/>
+        </p:spPr>
+        <p:style>
+          <a:lnRef idx="1">
+            <a:schemeClr val="accent1"/>
+          </a:lnRef>
+          <a:fillRef idx="3">
+            <a:schemeClr val="accent1"/>
+          </a:fillRef>
+          <a:effectRef idx="2">
+            <a:schemeClr val="accent1"/>
+          </a:effectRef>
+          <a:fontRef idx="minor">
+            <a:schemeClr val="lt1"/>
+          </a:fontRef>
+        </p:style>
+        <p:txBody>
+          <a:bodyPr rtlCol="0" anchor="ctr"/>
+          <a:lstStyle/>
+          <a:p>
+            <a:pPr algn="ctr"/>
+          </a:p>
+        </p:txBody>
+      </p:sp>
+      <p:sp>
+        <p:nvSpPr>
+          <p:cNvPr id="23" name="Oval 22"/>
+          <p:cNvSpPr/>
+          <p:nvPr/>
+        </p:nvSpPr>
+        <p:spPr>
+          <a:xfrm>
+            <a:off x="1408176" y="4700016"/>
+            <a:ext cx="292608" cy="292608"/>
+          </a:xfrm>
+          <a:prstGeom prst="ellipse">
+            <a:avLst/>
+          </a:prstGeom>
+          <a:solidFill>
+            <a:srgbClr val="94A3B8"/>
+          </a:solidFill>
+          <a:ln>
+            <a:noFill/>
+          </a:ln>
+          <a:effectLst/>
+        </p:spPr>
+        <p:style>
+          <a:lnRef idx="1">
+            <a:schemeClr val="accent1"/>
+          </a:lnRef>
+          <a:fillRef idx="3">
+            <a:schemeClr val="accent1"/>
+          </a:fillRef>
+          <a:effectRef idx="2">
+            <a:schemeClr val="accent1"/>
+          </a:effectRef>
+          <a:fontRef idx="minor">
+            <a:schemeClr val="lt1"/>
+          </a:fontRef>
+        </p:style>
+        <p:txBody>
+          <a:bodyPr rtlCol="0" anchor="ctr"/>
+          <a:lstStyle/>
+          <a:p>
+            <a:pPr algn="ctr"/>
+          </a:p>
+        </p:txBody>
+      </p:sp>
+      <p:sp>
+        <p:nvSpPr>
+          <p:cNvPr id="24" name="Oval 23"/>
+          <p:cNvSpPr/>
+          <p:nvPr/>
+        </p:nvSpPr>
+        <p:spPr>
+          <a:xfrm>
+            <a:off x="2724912" y="3639312"/>
+            <a:ext cx="402336" cy="402336"/>
           </a:xfrm>
           <a:prstGeom prst="ellipse">
             <a:avLst/>
@@ -9764,32 +8715,115 @@
           </a:fontRef>
         </p:style>
         <p:txBody>
-          <a:bodyPr rtlCol="0" anchor="ctr"/>
+          <a:bodyPr rtlCol="0" anchor="ctr" lIns="0" rIns="0" tIns="0" bIns="0"/>
           <a:lstStyle/>
           <a:p>
             <a:pPr algn="ctr"/>
-          </a:p>
-        </p:txBody>
-      </p:sp>
-      <p:sp>
-        <p:nvSpPr>
-          <p:cNvPr id="32" name="Oval 31"/>
+            <a:r>
+              <a:rPr sz="1300" b="1">
+                <a:solidFill>
+                  <a:srgbClr val="FFFFFF"/>
+                </a:solidFill>
+                <a:latin typeface="Arial"/>
+              </a:rPr>
+              <a:t>i</a:t>
+            </a:r>
+          </a:p>
+        </p:txBody>
+      </p:sp>
+      <p:sp>
+        <p:nvSpPr>
+          <p:cNvPr id="25" name="TextBox 24"/>
+          <p:cNvSpPr txBox="1"/>
+          <p:nvPr/>
+        </p:nvSpPr>
+        <p:spPr>
+          <a:xfrm>
+            <a:off x="777240" y="1874519"/>
+            <a:ext cx="4297680" cy="320040"/>
+          </a:xfrm>
+          <a:prstGeom prst="rect">
+            <a:avLst/>
+          </a:prstGeom>
+          <a:noFill/>
+        </p:spPr>
+        <p:txBody>
+          <a:bodyPr wrap="square" anchor="t" lIns="45720" rIns="45720" tIns="18288" bIns="18288">
+            <a:spAutoFit/>
+          </a:bodyPr>
+          <a:lstStyle/>
+          <a:p>
+            <a:pPr algn="l"/>
+            <a:r>
+              <a:rPr sz="1200" b="1" i="0">
+                <a:solidFill>
+                  <a:srgbClr val="1E293B"/>
+                </a:solidFill>
+                <a:latin typeface="Arial"/>
+              </a:rPr>
+              <a:t>atom i and its neighbourhood (cut-off 6 Å)</a:t>
+            </a:r>
+          </a:p>
+        </p:txBody>
+      </p:sp>
+      <p:sp>
+        <p:nvSpPr>
+          <p:cNvPr id="26" name="TextBox 25"/>
+          <p:cNvSpPr txBox="1"/>
+          <p:nvPr/>
+        </p:nvSpPr>
+        <p:spPr>
+          <a:xfrm>
+            <a:off x="777240" y="5532120"/>
+            <a:ext cx="4297680" cy="411480"/>
+          </a:xfrm>
+          <a:prstGeom prst="rect">
+            <a:avLst/>
+          </a:prstGeom>
+          <a:noFill/>
+        </p:spPr>
+        <p:txBody>
+          <a:bodyPr wrap="square" anchor="t" lIns="45720" rIns="45720" tIns="18288" bIns="18288">
+            <a:spAutoFit/>
+          </a:bodyPr>
+          <a:lstStyle/>
+          <a:p>
+            <a:pPr algn="l"/>
+            <a:r>
+              <a:rPr sz="1100" b="0" i="0">
+                <a:solidFill>
+                  <a:srgbClr val="64748B"/>
+                </a:solidFill>
+                <a:latin typeface="Arial"/>
+              </a:rPr>
+              <a:t>nodes = atoms · edges = pairs within the cut-off · each layer passes messages along edges</a:t>
+            </a:r>
+          </a:p>
+        </p:txBody>
+      </p:sp>
+      <p:sp>
+        <p:nvSpPr>
+          <p:cNvPr id="27" name="Rounded Rectangle 26"/>
           <p:cNvSpPr/>
           <p:nvPr/>
         </p:nvSpPr>
         <p:spPr>
           <a:xfrm>
-            <a:off x="7936992" y="4005072"/>
-            <a:ext cx="310896" cy="310896"/>
-          </a:xfrm>
-          <a:prstGeom prst="ellipse">
-            <a:avLst/>
+            <a:off x="5532120" y="1783080"/>
+            <a:ext cx="6080760" cy="960120"/>
+          </a:xfrm>
+          <a:prstGeom prst="roundRect">
+            <a:avLst>
+              <a:gd name="adj" fmla="val 8000"/>
+            </a:avLst>
           </a:prstGeom>
           <a:solidFill>
-            <a:srgbClr val="B87878"/>
+            <a:srgbClr val="FFFFFF"/>
           </a:solidFill>
-          <a:ln>
-            <a:noFill/>
+          <a:ln w="12700">
+            <a:solidFill>
+              <a:srgbClr val="E5E7EB"/>
+            </a:solidFill>
           </a:ln>
           <a:effectLst/>
         </p:spPr>
@@ -9817,271 +8851,14 @@
       </p:sp>
       <p:sp>
         <p:nvSpPr>
-          <p:cNvPr id="33" name="Oval 32"/>
+          <p:cNvPr id="28" name="Oval 27"/>
           <p:cNvSpPr/>
           <p:nvPr/>
         </p:nvSpPr>
         <p:spPr>
           <a:xfrm>
-            <a:off x="6839712" y="4005072"/>
-            <a:ext cx="310896" cy="310896"/>
-          </a:xfrm>
-          <a:prstGeom prst="ellipse">
-            <a:avLst/>
-          </a:prstGeom>
-          <a:solidFill>
-            <a:srgbClr val="B87878"/>
-          </a:solidFill>
-          <a:ln>
-            <a:noFill/>
-          </a:ln>
-          <a:effectLst/>
-        </p:spPr>
-        <p:style>
-          <a:lnRef idx="1">
-            <a:schemeClr val="accent1"/>
-          </a:lnRef>
-          <a:fillRef idx="3">
-            <a:schemeClr val="accent1"/>
-          </a:fillRef>
-          <a:effectRef idx="2">
-            <a:schemeClr val="accent1"/>
-          </a:effectRef>
-          <a:fontRef idx="minor">
-            <a:schemeClr val="lt1"/>
-          </a:fontRef>
-        </p:style>
-        <p:txBody>
-          <a:bodyPr rtlCol="0" anchor="ctr"/>
-          <a:lstStyle/>
-          <a:p>
-            <a:pPr algn="ctr"/>
-          </a:p>
-        </p:txBody>
-      </p:sp>
-      <p:cxnSp>
-        <p:nvCxnSpPr>
-          <p:cNvPr id="34" name="Connector 33"/>
-          <p:cNvCxnSpPr/>
-          <p:nvPr/>
-        </p:nvCxnSpPr>
-        <p:spPr>
-          <a:xfrm flipV="1">
-            <a:off x="7543800" y="2788920"/>
-            <a:ext cx="0" cy="502920"/>
-          </a:xfrm>
-          <a:prstGeom prst="line">
-            <a:avLst/>
-          </a:prstGeom>
-          <a:ln w="28575">
-            <a:solidFill>
-              <a:srgbClr val="C9A227"/>
-            </a:solidFill>
-            <a:tailEnd type="triangle" w="med" len="med"/>
-          </a:ln>
-        </p:spPr>
-        <p:style>
-          <a:lnRef idx="2">
-            <a:schemeClr val="accent1"/>
-          </a:lnRef>
-          <a:fillRef idx="0">
-            <a:schemeClr val="accent1"/>
-          </a:fillRef>
-          <a:effectRef idx="1">
-            <a:schemeClr val="accent1"/>
-          </a:effectRef>
-          <a:fontRef idx="minor">
-            <a:schemeClr val="tx1"/>
-          </a:fontRef>
-        </p:style>
-      </p:cxnSp>
-      <p:cxnSp>
-        <p:nvCxnSpPr>
-          <p:cNvPr id="35" name="Connector 34"/>
-          <p:cNvCxnSpPr/>
-          <p:nvPr/>
-        </p:nvCxnSpPr>
-        <p:spPr>
-          <a:xfrm>
-            <a:off x="8092440" y="4160520"/>
-            <a:ext cx="418454" cy="278969"/>
-          </a:xfrm>
-          <a:prstGeom prst="line">
-            <a:avLst/>
-          </a:prstGeom>
-          <a:ln w="28575">
-            <a:solidFill>
-              <a:srgbClr val="C9A227"/>
-            </a:solidFill>
-            <a:tailEnd type="triangle" w="med" len="med"/>
-          </a:ln>
-        </p:spPr>
-        <p:style>
-          <a:lnRef idx="2">
-            <a:schemeClr val="accent1"/>
-          </a:lnRef>
-          <a:fillRef idx="0">
-            <a:schemeClr val="accent1"/>
-          </a:fillRef>
-          <a:effectRef idx="1">
-            <a:schemeClr val="accent1"/>
-          </a:effectRef>
-          <a:fontRef idx="minor">
-            <a:schemeClr val="tx1"/>
-          </a:fontRef>
-        </p:style>
-      </p:cxnSp>
-      <p:cxnSp>
-        <p:nvCxnSpPr>
-          <p:cNvPr id="36" name="Connector 35"/>
-          <p:cNvCxnSpPr/>
-          <p:nvPr/>
-        </p:nvCxnSpPr>
-        <p:spPr>
-          <a:xfrm flipH="1">
-            <a:off x="6576705" y="4160520"/>
-            <a:ext cx="418455" cy="278969"/>
-          </a:xfrm>
-          <a:prstGeom prst="line">
-            <a:avLst/>
-          </a:prstGeom>
-          <a:ln w="28575">
-            <a:solidFill>
-              <a:srgbClr val="C9A227"/>
-            </a:solidFill>
-            <a:tailEnd type="triangle" w="med" len="med"/>
-          </a:ln>
-        </p:spPr>
-        <p:style>
-          <a:lnRef idx="2">
-            <a:schemeClr val="accent1"/>
-          </a:lnRef>
-          <a:fillRef idx="0">
-            <a:schemeClr val="accent1"/>
-          </a:fillRef>
-          <a:effectRef idx="1">
-            <a:schemeClr val="accent1"/>
-          </a:effectRef>
-          <a:fontRef idx="minor">
-            <a:schemeClr val="tx1"/>
-          </a:fontRef>
-        </p:style>
-      </p:cxnSp>
-      <p:cxnSp>
-        <p:nvCxnSpPr>
-          <p:cNvPr id="37" name="Connector 36"/>
-          <p:cNvCxnSpPr/>
-          <p:nvPr/>
-        </p:nvCxnSpPr>
-        <p:spPr>
-          <a:xfrm flipH="1">
-            <a:off x="10435188" y="3382792"/>
-            <a:ext cx="48835" cy="1026268"/>
-          </a:xfrm>
-          <a:prstGeom prst="line">
-            <a:avLst/>
-          </a:prstGeom>
-          <a:ln w="15875">
-            <a:solidFill>
-              <a:srgbClr val="94A3B8"/>
-            </a:solidFill>
-          </a:ln>
-        </p:spPr>
-        <p:style>
-          <a:lnRef idx="2">
-            <a:schemeClr val="accent1"/>
-          </a:lnRef>
-          <a:fillRef idx="0">
-            <a:schemeClr val="accent1"/>
-          </a:fillRef>
-          <a:effectRef idx="1">
-            <a:schemeClr val="accent1"/>
-          </a:effectRef>
-          <a:fontRef idx="minor">
-            <a:schemeClr val="tx1"/>
-          </a:fontRef>
-        </p:style>
-      </p:cxnSp>
-      <p:cxnSp>
-        <p:nvCxnSpPr>
-          <p:cNvPr id="38" name="Connector 37"/>
-          <p:cNvCxnSpPr/>
-          <p:nvPr/>
-        </p:nvCxnSpPr>
-        <p:spPr>
-          <a:xfrm flipH="1" flipV="1">
-            <a:off x="9536349" y="3779686"/>
-            <a:ext cx="898839" cy="629374"/>
-          </a:xfrm>
-          <a:prstGeom prst="line">
-            <a:avLst/>
-          </a:prstGeom>
-          <a:ln w="15875">
-            <a:solidFill>
-              <a:srgbClr val="94A3B8"/>
-            </a:solidFill>
-          </a:ln>
-        </p:spPr>
-        <p:style>
-          <a:lnRef idx="2">
-            <a:schemeClr val="accent1"/>
-          </a:lnRef>
-          <a:fillRef idx="0">
-            <a:schemeClr val="accent1"/>
-          </a:fillRef>
-          <a:effectRef idx="1">
-            <a:schemeClr val="accent1"/>
-          </a:effectRef>
-          <a:fontRef idx="minor">
-            <a:schemeClr val="tx1"/>
-          </a:fontRef>
-        </p:style>
-      </p:cxnSp>
-      <p:cxnSp>
-        <p:nvCxnSpPr>
-          <p:cNvPr id="39" name="Connector 38"/>
-          <p:cNvCxnSpPr/>
-          <p:nvPr/>
-        </p:nvCxnSpPr>
-        <p:spPr>
-          <a:xfrm flipV="1">
-            <a:off x="9536349" y="3382792"/>
-            <a:ext cx="947674" cy="396894"/>
-          </a:xfrm>
-          <a:prstGeom prst="line">
-            <a:avLst/>
-          </a:prstGeom>
-          <a:ln w="15875">
-            <a:solidFill>
-              <a:srgbClr val="94A3B8"/>
-            </a:solidFill>
-          </a:ln>
-        </p:spPr>
-        <p:style>
-          <a:lnRef idx="2">
-            <a:schemeClr val="accent1"/>
-          </a:lnRef>
-          <a:fillRef idx="0">
-            <a:schemeClr val="accent1"/>
-          </a:fillRef>
-          <a:effectRef idx="1">
-            <a:schemeClr val="accent1"/>
-          </a:effectRef>
-          <a:fontRef idx="minor">
-            <a:schemeClr val="tx1"/>
-          </a:fontRef>
-        </p:style>
-      </p:cxnSp>
-      <p:sp>
-        <p:nvSpPr>
-          <p:cNvPr id="40" name="Oval 39"/>
-          <p:cNvSpPr/>
-          <p:nvPr/>
-        </p:nvSpPr>
-        <p:spPr>
-          <a:xfrm>
-            <a:off x="10328575" y="3227344"/>
-            <a:ext cx="310896" cy="310896"/>
+            <a:off x="5669280" y="2011680"/>
+            <a:ext cx="502920" cy="502920"/>
           </a:xfrm>
           <a:prstGeom prst="ellipse">
             <a:avLst/>
@@ -10109,32 +8886,115 @@
           </a:fontRef>
         </p:style>
         <p:txBody>
-          <a:bodyPr rtlCol="0" anchor="ctr"/>
+          <a:bodyPr rtlCol="0" anchor="ctr" lIns="0" rIns="0" tIns="0" bIns="0"/>
           <a:lstStyle/>
           <a:p>
             <a:pPr algn="ctr"/>
-          </a:p>
-        </p:txBody>
-      </p:sp>
-      <p:sp>
-        <p:nvSpPr>
-          <p:cNvPr id="41" name="Oval 40"/>
+            <a:r>
+              <a:rPr sz="1400" b="1">
+                <a:solidFill>
+                  <a:srgbClr val="FFFFFF"/>
+                </a:solidFill>
+                <a:latin typeface="Arial"/>
+              </a:rPr>
+              <a:t>1</a:t>
+            </a:r>
+          </a:p>
+        </p:txBody>
+      </p:sp>
+      <p:sp>
+        <p:nvSpPr>
+          <p:cNvPr id="29" name="TextBox 28"/>
+          <p:cNvSpPr txBox="1"/>
+          <p:nvPr/>
+        </p:nvSpPr>
+        <p:spPr>
+          <a:xfrm>
+            <a:off x="6309360" y="1874519"/>
+            <a:ext cx="5212080" cy="320040"/>
+          </a:xfrm>
+          <a:prstGeom prst="rect">
+            <a:avLst/>
+          </a:prstGeom>
+          <a:noFill/>
+        </p:spPr>
+        <p:txBody>
+          <a:bodyPr wrap="square" anchor="t" lIns="45720" rIns="45720" tIns="18288" bIns="18288">
+            <a:spAutoFit/>
+          </a:bodyPr>
+          <a:lstStyle/>
+          <a:p>
+            <a:pPr algn="l"/>
+            <a:r>
+              <a:rPr sz="1400" b="1" i="0">
+                <a:solidFill>
+                  <a:srgbClr val="1E293B"/>
+                </a:solidFill>
+                <a:latin typeface="Arial"/>
+              </a:rPr>
+              <a:t>Embed</a:t>
+            </a:r>
+          </a:p>
+        </p:txBody>
+      </p:sp>
+      <p:sp>
+        <p:nvSpPr>
+          <p:cNvPr id="30" name="TextBox 29"/>
+          <p:cNvSpPr txBox="1"/>
+          <p:nvPr/>
+        </p:nvSpPr>
+        <p:spPr>
+          <a:xfrm>
+            <a:off x="6309360" y="2176272"/>
+            <a:ext cx="5212080" cy="548640"/>
+          </a:xfrm>
+          <a:prstGeom prst="rect">
+            <a:avLst/>
+          </a:prstGeom>
+          <a:noFill/>
+        </p:spPr>
+        <p:txBody>
+          <a:bodyPr wrap="square" anchor="t" lIns="45720" rIns="45720" tIns="18288" bIns="18288">
+            <a:spAutoFit/>
+          </a:bodyPr>
+          <a:lstStyle/>
+          <a:p>
+            <a:pPr algn="l"/>
+            <a:r>
+              <a:rPr sz="1100" b="0" i="0">
+                <a:solidFill>
+                  <a:srgbClr val="64748B"/>
+                </a:solidFill>
+                <a:latin typeface="Arial"/>
+              </a:rPr>
+              <a:t>Each atom starts with a learned vector for its element.</a:t>
+            </a:r>
+          </a:p>
+        </p:txBody>
+      </p:sp>
+      <p:sp>
+        <p:nvSpPr>
+          <p:cNvPr id="31" name="Rounded Rectangle 30"/>
           <p:cNvSpPr/>
           <p:nvPr/>
         </p:nvSpPr>
         <p:spPr>
           <a:xfrm>
-            <a:off x="10279740" y="4253612"/>
-            <a:ext cx="310896" cy="310896"/>
-          </a:xfrm>
-          <a:prstGeom prst="ellipse">
-            <a:avLst/>
+            <a:off x="5532120" y="2834639"/>
+            <a:ext cx="6080760" cy="960120"/>
+          </a:xfrm>
+          <a:prstGeom prst="roundRect">
+            <a:avLst>
+              <a:gd name="adj" fmla="val 8000"/>
+            </a:avLst>
           </a:prstGeom>
           <a:solidFill>
-            <a:srgbClr val="B87878"/>
+            <a:srgbClr val="FFFFFF"/>
           </a:solidFill>
-          <a:ln>
-            <a:noFill/>
+          <a:ln w="12700">
+            <a:solidFill>
+              <a:srgbClr val="E5E7EB"/>
+            </a:solidFill>
           </a:ln>
           <a:effectLst/>
         </p:spPr>
@@ -10162,241 +9022,17 @@
       </p:sp>
       <p:sp>
         <p:nvSpPr>
-          <p:cNvPr id="42" name="Oval 41"/>
+          <p:cNvPr id="32" name="Oval 31"/>
           <p:cNvSpPr/>
           <p:nvPr/>
         </p:nvSpPr>
         <p:spPr>
           <a:xfrm>
-            <a:off x="9380901" y="3624238"/>
-            <a:ext cx="310896" cy="310896"/>
+            <a:off x="5669280" y="3063239"/>
+            <a:ext cx="502920" cy="502920"/>
           </a:xfrm>
           <a:prstGeom prst="ellipse">
             <a:avLst/>
-          </a:prstGeom>
-          <a:solidFill>
-            <a:srgbClr val="B87878"/>
-          </a:solidFill>
-          <a:ln>
-            <a:noFill/>
-          </a:ln>
-          <a:effectLst/>
-        </p:spPr>
-        <p:style>
-          <a:lnRef idx="1">
-            <a:schemeClr val="accent1"/>
-          </a:lnRef>
-          <a:fillRef idx="3">
-            <a:schemeClr val="accent1"/>
-          </a:fillRef>
-          <a:effectRef idx="2">
-            <a:schemeClr val="accent1"/>
-          </a:effectRef>
-          <a:fontRef idx="minor">
-            <a:schemeClr val="lt1"/>
-          </a:fontRef>
-        </p:style>
-        <p:txBody>
-          <a:bodyPr rtlCol="0" anchor="ctr"/>
-          <a:lstStyle/>
-          <a:p>
-            <a:pPr algn="ctr"/>
-          </a:p>
-        </p:txBody>
-      </p:sp>
-      <p:cxnSp>
-        <p:nvCxnSpPr>
-          <p:cNvPr id="43" name="Connector 42"/>
-          <p:cNvCxnSpPr/>
-          <p:nvPr/>
-        </p:nvCxnSpPr>
-        <p:spPr>
-          <a:xfrm flipV="1">
-            <a:off x="10484023" y="2970824"/>
-            <a:ext cx="288463" cy="411968"/>
-          </a:xfrm>
-          <a:prstGeom prst="line">
-            <a:avLst/>
-          </a:prstGeom>
-          <a:ln w="28575">
-            <a:solidFill>
-              <a:srgbClr val="C9A227"/>
-            </a:solidFill>
-            <a:tailEnd type="triangle" w="med" len="med"/>
-          </a:ln>
-        </p:spPr>
-        <p:style>
-          <a:lnRef idx="2">
-            <a:schemeClr val="accent1"/>
-          </a:lnRef>
-          <a:fillRef idx="0">
-            <a:schemeClr val="accent1"/>
-          </a:fillRef>
-          <a:effectRef idx="1">
-            <a:schemeClr val="accent1"/>
-          </a:effectRef>
-          <a:fontRef idx="minor">
-            <a:schemeClr val="tx1"/>
-          </a:fontRef>
-        </p:style>
-      </p:cxnSp>
-      <p:cxnSp>
-        <p:nvCxnSpPr>
-          <p:cNvPr id="44" name="Connector 43"/>
-          <p:cNvCxnSpPr/>
-          <p:nvPr/>
-        </p:nvCxnSpPr>
-        <p:spPr>
-          <a:xfrm>
-            <a:off x="10435188" y="4409060"/>
-            <a:ext cx="182767" cy="468534"/>
-          </a:xfrm>
-          <a:prstGeom prst="line">
-            <a:avLst/>
-          </a:prstGeom>
-          <a:ln w="28575">
-            <a:solidFill>
-              <a:srgbClr val="C9A227"/>
-            </a:solidFill>
-            <a:tailEnd type="triangle" w="med" len="med"/>
-          </a:ln>
-        </p:spPr>
-        <p:style>
-          <a:lnRef idx="2">
-            <a:schemeClr val="accent1"/>
-          </a:lnRef>
-          <a:fillRef idx="0">
-            <a:schemeClr val="accent1"/>
-          </a:fillRef>
-          <a:effectRef idx="1">
-            <a:schemeClr val="accent1"/>
-          </a:effectRef>
-          <a:fontRef idx="minor">
-            <a:schemeClr val="tx1"/>
-          </a:fontRef>
-        </p:style>
-      </p:cxnSp>
-      <p:cxnSp>
-        <p:nvCxnSpPr>
-          <p:cNvPr id="45" name="Connector 44"/>
-          <p:cNvCxnSpPr/>
-          <p:nvPr/>
-        </p:nvCxnSpPr>
-        <p:spPr>
-          <a:xfrm flipH="1" flipV="1">
-            <a:off x="9033560" y="3768189"/>
-            <a:ext cx="502789" cy="11497"/>
-          </a:xfrm>
-          <a:prstGeom prst="line">
-            <a:avLst/>
-          </a:prstGeom>
-          <a:ln w="28575">
-            <a:solidFill>
-              <a:srgbClr val="C9A227"/>
-            </a:solidFill>
-            <a:tailEnd type="triangle" w="med" len="med"/>
-          </a:ln>
-        </p:spPr>
-        <p:style>
-          <a:lnRef idx="2">
-            <a:schemeClr val="accent1"/>
-          </a:lnRef>
-          <a:fillRef idx="0">
-            <a:schemeClr val="accent1"/>
-          </a:fillRef>
-          <a:effectRef idx="1">
-            <a:schemeClr val="accent1"/>
-          </a:effectRef>
-          <a:fontRef idx="minor">
-            <a:schemeClr val="tx1"/>
-          </a:fontRef>
-        </p:style>
-      </p:cxnSp>
-      <p:sp>
-        <p:nvSpPr>
-          <p:cNvPr id="46" name="TextBox 45"/>
-          <p:cNvSpPr txBox="1"/>
-          <p:nvPr/>
-        </p:nvSpPr>
-        <p:spPr>
-          <a:xfrm>
-            <a:off x="8595360" y="3657600"/>
-            <a:ext cx="548640" cy="365760"/>
-          </a:xfrm>
-          <a:prstGeom prst="rect">
-            <a:avLst/>
-          </a:prstGeom>
-          <a:noFill/>
-        </p:spPr>
-        <p:txBody>
-          <a:bodyPr wrap="square" anchor="t" lIns="45720" rIns="45720" tIns="18288" bIns="18288">
-            <a:spAutoFit/>
-          </a:bodyPr>
-          <a:lstStyle/>
-          <a:p>
-            <a:pPr algn="ctr"/>
-            <a:r>
-              <a:rPr sz="2000" b="1" i="0">
-                <a:solidFill>
-                  <a:srgbClr val="64748B"/>
-                </a:solidFill>
-                <a:latin typeface="Arial"/>
-              </a:rPr>
-              <a:t>→</a:t>
-            </a:r>
-          </a:p>
-        </p:txBody>
-      </p:sp>
-      <p:sp>
-        <p:nvSpPr>
-          <p:cNvPr id="47" name="TextBox 46"/>
-          <p:cNvSpPr txBox="1"/>
-          <p:nvPr/>
-        </p:nvSpPr>
-        <p:spPr>
-          <a:xfrm>
-            <a:off x="6309360" y="4572000"/>
-            <a:ext cx="5120640" cy="365760"/>
-          </a:xfrm>
-          <a:prstGeom prst="rect">
-            <a:avLst/>
-          </a:prstGeom>
-          <a:noFill/>
-        </p:spPr>
-        <p:txBody>
-          <a:bodyPr wrap="square" anchor="t" lIns="45720" rIns="45720" tIns="18288" bIns="18288">
-            <a:spAutoFit/>
-          </a:bodyPr>
-          <a:lstStyle/>
-          <a:p>
-            <a:pPr algn="ctr"/>
-            <a:r>
-              <a:rPr sz="1100" b="0" i="1">
-                <a:solidFill>
-                  <a:srgbClr val="64748B"/>
-                </a:solidFill>
-                <a:latin typeface="Arial"/>
-              </a:rPr>
-              <a:t>arrows turned by the same angle — nothing else changed</a:t>
-            </a:r>
-          </a:p>
-        </p:txBody>
-      </p:sp>
-      <p:sp>
-        <p:nvSpPr>
-          <p:cNvPr id="48" name="Rounded Rectangle 47"/>
-          <p:cNvSpPr/>
-          <p:nvPr/>
-        </p:nvSpPr>
-        <p:spPr>
-          <a:xfrm>
-            <a:off x="548640" y="5257800"/>
-            <a:ext cx="11064240" cy="868680"/>
-          </a:xfrm>
-          <a:prstGeom prst="roundRect">
-            <a:avLst>
-              <a:gd name="adj" fmla="val 8000"/>
-            </a:avLst>
           </a:prstGeom>
           <a:solidFill>
             <a:srgbClr val="500000"/>
@@ -10421,23 +9057,32 @@
           </a:fontRef>
         </p:style>
         <p:txBody>
-          <a:bodyPr rtlCol="0" anchor="ctr"/>
+          <a:bodyPr rtlCol="0" anchor="ctr" lIns="0" rIns="0" tIns="0" bIns="0"/>
           <a:lstStyle/>
           <a:p>
             <a:pPr algn="ctr"/>
-          </a:p>
-        </p:txBody>
-      </p:sp>
-      <p:sp>
-        <p:nvSpPr>
-          <p:cNvPr id="49" name="TextBox 48"/>
+            <a:r>
+              <a:rPr sz="1400" b="1">
+                <a:solidFill>
+                  <a:srgbClr val="FFFFFF"/>
+                </a:solidFill>
+                <a:latin typeface="Arial"/>
+              </a:rPr>
+              <a:t>2</a:t>
+            </a:r>
+          </a:p>
+        </p:txBody>
+      </p:sp>
+      <p:sp>
+        <p:nvSpPr>
+          <p:cNvPr id="33" name="TextBox 32"/>
           <p:cNvSpPr txBox="1"/>
           <p:nvPr/>
         </p:nvSpPr>
         <p:spPr>
           <a:xfrm>
-            <a:off x="777240" y="5349240"/>
-            <a:ext cx="10607040" cy="685800"/>
+            <a:off x="6309360" y="2926079"/>
+            <a:ext cx="5212080" cy="320040"/>
           </a:xfrm>
           <a:prstGeom prst="rect">
             <a:avLst/>
@@ -10452,25 +9097,460 @@
           <a:p>
             <a:pPr algn="l"/>
             <a:r>
-              <a:rPr sz="1250" b="0" i="0">
+              <a:rPr sz="1400" b="1" i="0">
+                <a:solidFill>
+                  <a:srgbClr val="1E293B"/>
+                </a:solidFill>
+                <a:latin typeface="Arial"/>
+              </a:rPr>
+              <a:t>Collect neighbours</a:t>
+            </a:r>
+          </a:p>
+        </p:txBody>
+      </p:sp>
+      <p:sp>
+        <p:nvSpPr>
+          <p:cNvPr id="34" name="TextBox 33"/>
+          <p:cNvSpPr txBox="1"/>
+          <p:nvPr/>
+        </p:nvSpPr>
+        <p:spPr>
+          <a:xfrm>
+            <a:off x="6309360" y="3227832"/>
+            <a:ext cx="5212080" cy="548640"/>
+          </a:xfrm>
+          <a:prstGeom prst="rect">
+            <a:avLst/>
+          </a:prstGeom>
+          <a:noFill/>
+        </p:spPr>
+        <p:txBody>
+          <a:bodyPr wrap="square" anchor="t" lIns="45720" rIns="45720" tIns="18288" bIns="18288">
+            <a:spAutoFit/>
+          </a:bodyPr>
+          <a:lstStyle/>
+          <a:p>
+            <a:pPr algn="l"/>
+            <a:r>
+              <a:rPr sz="1100" b="0" i="0">
+                <a:solidFill>
+                  <a:srgbClr val="64748B"/>
+                </a:solidFill>
+                <a:latin typeface="Arial"/>
+              </a:rPr>
+              <a:t>For every neighbour: distance (radial basis) × direction (spherical harmonics) × its features. Summed: a two-body description Aᵢ.</a:t>
+            </a:r>
+          </a:p>
+        </p:txBody>
+      </p:sp>
+      <p:sp>
+        <p:nvSpPr>
+          <p:cNvPr id="35" name="Rounded Rectangle 34"/>
+          <p:cNvSpPr/>
+          <p:nvPr/>
+        </p:nvSpPr>
+        <p:spPr>
+          <a:xfrm>
+            <a:off x="5532120" y="3886200"/>
+            <a:ext cx="6080760" cy="960120"/>
+          </a:xfrm>
+          <a:prstGeom prst="roundRect">
+            <a:avLst>
+              <a:gd name="adj" fmla="val 8000"/>
+            </a:avLst>
+          </a:prstGeom>
+          <a:solidFill>
+            <a:srgbClr val="FFFFFF"/>
+          </a:solidFill>
+          <a:ln w="12700">
+            <a:solidFill>
+              <a:srgbClr val="E5E7EB"/>
+            </a:solidFill>
+          </a:ln>
+          <a:effectLst/>
+        </p:spPr>
+        <p:style>
+          <a:lnRef idx="1">
+            <a:schemeClr val="accent1"/>
+          </a:lnRef>
+          <a:fillRef idx="3">
+            <a:schemeClr val="accent1"/>
+          </a:fillRef>
+          <a:effectRef idx="2">
+            <a:schemeClr val="accent1"/>
+          </a:effectRef>
+          <a:fontRef idx="minor">
+            <a:schemeClr val="lt1"/>
+          </a:fontRef>
+        </p:style>
+        <p:txBody>
+          <a:bodyPr rtlCol="0" anchor="ctr"/>
+          <a:lstStyle/>
+          <a:p>
+            <a:pPr algn="ctr"/>
+          </a:p>
+        </p:txBody>
+      </p:sp>
+      <p:sp>
+        <p:nvSpPr>
+          <p:cNvPr id="36" name="Oval 35"/>
+          <p:cNvSpPr/>
+          <p:nvPr/>
+        </p:nvSpPr>
+        <p:spPr>
+          <a:xfrm>
+            <a:off x="5669280" y="4114800"/>
+            <a:ext cx="502920" cy="502920"/>
+          </a:xfrm>
+          <a:prstGeom prst="ellipse">
+            <a:avLst/>
+          </a:prstGeom>
+          <a:solidFill>
+            <a:srgbClr val="500000"/>
+          </a:solidFill>
+          <a:ln>
+            <a:noFill/>
+          </a:ln>
+          <a:effectLst/>
+        </p:spPr>
+        <p:style>
+          <a:lnRef idx="1">
+            <a:schemeClr val="accent1"/>
+          </a:lnRef>
+          <a:fillRef idx="3">
+            <a:schemeClr val="accent1"/>
+          </a:fillRef>
+          <a:effectRef idx="2">
+            <a:schemeClr val="accent1"/>
+          </a:effectRef>
+          <a:fontRef idx="minor">
+            <a:schemeClr val="lt1"/>
+          </a:fontRef>
+        </p:style>
+        <p:txBody>
+          <a:bodyPr rtlCol="0" anchor="ctr" lIns="0" rIns="0" tIns="0" bIns="0"/>
+          <a:lstStyle/>
+          <a:p>
+            <a:pPr algn="ctr"/>
+            <a:r>
+              <a:rPr sz="1400" b="1">
                 <a:solidFill>
                   <a:srgbClr val="FFFFFF"/>
                 </a:solidFill>
                 <a:latin typeface="Arial"/>
               </a:rPr>
-              <a:t>Why it matters: forces are vectors. A network that must learn rotation from data wastes data and still gets it slightly wrong.</a:t>
-            </a:r>
-          </a:p>
+              <a:t>3</a:t>
+            </a:r>
+          </a:p>
+        </p:txBody>
+      </p:sp>
+      <p:sp>
+        <p:nvSpPr>
+          <p:cNvPr id="37" name="TextBox 36"/>
+          <p:cNvSpPr txBox="1"/>
+          <p:nvPr/>
+        </p:nvSpPr>
+        <p:spPr>
+          <a:xfrm>
+            <a:off x="6309360" y="3977639"/>
+            <a:ext cx="5212080" cy="320040"/>
+          </a:xfrm>
+          <a:prstGeom prst="rect">
+            <a:avLst/>
+          </a:prstGeom>
+          <a:noFill/>
+        </p:spPr>
+        <p:txBody>
+          <a:bodyPr wrap="square" anchor="t" lIns="45720" rIns="45720" tIns="18288" bIns="18288">
+            <a:spAutoFit/>
+          </a:bodyPr>
+          <a:lstStyle/>
           <a:p>
             <a:pPr algn="l"/>
             <a:r>
-              <a:rPr sz="1250" b="0" i="0">
+              <a:rPr sz="1400" b="1" i="0">
+                <a:solidFill>
+                  <a:srgbClr val="1E293B"/>
+                </a:solidFill>
+                <a:latin typeface="Arial"/>
+              </a:rPr>
+              <a:t>Multiply</a:t>
+            </a:r>
+          </a:p>
+        </p:txBody>
+      </p:sp>
+      <p:sp>
+        <p:nvSpPr>
+          <p:cNvPr id="38" name="TextBox 37"/>
+          <p:cNvSpPr txBox="1"/>
+          <p:nvPr/>
+        </p:nvSpPr>
+        <p:spPr>
+          <a:xfrm>
+            <a:off x="6309360" y="4279392"/>
+            <a:ext cx="5212080" cy="548640"/>
+          </a:xfrm>
+          <a:prstGeom prst="rect">
+            <a:avLst/>
+          </a:prstGeom>
+          <a:noFill/>
+        </p:spPr>
+        <p:txBody>
+          <a:bodyPr wrap="square" anchor="t" lIns="45720" rIns="45720" tIns="18288" bIns="18288">
+            <a:spAutoFit/>
+          </a:bodyPr>
+          <a:lstStyle/>
+          <a:p>
+            <a:pPr algn="l"/>
+            <a:r>
+              <a:rPr sz="1100" b="0" i="0">
+                <a:solidFill>
+                  <a:srgbClr val="64748B"/>
+                </a:solidFill>
+                <a:latin typeface="Arial"/>
+              </a:rPr>
+              <a:t>Products of Aᵢ with itself encode angles and dihedrals — many-body information in one message (body order 4). This is the ACE idea.</a:t>
+            </a:r>
+          </a:p>
+        </p:txBody>
+      </p:sp>
+      <p:sp>
+        <p:nvSpPr>
+          <p:cNvPr id="39" name="Rounded Rectangle 38"/>
+          <p:cNvSpPr/>
+          <p:nvPr/>
+        </p:nvSpPr>
+        <p:spPr>
+          <a:xfrm>
+            <a:off x="5532120" y="4937760"/>
+            <a:ext cx="6080760" cy="960120"/>
+          </a:xfrm>
+          <a:prstGeom prst="roundRect">
+            <a:avLst>
+              <a:gd name="adj" fmla="val 8000"/>
+            </a:avLst>
+          </a:prstGeom>
+          <a:solidFill>
+            <a:srgbClr val="FFFFFF"/>
+          </a:solidFill>
+          <a:ln w="12700">
+            <a:solidFill>
+              <a:srgbClr val="E5E7EB"/>
+            </a:solidFill>
+          </a:ln>
+          <a:effectLst/>
+        </p:spPr>
+        <p:style>
+          <a:lnRef idx="1">
+            <a:schemeClr val="accent1"/>
+          </a:lnRef>
+          <a:fillRef idx="3">
+            <a:schemeClr val="accent1"/>
+          </a:fillRef>
+          <a:effectRef idx="2">
+            <a:schemeClr val="accent1"/>
+          </a:effectRef>
+          <a:fontRef idx="minor">
+            <a:schemeClr val="lt1"/>
+          </a:fontRef>
+        </p:style>
+        <p:txBody>
+          <a:bodyPr rtlCol="0" anchor="ctr"/>
+          <a:lstStyle/>
+          <a:p>
+            <a:pPr algn="ctr"/>
+          </a:p>
+        </p:txBody>
+      </p:sp>
+      <p:sp>
+        <p:nvSpPr>
+          <p:cNvPr id="40" name="Oval 39"/>
+          <p:cNvSpPr/>
+          <p:nvPr/>
+        </p:nvSpPr>
+        <p:spPr>
+          <a:xfrm>
+            <a:off x="5669280" y="5166360"/>
+            <a:ext cx="502920" cy="502920"/>
+          </a:xfrm>
+          <a:prstGeom prst="ellipse">
+            <a:avLst/>
+          </a:prstGeom>
+          <a:solidFill>
+            <a:srgbClr val="500000"/>
+          </a:solidFill>
+          <a:ln>
+            <a:noFill/>
+          </a:ln>
+          <a:effectLst/>
+        </p:spPr>
+        <p:style>
+          <a:lnRef idx="1">
+            <a:schemeClr val="accent1"/>
+          </a:lnRef>
+          <a:fillRef idx="3">
+            <a:schemeClr val="accent1"/>
+          </a:fillRef>
+          <a:effectRef idx="2">
+            <a:schemeClr val="accent1"/>
+          </a:effectRef>
+          <a:fontRef idx="minor">
+            <a:schemeClr val="lt1"/>
+          </a:fontRef>
+        </p:style>
+        <p:txBody>
+          <a:bodyPr rtlCol="0" anchor="ctr" lIns="0" rIns="0" tIns="0" bIns="0"/>
+          <a:lstStyle/>
+          <a:p>
+            <a:pPr algn="ctr"/>
+            <a:r>
+              <a:rPr sz="1400" b="1">
                 <a:solidFill>
                   <a:srgbClr val="FFFFFF"/>
                 </a:solidFill>
                 <a:latin typeface="Arial"/>
               </a:rPr>
-              <a:t>MACE builds the symmetry in — its features carry rotation labels (spherical harmonics), so symmetry is exact and training data goes further.</a:t>
+              <a:t>4</a:t>
+            </a:r>
+          </a:p>
+        </p:txBody>
+      </p:sp>
+      <p:sp>
+        <p:nvSpPr>
+          <p:cNvPr id="41" name="TextBox 40"/>
+          <p:cNvSpPr txBox="1"/>
+          <p:nvPr/>
+        </p:nvSpPr>
+        <p:spPr>
+          <a:xfrm>
+            <a:off x="6309360" y="5029200"/>
+            <a:ext cx="5212080" cy="320040"/>
+          </a:xfrm>
+          <a:prstGeom prst="rect">
+            <a:avLst/>
+          </a:prstGeom>
+          <a:noFill/>
+        </p:spPr>
+        <p:txBody>
+          <a:bodyPr wrap="square" anchor="t" lIns="45720" rIns="45720" tIns="18288" bIns="18288">
+            <a:spAutoFit/>
+          </a:bodyPr>
+          <a:lstStyle/>
+          <a:p>
+            <a:pPr algn="l"/>
+            <a:r>
+              <a:rPr sz="1400" b="1" i="0">
+                <a:solidFill>
+                  <a:srgbClr val="1E293B"/>
+                </a:solidFill>
+                <a:latin typeface="Arial"/>
+              </a:rPr>
+              <a:t>Update, read out, repeat</a:t>
+            </a:r>
+          </a:p>
+        </p:txBody>
+      </p:sp>
+      <p:sp>
+        <p:nvSpPr>
+          <p:cNvPr id="42" name="TextBox 41"/>
+          <p:cNvSpPr txBox="1"/>
+          <p:nvPr/>
+        </p:nvSpPr>
+        <p:spPr>
+          <a:xfrm>
+            <a:off x="6309360" y="5330952"/>
+            <a:ext cx="5212080" cy="548640"/>
+          </a:xfrm>
+          <a:prstGeom prst="rect">
+            <a:avLst/>
+          </a:prstGeom>
+          <a:noFill/>
+        </p:spPr>
+        <p:txBody>
+          <a:bodyPr wrap="square" anchor="t" lIns="45720" rIns="45720" tIns="18288" bIns="18288">
+            <a:spAutoFit/>
+          </a:bodyPr>
+          <a:lstStyle/>
+          <a:p>
+            <a:pPr algn="l"/>
+            <a:r>
+              <a:rPr sz="1100" b="0" i="0">
+                <a:solidFill>
+                  <a:srgbClr val="64748B"/>
+                </a:solidFill>
+                <a:latin typeface="Arial"/>
+              </a:rPr>
+              <a:t>Update the atom's features; after 2 layers a readout gives Eᵢ. Total E = Σ Eᵢ; forces = −∂E/∂r.</a:t>
+            </a:r>
+          </a:p>
+        </p:txBody>
+      </p:sp>
+      <p:sp>
+        <p:nvSpPr>
+          <p:cNvPr id="43" name="TextBox 42"/>
+          <p:cNvSpPr txBox="1"/>
+          <p:nvPr/>
+        </p:nvSpPr>
+        <p:spPr>
+          <a:xfrm>
+            <a:off x="5532120" y="6035040"/>
+            <a:ext cx="6080760" cy="320040"/>
+          </a:xfrm>
+          <a:prstGeom prst="rect">
+            <a:avLst/>
+          </a:prstGeom>
+          <a:noFill/>
+        </p:spPr>
+        <p:txBody>
+          <a:bodyPr wrap="square" anchor="t" lIns="45720" rIns="45720" tIns="18288" bIns="18288">
+            <a:spAutoFit/>
+          </a:bodyPr>
+          <a:lstStyle/>
+          <a:p>
+            <a:pPr algn="l"/>
+            <a:r>
+              <a:rPr sz="1100" b="1" i="0">
+                <a:solidFill>
+                  <a:srgbClr val="500000"/>
+                </a:solidFill>
+                <a:latin typeface="Arial"/>
+              </a:rPr>
+              <a:t>2 layers × 6 Å = 12 Å receptive field.  MACE-MP-0: 1.5 M structures, 89 elements, PBE.</a:t>
+            </a:r>
+          </a:p>
+        </p:txBody>
+      </p:sp>
+      <p:sp>
+        <p:nvSpPr>
+          <p:cNvPr id="44" name="TextBox 43"/>
+          <p:cNvSpPr txBox="1"/>
+          <p:nvPr/>
+        </p:nvSpPr>
+        <p:spPr>
+          <a:xfrm>
+            <a:off x="548640" y="6428232"/>
+            <a:ext cx="9601200" cy="228600"/>
+          </a:xfrm>
+          <a:prstGeom prst="rect">
+            <a:avLst/>
+          </a:prstGeom>
+          <a:noFill/>
+        </p:spPr>
+        <p:txBody>
+          <a:bodyPr wrap="square" anchor="t" lIns="45720" rIns="45720" tIns="18288" bIns="18288">
+            <a:spAutoFit/>
+          </a:bodyPr>
+          <a:lstStyle/>
+          <a:p>
+            <a:pPr algn="l"/>
+            <a:r>
+              <a:rPr sz="900" b="0" i="0">
+                <a:solidFill>
+                  <a:srgbClr val="94A3B8"/>
+                </a:solidFill>
+                <a:latin typeface="Arial"/>
+              </a:rPr>
+              <a:t>Batatia, Kovács, Simm, Ortner &amp; Csányi, NeurIPS 2022; Batatia et al., arXiv:2401.00096 (MACE-MP-0)</a:t>
             </a:r>
           </a:p>
         </p:txBody>
@@ -10523,6 +9603,1863 @@
                 </a:solidFill>
                 <a:latin typeface="Arial"/>
               </a:rPr>
+              <a:t>BACKUP · SYMMETRY</a:t>
+            </a:r>
+          </a:p>
+        </p:txBody>
+      </p:sp>
+      <p:sp>
+        <p:nvSpPr>
+          <p:cNvPr id="3" name="TextBox 2"/>
+          <p:cNvSpPr txBox="1"/>
+          <p:nvPr/>
+        </p:nvSpPr>
+        <p:spPr>
+          <a:xfrm>
+            <a:off x="548640" y="566928"/>
+            <a:ext cx="11064240" cy="640080"/>
+          </a:xfrm>
+          <a:prstGeom prst="rect">
+            <a:avLst/>
+          </a:prstGeom>
+          <a:noFill/>
+        </p:spPr>
+        <p:txBody>
+          <a:bodyPr wrap="square" anchor="t" lIns="45720" rIns="45720" tIns="18288" bIns="18288">
+            <a:spAutoFit/>
+          </a:bodyPr>
+          <a:lstStyle/>
+          <a:p>
+            <a:pPr algn="l"/>
+            <a:r>
+              <a:rPr sz="3400" b="1" i="0">
+                <a:solidFill>
+                  <a:srgbClr val="500000"/>
+                </a:solidFill>
+                <a:latin typeface="Arial"/>
+              </a:rPr>
+              <a:t>Equivariance for absolute beginners</a:t>
+            </a:r>
+          </a:p>
+        </p:txBody>
+      </p:sp>
+      <p:sp>
+        <p:nvSpPr>
+          <p:cNvPr id="4" name="TextBox 3"/>
+          <p:cNvSpPr txBox="1"/>
+          <p:nvPr/>
+        </p:nvSpPr>
+        <p:spPr>
+          <a:xfrm>
+            <a:off x="548640" y="1207008"/>
+            <a:ext cx="11064240" cy="365760"/>
+          </a:xfrm>
+          <a:prstGeom prst="rect">
+            <a:avLst/>
+          </a:prstGeom>
+          <a:noFill/>
+        </p:spPr>
+        <p:txBody>
+          <a:bodyPr wrap="square" anchor="t" lIns="45720" rIns="45720" tIns="18288" bIns="18288">
+            <a:spAutoFit/>
+          </a:bodyPr>
+          <a:lstStyle/>
+          <a:p>
+            <a:pPr algn="l"/>
+            <a:r>
+              <a:rPr sz="1500" b="0" i="1">
+                <a:solidFill>
+                  <a:srgbClr val="64748B"/>
+                </a:solidFill>
+                <a:latin typeface="Arial"/>
+              </a:rPr>
+              <a:t>Rotate the input and the output rotates with it — exactly, not approximately</a:t>
+            </a:r>
+          </a:p>
+        </p:txBody>
+      </p:sp>
+      <p:sp>
+        <p:nvSpPr>
+          <p:cNvPr id="5" name="TextBox 4"/>
+          <p:cNvSpPr txBox="1"/>
+          <p:nvPr/>
+        </p:nvSpPr>
+        <p:spPr>
+          <a:xfrm>
+            <a:off x="11155680" y="6400800"/>
+            <a:ext cx="548640" cy="228600"/>
+          </a:xfrm>
+          <a:prstGeom prst="rect">
+            <a:avLst/>
+          </a:prstGeom>
+          <a:noFill/>
+        </p:spPr>
+        <p:txBody>
+          <a:bodyPr wrap="square" anchor="t" lIns="45720" rIns="45720" tIns="18288" bIns="18288">
+            <a:spAutoFit/>
+          </a:bodyPr>
+          <a:lstStyle/>
+          <a:p>
+            <a:pPr algn="r"/>
+            <a:r>
+              <a:rPr sz="1000" b="1" i="0">
+                <a:solidFill>
+                  <a:srgbClr val="500000"/>
+                </a:solidFill>
+                <a:latin typeface="Arial"/>
+              </a:rPr>
+              <a:t>15</a:t>
+            </a:r>
+          </a:p>
+        </p:txBody>
+      </p:sp>
+      <p:sp>
+        <p:nvSpPr>
+          <p:cNvPr id="6" name="Rounded Rectangle 5"/>
+          <p:cNvSpPr/>
+          <p:nvPr/>
+        </p:nvSpPr>
+        <p:spPr>
+          <a:xfrm>
+            <a:off x="548640" y="1783080"/>
+            <a:ext cx="5532120" cy="3246120"/>
+          </a:xfrm>
+          <a:prstGeom prst="roundRect">
+            <a:avLst>
+              <a:gd name="adj" fmla="val 8000"/>
+            </a:avLst>
+          </a:prstGeom>
+          <a:solidFill>
+            <a:srgbClr val="F5F1F1"/>
+          </a:solidFill>
+          <a:ln>
+            <a:noFill/>
+          </a:ln>
+          <a:effectLst/>
+        </p:spPr>
+        <p:style>
+          <a:lnRef idx="1">
+            <a:schemeClr val="accent1"/>
+          </a:lnRef>
+          <a:fillRef idx="3">
+            <a:schemeClr val="accent1"/>
+          </a:fillRef>
+          <a:effectRef idx="2">
+            <a:schemeClr val="accent1"/>
+          </a:effectRef>
+          <a:fontRef idx="minor">
+            <a:schemeClr val="lt1"/>
+          </a:fontRef>
+        </p:style>
+        <p:txBody>
+          <a:bodyPr rtlCol="0" anchor="ctr"/>
+          <a:lstStyle/>
+          <a:p>
+            <a:pPr algn="ctr"/>
+          </a:p>
+        </p:txBody>
+      </p:sp>
+      <p:sp>
+        <p:nvSpPr>
+          <p:cNvPr id="7" name="TextBox 6"/>
+          <p:cNvSpPr txBox="1"/>
+          <p:nvPr/>
+        </p:nvSpPr>
+        <p:spPr>
+          <a:xfrm>
+            <a:off x="777240" y="1920240"/>
+            <a:ext cx="5120640" cy="365760"/>
+          </a:xfrm>
+          <a:prstGeom prst="rect">
+            <a:avLst/>
+          </a:prstGeom>
+          <a:noFill/>
+        </p:spPr>
+        <p:txBody>
+          <a:bodyPr wrap="square" anchor="t" lIns="45720" rIns="45720" tIns="18288" bIns="18288">
+            <a:spAutoFit/>
+          </a:bodyPr>
+          <a:lstStyle/>
+          <a:p>
+            <a:pPr algn="l"/>
+            <a:r>
+              <a:rPr sz="1600" b="1" i="0">
+                <a:solidFill>
+                  <a:srgbClr val="1E293B"/>
+                </a:solidFill>
+                <a:latin typeface="Arial"/>
+              </a:rPr>
+              <a:t>Invariant: the energy</a:t>
+            </a:r>
+          </a:p>
+        </p:txBody>
+      </p:sp>
+      <p:sp>
+        <p:nvSpPr>
+          <p:cNvPr id="8" name="TextBox 7"/>
+          <p:cNvSpPr txBox="1"/>
+          <p:nvPr/>
+        </p:nvSpPr>
+        <p:spPr>
+          <a:xfrm>
+            <a:off x="777240" y="2286000"/>
+            <a:ext cx="5120640" cy="365760"/>
+          </a:xfrm>
+          <a:prstGeom prst="rect">
+            <a:avLst/>
+          </a:prstGeom>
+          <a:noFill/>
+        </p:spPr>
+        <p:txBody>
+          <a:bodyPr wrap="square" anchor="t" lIns="45720" rIns="45720" tIns="18288" bIns="18288">
+            <a:spAutoFit/>
+          </a:bodyPr>
+          <a:lstStyle/>
+          <a:p>
+            <a:pPr algn="l"/>
+            <a:r>
+              <a:rPr sz="1200" b="0" i="0">
+                <a:solidFill>
+                  <a:srgbClr val="64748B"/>
+                </a:solidFill>
+                <a:latin typeface="Arial"/>
+              </a:rPr>
+              <a:t>Rotate the molecule → the same number comes out</a:t>
+            </a:r>
+          </a:p>
+        </p:txBody>
+      </p:sp>
+      <p:cxnSp>
+        <p:nvCxnSpPr>
+          <p:cNvPr id="9" name="Connector 8"/>
+          <p:cNvCxnSpPr/>
+          <p:nvPr/>
+        </p:nvCxnSpPr>
+        <p:spPr>
+          <a:xfrm>
+            <a:off x="2011680" y="3291840"/>
+            <a:ext cx="548640" cy="868680"/>
+          </a:xfrm>
+          <a:prstGeom prst="line">
+            <a:avLst/>
+          </a:prstGeom>
+          <a:ln w="15875">
+            <a:solidFill>
+              <a:srgbClr val="94A3B8"/>
+            </a:solidFill>
+          </a:ln>
+        </p:spPr>
+        <p:style>
+          <a:lnRef idx="2">
+            <a:schemeClr val="accent1"/>
+          </a:lnRef>
+          <a:fillRef idx="0">
+            <a:schemeClr val="accent1"/>
+          </a:fillRef>
+          <a:effectRef idx="1">
+            <a:schemeClr val="accent1"/>
+          </a:effectRef>
+          <a:fontRef idx="minor">
+            <a:schemeClr val="tx1"/>
+          </a:fontRef>
+        </p:style>
+      </p:cxnSp>
+      <p:cxnSp>
+        <p:nvCxnSpPr>
+          <p:cNvPr id="10" name="Connector 9"/>
+          <p:cNvCxnSpPr/>
+          <p:nvPr/>
+        </p:nvCxnSpPr>
+        <p:spPr>
+          <a:xfrm flipH="1">
+            <a:off x="1463040" y="4160520"/>
+            <a:ext cx="1097280" cy="0"/>
+          </a:xfrm>
+          <a:prstGeom prst="line">
+            <a:avLst/>
+          </a:prstGeom>
+          <a:ln w="15875">
+            <a:solidFill>
+              <a:srgbClr val="94A3B8"/>
+            </a:solidFill>
+          </a:ln>
+        </p:spPr>
+        <p:style>
+          <a:lnRef idx="2">
+            <a:schemeClr val="accent1"/>
+          </a:lnRef>
+          <a:fillRef idx="0">
+            <a:schemeClr val="accent1"/>
+          </a:fillRef>
+          <a:effectRef idx="1">
+            <a:schemeClr val="accent1"/>
+          </a:effectRef>
+          <a:fontRef idx="minor">
+            <a:schemeClr val="tx1"/>
+          </a:fontRef>
+        </p:style>
+      </p:cxnSp>
+      <p:cxnSp>
+        <p:nvCxnSpPr>
+          <p:cNvPr id="11" name="Connector 10"/>
+          <p:cNvCxnSpPr/>
+          <p:nvPr/>
+        </p:nvCxnSpPr>
+        <p:spPr>
+          <a:xfrm flipV="1">
+            <a:off x="1463040" y="3291840"/>
+            <a:ext cx="548640" cy="868680"/>
+          </a:xfrm>
+          <a:prstGeom prst="line">
+            <a:avLst/>
+          </a:prstGeom>
+          <a:ln w="15875">
+            <a:solidFill>
+              <a:srgbClr val="94A3B8"/>
+            </a:solidFill>
+          </a:ln>
+        </p:spPr>
+        <p:style>
+          <a:lnRef idx="2">
+            <a:schemeClr val="accent1"/>
+          </a:lnRef>
+          <a:fillRef idx="0">
+            <a:schemeClr val="accent1"/>
+          </a:fillRef>
+          <a:effectRef idx="1">
+            <a:schemeClr val="accent1"/>
+          </a:effectRef>
+          <a:fontRef idx="minor">
+            <a:schemeClr val="tx1"/>
+          </a:fontRef>
+        </p:style>
+      </p:cxnSp>
+      <p:sp>
+        <p:nvSpPr>
+          <p:cNvPr id="12" name="Oval 11"/>
+          <p:cNvSpPr/>
+          <p:nvPr/>
+        </p:nvSpPr>
+        <p:spPr>
+          <a:xfrm>
+            <a:off x="1856232" y="3136392"/>
+            <a:ext cx="310896" cy="310896"/>
+          </a:xfrm>
+          <a:prstGeom prst="ellipse">
+            <a:avLst/>
+          </a:prstGeom>
+          <a:solidFill>
+            <a:srgbClr val="500000"/>
+          </a:solidFill>
+          <a:ln>
+            <a:noFill/>
+          </a:ln>
+          <a:effectLst/>
+        </p:spPr>
+        <p:style>
+          <a:lnRef idx="1">
+            <a:schemeClr val="accent1"/>
+          </a:lnRef>
+          <a:fillRef idx="3">
+            <a:schemeClr val="accent1"/>
+          </a:fillRef>
+          <a:effectRef idx="2">
+            <a:schemeClr val="accent1"/>
+          </a:effectRef>
+          <a:fontRef idx="minor">
+            <a:schemeClr val="lt1"/>
+          </a:fontRef>
+        </p:style>
+        <p:txBody>
+          <a:bodyPr rtlCol="0" anchor="ctr"/>
+          <a:lstStyle/>
+          <a:p>
+            <a:pPr algn="ctr"/>
+          </a:p>
+        </p:txBody>
+      </p:sp>
+      <p:sp>
+        <p:nvSpPr>
+          <p:cNvPr id="13" name="Oval 12"/>
+          <p:cNvSpPr/>
+          <p:nvPr/>
+        </p:nvSpPr>
+        <p:spPr>
+          <a:xfrm>
+            <a:off x="2404872" y="4005072"/>
+            <a:ext cx="310896" cy="310896"/>
+          </a:xfrm>
+          <a:prstGeom prst="ellipse">
+            <a:avLst/>
+          </a:prstGeom>
+          <a:solidFill>
+            <a:srgbClr val="B87878"/>
+          </a:solidFill>
+          <a:ln>
+            <a:noFill/>
+          </a:ln>
+          <a:effectLst/>
+        </p:spPr>
+        <p:style>
+          <a:lnRef idx="1">
+            <a:schemeClr val="accent1"/>
+          </a:lnRef>
+          <a:fillRef idx="3">
+            <a:schemeClr val="accent1"/>
+          </a:fillRef>
+          <a:effectRef idx="2">
+            <a:schemeClr val="accent1"/>
+          </a:effectRef>
+          <a:fontRef idx="minor">
+            <a:schemeClr val="lt1"/>
+          </a:fontRef>
+        </p:style>
+        <p:txBody>
+          <a:bodyPr rtlCol="0" anchor="ctr"/>
+          <a:lstStyle/>
+          <a:p>
+            <a:pPr algn="ctr"/>
+          </a:p>
+        </p:txBody>
+      </p:sp>
+      <p:sp>
+        <p:nvSpPr>
+          <p:cNvPr id="14" name="Oval 13"/>
+          <p:cNvSpPr/>
+          <p:nvPr/>
+        </p:nvSpPr>
+        <p:spPr>
+          <a:xfrm>
+            <a:off x="1307592" y="4005072"/>
+            <a:ext cx="310896" cy="310896"/>
+          </a:xfrm>
+          <a:prstGeom prst="ellipse">
+            <a:avLst/>
+          </a:prstGeom>
+          <a:solidFill>
+            <a:srgbClr val="B87878"/>
+          </a:solidFill>
+          <a:ln>
+            <a:noFill/>
+          </a:ln>
+          <a:effectLst/>
+        </p:spPr>
+        <p:style>
+          <a:lnRef idx="1">
+            <a:schemeClr val="accent1"/>
+          </a:lnRef>
+          <a:fillRef idx="3">
+            <a:schemeClr val="accent1"/>
+          </a:fillRef>
+          <a:effectRef idx="2">
+            <a:schemeClr val="accent1"/>
+          </a:effectRef>
+          <a:fontRef idx="minor">
+            <a:schemeClr val="lt1"/>
+          </a:fontRef>
+        </p:style>
+        <p:txBody>
+          <a:bodyPr rtlCol="0" anchor="ctr"/>
+          <a:lstStyle/>
+          <a:p>
+            <a:pPr algn="ctr"/>
+          </a:p>
+        </p:txBody>
+      </p:sp>
+      <p:sp>
+        <p:nvSpPr>
+          <p:cNvPr id="15" name="TextBox 14"/>
+          <p:cNvSpPr txBox="1"/>
+          <p:nvPr/>
+        </p:nvSpPr>
+        <p:spPr>
+          <a:xfrm>
+            <a:off x="1188720" y="4480560"/>
+            <a:ext cx="1645920" cy="320040"/>
+          </a:xfrm>
+          <a:prstGeom prst="rect">
+            <a:avLst/>
+          </a:prstGeom>
+          <a:noFill/>
+        </p:spPr>
+        <p:txBody>
+          <a:bodyPr wrap="square" anchor="t" lIns="45720" rIns="45720" tIns="18288" bIns="18288">
+            <a:spAutoFit/>
+          </a:bodyPr>
+          <a:lstStyle/>
+          <a:p>
+            <a:pPr algn="ctr"/>
+            <a:r>
+              <a:rPr sz="1200" b="1" i="0">
+                <a:solidFill>
+                  <a:srgbClr val="500000"/>
+                </a:solidFill>
+                <a:latin typeface="Cambria Math"/>
+              </a:rPr>
+              <a:t>E = −3.72 eV</a:t>
+            </a:r>
+          </a:p>
+        </p:txBody>
+      </p:sp>
+      <p:cxnSp>
+        <p:nvCxnSpPr>
+          <p:cNvPr id="16" name="Connector 15"/>
+          <p:cNvCxnSpPr/>
+          <p:nvPr/>
+        </p:nvCxnSpPr>
+        <p:spPr>
+          <a:xfrm>
+            <a:off x="4663440" y="3291840"/>
+            <a:ext cx="548639" cy="868680"/>
+          </a:xfrm>
+          <a:prstGeom prst="line">
+            <a:avLst/>
+          </a:prstGeom>
+          <a:ln w="15875">
+            <a:solidFill>
+              <a:srgbClr val="94A3B8"/>
+            </a:solidFill>
+          </a:ln>
+        </p:spPr>
+        <p:style>
+          <a:lnRef idx="2">
+            <a:schemeClr val="accent1"/>
+          </a:lnRef>
+          <a:fillRef idx="0">
+            <a:schemeClr val="accent1"/>
+          </a:fillRef>
+          <a:effectRef idx="1">
+            <a:schemeClr val="accent1"/>
+          </a:effectRef>
+          <a:fontRef idx="minor">
+            <a:schemeClr val="tx1"/>
+          </a:fontRef>
+        </p:style>
+      </p:cxnSp>
+      <p:cxnSp>
+        <p:nvCxnSpPr>
+          <p:cNvPr id="17" name="Connector 16"/>
+          <p:cNvCxnSpPr/>
+          <p:nvPr/>
+        </p:nvCxnSpPr>
+        <p:spPr>
+          <a:xfrm flipH="1">
+            <a:off x="4114800" y="4160520"/>
+            <a:ext cx="1097279" cy="0"/>
+          </a:xfrm>
+          <a:prstGeom prst="line">
+            <a:avLst/>
+          </a:prstGeom>
+          <a:ln w="15875">
+            <a:solidFill>
+              <a:srgbClr val="94A3B8"/>
+            </a:solidFill>
+          </a:ln>
+        </p:spPr>
+        <p:style>
+          <a:lnRef idx="2">
+            <a:schemeClr val="accent1"/>
+          </a:lnRef>
+          <a:fillRef idx="0">
+            <a:schemeClr val="accent1"/>
+          </a:fillRef>
+          <a:effectRef idx="1">
+            <a:schemeClr val="accent1"/>
+          </a:effectRef>
+          <a:fontRef idx="minor">
+            <a:schemeClr val="tx1"/>
+          </a:fontRef>
+        </p:style>
+      </p:cxnSp>
+      <p:cxnSp>
+        <p:nvCxnSpPr>
+          <p:cNvPr id="18" name="Connector 17"/>
+          <p:cNvCxnSpPr/>
+          <p:nvPr/>
+        </p:nvCxnSpPr>
+        <p:spPr>
+          <a:xfrm flipV="1">
+            <a:off x="4114800" y="3291840"/>
+            <a:ext cx="548640" cy="868680"/>
+          </a:xfrm>
+          <a:prstGeom prst="line">
+            <a:avLst/>
+          </a:prstGeom>
+          <a:ln w="15875">
+            <a:solidFill>
+              <a:srgbClr val="94A3B8"/>
+            </a:solidFill>
+          </a:ln>
+        </p:spPr>
+        <p:style>
+          <a:lnRef idx="2">
+            <a:schemeClr val="accent1"/>
+          </a:lnRef>
+          <a:fillRef idx="0">
+            <a:schemeClr val="accent1"/>
+          </a:fillRef>
+          <a:effectRef idx="1">
+            <a:schemeClr val="accent1"/>
+          </a:effectRef>
+          <a:fontRef idx="minor">
+            <a:schemeClr val="tx1"/>
+          </a:fontRef>
+        </p:style>
+      </p:cxnSp>
+      <p:sp>
+        <p:nvSpPr>
+          <p:cNvPr id="19" name="Oval 18"/>
+          <p:cNvSpPr/>
+          <p:nvPr/>
+        </p:nvSpPr>
+        <p:spPr>
+          <a:xfrm>
+            <a:off x="4507992" y="3136392"/>
+            <a:ext cx="310896" cy="310896"/>
+          </a:xfrm>
+          <a:prstGeom prst="ellipse">
+            <a:avLst/>
+          </a:prstGeom>
+          <a:solidFill>
+            <a:srgbClr val="500000"/>
+          </a:solidFill>
+          <a:ln>
+            <a:noFill/>
+          </a:ln>
+          <a:effectLst/>
+        </p:spPr>
+        <p:style>
+          <a:lnRef idx="1">
+            <a:schemeClr val="accent1"/>
+          </a:lnRef>
+          <a:fillRef idx="3">
+            <a:schemeClr val="accent1"/>
+          </a:fillRef>
+          <a:effectRef idx="2">
+            <a:schemeClr val="accent1"/>
+          </a:effectRef>
+          <a:fontRef idx="minor">
+            <a:schemeClr val="lt1"/>
+          </a:fontRef>
+        </p:style>
+        <p:txBody>
+          <a:bodyPr rtlCol="0" anchor="ctr"/>
+          <a:lstStyle/>
+          <a:p>
+            <a:pPr algn="ctr"/>
+          </a:p>
+        </p:txBody>
+      </p:sp>
+      <p:sp>
+        <p:nvSpPr>
+          <p:cNvPr id="20" name="Oval 19"/>
+          <p:cNvSpPr/>
+          <p:nvPr/>
+        </p:nvSpPr>
+        <p:spPr>
+          <a:xfrm>
+            <a:off x="5056631" y="4005072"/>
+            <a:ext cx="310896" cy="310896"/>
+          </a:xfrm>
+          <a:prstGeom prst="ellipse">
+            <a:avLst/>
+          </a:prstGeom>
+          <a:solidFill>
+            <a:srgbClr val="B87878"/>
+          </a:solidFill>
+          <a:ln>
+            <a:noFill/>
+          </a:ln>
+          <a:effectLst/>
+        </p:spPr>
+        <p:style>
+          <a:lnRef idx="1">
+            <a:schemeClr val="accent1"/>
+          </a:lnRef>
+          <a:fillRef idx="3">
+            <a:schemeClr val="accent1"/>
+          </a:fillRef>
+          <a:effectRef idx="2">
+            <a:schemeClr val="accent1"/>
+          </a:effectRef>
+          <a:fontRef idx="minor">
+            <a:schemeClr val="lt1"/>
+          </a:fontRef>
+        </p:style>
+        <p:txBody>
+          <a:bodyPr rtlCol="0" anchor="ctr"/>
+          <a:lstStyle/>
+          <a:p>
+            <a:pPr algn="ctr"/>
+          </a:p>
+        </p:txBody>
+      </p:sp>
+      <p:sp>
+        <p:nvSpPr>
+          <p:cNvPr id="21" name="Oval 20"/>
+          <p:cNvSpPr/>
+          <p:nvPr/>
+        </p:nvSpPr>
+        <p:spPr>
+          <a:xfrm>
+            <a:off x="3959352" y="4005072"/>
+            <a:ext cx="310896" cy="310896"/>
+          </a:xfrm>
+          <a:prstGeom prst="ellipse">
+            <a:avLst/>
+          </a:prstGeom>
+          <a:solidFill>
+            <a:srgbClr val="B87878"/>
+          </a:solidFill>
+          <a:ln>
+            <a:noFill/>
+          </a:ln>
+          <a:effectLst/>
+        </p:spPr>
+        <p:style>
+          <a:lnRef idx="1">
+            <a:schemeClr val="accent1"/>
+          </a:lnRef>
+          <a:fillRef idx="3">
+            <a:schemeClr val="accent1"/>
+          </a:fillRef>
+          <a:effectRef idx="2">
+            <a:schemeClr val="accent1"/>
+          </a:effectRef>
+          <a:fontRef idx="minor">
+            <a:schemeClr val="lt1"/>
+          </a:fontRef>
+        </p:style>
+        <p:txBody>
+          <a:bodyPr rtlCol="0" anchor="ctr"/>
+          <a:lstStyle/>
+          <a:p>
+            <a:pPr algn="ctr"/>
+          </a:p>
+        </p:txBody>
+      </p:sp>
+      <p:sp>
+        <p:nvSpPr>
+          <p:cNvPr id="22" name="TextBox 21"/>
+          <p:cNvSpPr txBox="1"/>
+          <p:nvPr/>
+        </p:nvSpPr>
+        <p:spPr>
+          <a:xfrm>
+            <a:off x="3840479" y="4480560"/>
+            <a:ext cx="1645920" cy="320040"/>
+          </a:xfrm>
+          <a:prstGeom prst="rect">
+            <a:avLst/>
+          </a:prstGeom>
+          <a:noFill/>
+        </p:spPr>
+        <p:txBody>
+          <a:bodyPr wrap="square" anchor="t" lIns="45720" rIns="45720" tIns="18288" bIns="18288">
+            <a:spAutoFit/>
+          </a:bodyPr>
+          <a:lstStyle/>
+          <a:p>
+            <a:pPr algn="ctr"/>
+            <a:r>
+              <a:rPr sz="1200" b="1" i="0">
+                <a:solidFill>
+                  <a:srgbClr val="500000"/>
+                </a:solidFill>
+                <a:latin typeface="Cambria Math"/>
+              </a:rPr>
+              <a:t>E = −3.72 eV</a:t>
+            </a:r>
+          </a:p>
+        </p:txBody>
+      </p:sp>
+      <p:sp>
+        <p:nvSpPr>
+          <p:cNvPr id="23" name="TextBox 22"/>
+          <p:cNvSpPr txBox="1"/>
+          <p:nvPr/>
+        </p:nvSpPr>
+        <p:spPr>
+          <a:xfrm>
+            <a:off x="3063240" y="3657600"/>
+            <a:ext cx="548640" cy="365760"/>
+          </a:xfrm>
+          <a:prstGeom prst="rect">
+            <a:avLst/>
+          </a:prstGeom>
+          <a:noFill/>
+        </p:spPr>
+        <p:txBody>
+          <a:bodyPr wrap="square" anchor="t" lIns="45720" rIns="45720" tIns="18288" bIns="18288">
+            <a:spAutoFit/>
+          </a:bodyPr>
+          <a:lstStyle/>
+          <a:p>
+            <a:pPr algn="ctr"/>
+            <a:r>
+              <a:rPr sz="2000" b="1" i="0">
+                <a:solidFill>
+                  <a:srgbClr val="64748B"/>
+                </a:solidFill>
+                <a:latin typeface="Arial"/>
+              </a:rPr>
+              <a:t>→</a:t>
+            </a:r>
+          </a:p>
+        </p:txBody>
+      </p:sp>
+      <p:sp>
+        <p:nvSpPr>
+          <p:cNvPr id="24" name="TextBox 23"/>
+          <p:cNvSpPr txBox="1"/>
+          <p:nvPr/>
+        </p:nvSpPr>
+        <p:spPr>
+          <a:xfrm>
+            <a:off x="777240" y="4572000"/>
+            <a:ext cx="5120640" cy="365760"/>
+          </a:xfrm>
+          <a:prstGeom prst="rect">
+            <a:avLst/>
+          </a:prstGeom>
+          <a:noFill/>
+        </p:spPr>
+        <p:txBody>
+          <a:bodyPr wrap="square" anchor="t" lIns="45720" rIns="45720" tIns="18288" bIns="18288">
+            <a:spAutoFit/>
+          </a:bodyPr>
+          <a:lstStyle/>
+          <a:p>
+            <a:pPr algn="ctr"/>
+            <a:r>
+              <a:rPr sz="1100" b="0" i="1">
+                <a:solidFill>
+                  <a:srgbClr val="64748B"/>
+                </a:solidFill>
+                <a:latin typeface="Arial"/>
+              </a:rPr>
+              <a:t>same energy</a:t>
+            </a:r>
+          </a:p>
+        </p:txBody>
+      </p:sp>
+      <p:sp>
+        <p:nvSpPr>
+          <p:cNvPr id="25" name="Rounded Rectangle 24"/>
+          <p:cNvSpPr/>
+          <p:nvPr/>
+        </p:nvSpPr>
+        <p:spPr>
+          <a:xfrm>
+            <a:off x="6080760" y="1783080"/>
+            <a:ext cx="5532120" cy="3246120"/>
+          </a:xfrm>
+          <a:prstGeom prst="roundRect">
+            <a:avLst>
+              <a:gd name="adj" fmla="val 8000"/>
+            </a:avLst>
+          </a:prstGeom>
+          <a:solidFill>
+            <a:srgbClr val="F5F1F1"/>
+          </a:solidFill>
+          <a:ln>
+            <a:noFill/>
+          </a:ln>
+          <a:effectLst/>
+        </p:spPr>
+        <p:style>
+          <a:lnRef idx="1">
+            <a:schemeClr val="accent1"/>
+          </a:lnRef>
+          <a:fillRef idx="3">
+            <a:schemeClr val="accent1"/>
+          </a:fillRef>
+          <a:effectRef idx="2">
+            <a:schemeClr val="accent1"/>
+          </a:effectRef>
+          <a:fontRef idx="minor">
+            <a:schemeClr val="lt1"/>
+          </a:fontRef>
+        </p:style>
+        <p:txBody>
+          <a:bodyPr rtlCol="0" anchor="ctr"/>
+          <a:lstStyle/>
+          <a:p>
+            <a:pPr algn="ctr"/>
+          </a:p>
+        </p:txBody>
+      </p:sp>
+      <p:sp>
+        <p:nvSpPr>
+          <p:cNvPr id="26" name="TextBox 25"/>
+          <p:cNvSpPr txBox="1"/>
+          <p:nvPr/>
+        </p:nvSpPr>
+        <p:spPr>
+          <a:xfrm>
+            <a:off x="6309360" y="1920240"/>
+            <a:ext cx="5120640" cy="365760"/>
+          </a:xfrm>
+          <a:prstGeom prst="rect">
+            <a:avLst/>
+          </a:prstGeom>
+          <a:noFill/>
+        </p:spPr>
+        <p:txBody>
+          <a:bodyPr wrap="square" anchor="t" lIns="45720" rIns="45720" tIns="18288" bIns="18288">
+            <a:spAutoFit/>
+          </a:bodyPr>
+          <a:lstStyle/>
+          <a:p>
+            <a:pPr algn="l"/>
+            <a:r>
+              <a:rPr sz="1600" b="1" i="0">
+                <a:solidFill>
+                  <a:srgbClr val="1E293B"/>
+                </a:solidFill>
+                <a:latin typeface="Arial"/>
+              </a:rPr>
+              <a:t>Equivariant: the forces</a:t>
+            </a:r>
+          </a:p>
+        </p:txBody>
+      </p:sp>
+      <p:sp>
+        <p:nvSpPr>
+          <p:cNvPr id="27" name="TextBox 26"/>
+          <p:cNvSpPr txBox="1"/>
+          <p:nvPr/>
+        </p:nvSpPr>
+        <p:spPr>
+          <a:xfrm>
+            <a:off x="6309360" y="2286000"/>
+            <a:ext cx="5120640" cy="365760"/>
+          </a:xfrm>
+          <a:prstGeom prst="rect">
+            <a:avLst/>
+          </a:prstGeom>
+          <a:noFill/>
+        </p:spPr>
+        <p:txBody>
+          <a:bodyPr wrap="square" anchor="t" lIns="45720" rIns="45720" tIns="18288" bIns="18288">
+            <a:spAutoFit/>
+          </a:bodyPr>
+          <a:lstStyle/>
+          <a:p>
+            <a:pPr algn="l"/>
+            <a:r>
+              <a:rPr sz="1200" b="0" i="0">
+                <a:solidFill>
+                  <a:srgbClr val="64748B"/>
+                </a:solidFill>
+                <a:latin typeface="Arial"/>
+              </a:rPr>
+              <a:t>Rotate the molecule → the force arrows rotate with it</a:t>
+            </a:r>
+          </a:p>
+        </p:txBody>
+      </p:sp>
+      <p:cxnSp>
+        <p:nvCxnSpPr>
+          <p:cNvPr id="28" name="Connector 27"/>
+          <p:cNvCxnSpPr/>
+          <p:nvPr/>
+        </p:nvCxnSpPr>
+        <p:spPr>
+          <a:xfrm>
+            <a:off x="7543800" y="3291840"/>
+            <a:ext cx="548640" cy="868680"/>
+          </a:xfrm>
+          <a:prstGeom prst="line">
+            <a:avLst/>
+          </a:prstGeom>
+          <a:ln w="15875">
+            <a:solidFill>
+              <a:srgbClr val="94A3B8"/>
+            </a:solidFill>
+          </a:ln>
+        </p:spPr>
+        <p:style>
+          <a:lnRef idx="2">
+            <a:schemeClr val="accent1"/>
+          </a:lnRef>
+          <a:fillRef idx="0">
+            <a:schemeClr val="accent1"/>
+          </a:fillRef>
+          <a:effectRef idx="1">
+            <a:schemeClr val="accent1"/>
+          </a:effectRef>
+          <a:fontRef idx="minor">
+            <a:schemeClr val="tx1"/>
+          </a:fontRef>
+        </p:style>
+      </p:cxnSp>
+      <p:cxnSp>
+        <p:nvCxnSpPr>
+          <p:cNvPr id="29" name="Connector 28"/>
+          <p:cNvCxnSpPr/>
+          <p:nvPr/>
+        </p:nvCxnSpPr>
+        <p:spPr>
+          <a:xfrm flipH="1">
+            <a:off x="6995160" y="4160520"/>
+            <a:ext cx="1097280" cy="0"/>
+          </a:xfrm>
+          <a:prstGeom prst="line">
+            <a:avLst/>
+          </a:prstGeom>
+          <a:ln w="15875">
+            <a:solidFill>
+              <a:srgbClr val="94A3B8"/>
+            </a:solidFill>
+          </a:ln>
+        </p:spPr>
+        <p:style>
+          <a:lnRef idx="2">
+            <a:schemeClr val="accent1"/>
+          </a:lnRef>
+          <a:fillRef idx="0">
+            <a:schemeClr val="accent1"/>
+          </a:fillRef>
+          <a:effectRef idx="1">
+            <a:schemeClr val="accent1"/>
+          </a:effectRef>
+          <a:fontRef idx="minor">
+            <a:schemeClr val="tx1"/>
+          </a:fontRef>
+        </p:style>
+      </p:cxnSp>
+      <p:cxnSp>
+        <p:nvCxnSpPr>
+          <p:cNvPr id="30" name="Connector 29"/>
+          <p:cNvCxnSpPr/>
+          <p:nvPr/>
+        </p:nvCxnSpPr>
+        <p:spPr>
+          <a:xfrm flipV="1">
+            <a:off x="6995160" y="3291840"/>
+            <a:ext cx="548640" cy="868680"/>
+          </a:xfrm>
+          <a:prstGeom prst="line">
+            <a:avLst/>
+          </a:prstGeom>
+          <a:ln w="15875">
+            <a:solidFill>
+              <a:srgbClr val="94A3B8"/>
+            </a:solidFill>
+          </a:ln>
+        </p:spPr>
+        <p:style>
+          <a:lnRef idx="2">
+            <a:schemeClr val="accent1"/>
+          </a:lnRef>
+          <a:fillRef idx="0">
+            <a:schemeClr val="accent1"/>
+          </a:fillRef>
+          <a:effectRef idx="1">
+            <a:schemeClr val="accent1"/>
+          </a:effectRef>
+          <a:fontRef idx="minor">
+            <a:schemeClr val="tx1"/>
+          </a:fontRef>
+        </p:style>
+      </p:cxnSp>
+      <p:sp>
+        <p:nvSpPr>
+          <p:cNvPr id="31" name="Oval 30"/>
+          <p:cNvSpPr/>
+          <p:nvPr/>
+        </p:nvSpPr>
+        <p:spPr>
+          <a:xfrm>
+            <a:off x="7388352" y="3136392"/>
+            <a:ext cx="310896" cy="310896"/>
+          </a:xfrm>
+          <a:prstGeom prst="ellipse">
+            <a:avLst/>
+          </a:prstGeom>
+          <a:solidFill>
+            <a:srgbClr val="500000"/>
+          </a:solidFill>
+          <a:ln>
+            <a:noFill/>
+          </a:ln>
+          <a:effectLst/>
+        </p:spPr>
+        <p:style>
+          <a:lnRef idx="1">
+            <a:schemeClr val="accent1"/>
+          </a:lnRef>
+          <a:fillRef idx="3">
+            <a:schemeClr val="accent1"/>
+          </a:fillRef>
+          <a:effectRef idx="2">
+            <a:schemeClr val="accent1"/>
+          </a:effectRef>
+          <a:fontRef idx="minor">
+            <a:schemeClr val="lt1"/>
+          </a:fontRef>
+        </p:style>
+        <p:txBody>
+          <a:bodyPr rtlCol="0" anchor="ctr"/>
+          <a:lstStyle/>
+          <a:p>
+            <a:pPr algn="ctr"/>
+          </a:p>
+        </p:txBody>
+      </p:sp>
+      <p:sp>
+        <p:nvSpPr>
+          <p:cNvPr id="32" name="Oval 31"/>
+          <p:cNvSpPr/>
+          <p:nvPr/>
+        </p:nvSpPr>
+        <p:spPr>
+          <a:xfrm>
+            <a:off x="7936992" y="4005072"/>
+            <a:ext cx="310896" cy="310896"/>
+          </a:xfrm>
+          <a:prstGeom prst="ellipse">
+            <a:avLst/>
+          </a:prstGeom>
+          <a:solidFill>
+            <a:srgbClr val="B87878"/>
+          </a:solidFill>
+          <a:ln>
+            <a:noFill/>
+          </a:ln>
+          <a:effectLst/>
+        </p:spPr>
+        <p:style>
+          <a:lnRef idx="1">
+            <a:schemeClr val="accent1"/>
+          </a:lnRef>
+          <a:fillRef idx="3">
+            <a:schemeClr val="accent1"/>
+          </a:fillRef>
+          <a:effectRef idx="2">
+            <a:schemeClr val="accent1"/>
+          </a:effectRef>
+          <a:fontRef idx="minor">
+            <a:schemeClr val="lt1"/>
+          </a:fontRef>
+        </p:style>
+        <p:txBody>
+          <a:bodyPr rtlCol="0" anchor="ctr"/>
+          <a:lstStyle/>
+          <a:p>
+            <a:pPr algn="ctr"/>
+          </a:p>
+        </p:txBody>
+      </p:sp>
+      <p:sp>
+        <p:nvSpPr>
+          <p:cNvPr id="33" name="Oval 32"/>
+          <p:cNvSpPr/>
+          <p:nvPr/>
+        </p:nvSpPr>
+        <p:spPr>
+          <a:xfrm>
+            <a:off x="6839712" y="4005072"/>
+            <a:ext cx="310896" cy="310896"/>
+          </a:xfrm>
+          <a:prstGeom prst="ellipse">
+            <a:avLst/>
+          </a:prstGeom>
+          <a:solidFill>
+            <a:srgbClr val="B87878"/>
+          </a:solidFill>
+          <a:ln>
+            <a:noFill/>
+          </a:ln>
+          <a:effectLst/>
+        </p:spPr>
+        <p:style>
+          <a:lnRef idx="1">
+            <a:schemeClr val="accent1"/>
+          </a:lnRef>
+          <a:fillRef idx="3">
+            <a:schemeClr val="accent1"/>
+          </a:fillRef>
+          <a:effectRef idx="2">
+            <a:schemeClr val="accent1"/>
+          </a:effectRef>
+          <a:fontRef idx="minor">
+            <a:schemeClr val="lt1"/>
+          </a:fontRef>
+        </p:style>
+        <p:txBody>
+          <a:bodyPr rtlCol="0" anchor="ctr"/>
+          <a:lstStyle/>
+          <a:p>
+            <a:pPr algn="ctr"/>
+          </a:p>
+        </p:txBody>
+      </p:sp>
+      <p:cxnSp>
+        <p:nvCxnSpPr>
+          <p:cNvPr id="34" name="Connector 33"/>
+          <p:cNvCxnSpPr/>
+          <p:nvPr/>
+        </p:nvCxnSpPr>
+        <p:spPr>
+          <a:xfrm flipV="1">
+            <a:off x="7543800" y="2788920"/>
+            <a:ext cx="0" cy="502920"/>
+          </a:xfrm>
+          <a:prstGeom prst="line">
+            <a:avLst/>
+          </a:prstGeom>
+          <a:ln w="28575">
+            <a:solidFill>
+              <a:srgbClr val="C9A227"/>
+            </a:solidFill>
+            <a:tailEnd type="triangle" w="med" len="med"/>
+          </a:ln>
+        </p:spPr>
+        <p:style>
+          <a:lnRef idx="2">
+            <a:schemeClr val="accent1"/>
+          </a:lnRef>
+          <a:fillRef idx="0">
+            <a:schemeClr val="accent1"/>
+          </a:fillRef>
+          <a:effectRef idx="1">
+            <a:schemeClr val="accent1"/>
+          </a:effectRef>
+          <a:fontRef idx="minor">
+            <a:schemeClr val="tx1"/>
+          </a:fontRef>
+        </p:style>
+      </p:cxnSp>
+      <p:cxnSp>
+        <p:nvCxnSpPr>
+          <p:cNvPr id="35" name="Connector 34"/>
+          <p:cNvCxnSpPr/>
+          <p:nvPr/>
+        </p:nvCxnSpPr>
+        <p:spPr>
+          <a:xfrm>
+            <a:off x="8092440" y="4160520"/>
+            <a:ext cx="418454" cy="278969"/>
+          </a:xfrm>
+          <a:prstGeom prst="line">
+            <a:avLst/>
+          </a:prstGeom>
+          <a:ln w="28575">
+            <a:solidFill>
+              <a:srgbClr val="C9A227"/>
+            </a:solidFill>
+            <a:tailEnd type="triangle" w="med" len="med"/>
+          </a:ln>
+        </p:spPr>
+        <p:style>
+          <a:lnRef idx="2">
+            <a:schemeClr val="accent1"/>
+          </a:lnRef>
+          <a:fillRef idx="0">
+            <a:schemeClr val="accent1"/>
+          </a:fillRef>
+          <a:effectRef idx="1">
+            <a:schemeClr val="accent1"/>
+          </a:effectRef>
+          <a:fontRef idx="minor">
+            <a:schemeClr val="tx1"/>
+          </a:fontRef>
+        </p:style>
+      </p:cxnSp>
+      <p:cxnSp>
+        <p:nvCxnSpPr>
+          <p:cNvPr id="36" name="Connector 35"/>
+          <p:cNvCxnSpPr/>
+          <p:nvPr/>
+        </p:nvCxnSpPr>
+        <p:spPr>
+          <a:xfrm flipH="1">
+            <a:off x="6576705" y="4160520"/>
+            <a:ext cx="418455" cy="278969"/>
+          </a:xfrm>
+          <a:prstGeom prst="line">
+            <a:avLst/>
+          </a:prstGeom>
+          <a:ln w="28575">
+            <a:solidFill>
+              <a:srgbClr val="C9A227"/>
+            </a:solidFill>
+            <a:tailEnd type="triangle" w="med" len="med"/>
+          </a:ln>
+        </p:spPr>
+        <p:style>
+          <a:lnRef idx="2">
+            <a:schemeClr val="accent1"/>
+          </a:lnRef>
+          <a:fillRef idx="0">
+            <a:schemeClr val="accent1"/>
+          </a:fillRef>
+          <a:effectRef idx="1">
+            <a:schemeClr val="accent1"/>
+          </a:effectRef>
+          <a:fontRef idx="minor">
+            <a:schemeClr val="tx1"/>
+          </a:fontRef>
+        </p:style>
+      </p:cxnSp>
+      <p:cxnSp>
+        <p:nvCxnSpPr>
+          <p:cNvPr id="37" name="Connector 36"/>
+          <p:cNvCxnSpPr/>
+          <p:nvPr/>
+        </p:nvCxnSpPr>
+        <p:spPr>
+          <a:xfrm flipH="1">
+            <a:off x="10435188" y="3382792"/>
+            <a:ext cx="48835" cy="1026268"/>
+          </a:xfrm>
+          <a:prstGeom prst="line">
+            <a:avLst/>
+          </a:prstGeom>
+          <a:ln w="15875">
+            <a:solidFill>
+              <a:srgbClr val="94A3B8"/>
+            </a:solidFill>
+          </a:ln>
+        </p:spPr>
+        <p:style>
+          <a:lnRef idx="2">
+            <a:schemeClr val="accent1"/>
+          </a:lnRef>
+          <a:fillRef idx="0">
+            <a:schemeClr val="accent1"/>
+          </a:fillRef>
+          <a:effectRef idx="1">
+            <a:schemeClr val="accent1"/>
+          </a:effectRef>
+          <a:fontRef idx="minor">
+            <a:schemeClr val="tx1"/>
+          </a:fontRef>
+        </p:style>
+      </p:cxnSp>
+      <p:cxnSp>
+        <p:nvCxnSpPr>
+          <p:cNvPr id="38" name="Connector 37"/>
+          <p:cNvCxnSpPr/>
+          <p:nvPr/>
+        </p:nvCxnSpPr>
+        <p:spPr>
+          <a:xfrm flipH="1" flipV="1">
+            <a:off x="9536349" y="3779686"/>
+            <a:ext cx="898839" cy="629374"/>
+          </a:xfrm>
+          <a:prstGeom prst="line">
+            <a:avLst/>
+          </a:prstGeom>
+          <a:ln w="15875">
+            <a:solidFill>
+              <a:srgbClr val="94A3B8"/>
+            </a:solidFill>
+          </a:ln>
+        </p:spPr>
+        <p:style>
+          <a:lnRef idx="2">
+            <a:schemeClr val="accent1"/>
+          </a:lnRef>
+          <a:fillRef idx="0">
+            <a:schemeClr val="accent1"/>
+          </a:fillRef>
+          <a:effectRef idx="1">
+            <a:schemeClr val="accent1"/>
+          </a:effectRef>
+          <a:fontRef idx="minor">
+            <a:schemeClr val="tx1"/>
+          </a:fontRef>
+        </p:style>
+      </p:cxnSp>
+      <p:cxnSp>
+        <p:nvCxnSpPr>
+          <p:cNvPr id="39" name="Connector 38"/>
+          <p:cNvCxnSpPr/>
+          <p:nvPr/>
+        </p:nvCxnSpPr>
+        <p:spPr>
+          <a:xfrm flipV="1">
+            <a:off x="9536349" y="3382792"/>
+            <a:ext cx="947674" cy="396894"/>
+          </a:xfrm>
+          <a:prstGeom prst="line">
+            <a:avLst/>
+          </a:prstGeom>
+          <a:ln w="15875">
+            <a:solidFill>
+              <a:srgbClr val="94A3B8"/>
+            </a:solidFill>
+          </a:ln>
+        </p:spPr>
+        <p:style>
+          <a:lnRef idx="2">
+            <a:schemeClr val="accent1"/>
+          </a:lnRef>
+          <a:fillRef idx="0">
+            <a:schemeClr val="accent1"/>
+          </a:fillRef>
+          <a:effectRef idx="1">
+            <a:schemeClr val="accent1"/>
+          </a:effectRef>
+          <a:fontRef idx="minor">
+            <a:schemeClr val="tx1"/>
+          </a:fontRef>
+        </p:style>
+      </p:cxnSp>
+      <p:sp>
+        <p:nvSpPr>
+          <p:cNvPr id="40" name="Oval 39"/>
+          <p:cNvSpPr/>
+          <p:nvPr/>
+        </p:nvSpPr>
+        <p:spPr>
+          <a:xfrm>
+            <a:off x="10328575" y="3227344"/>
+            <a:ext cx="310896" cy="310896"/>
+          </a:xfrm>
+          <a:prstGeom prst="ellipse">
+            <a:avLst/>
+          </a:prstGeom>
+          <a:solidFill>
+            <a:srgbClr val="500000"/>
+          </a:solidFill>
+          <a:ln>
+            <a:noFill/>
+          </a:ln>
+          <a:effectLst/>
+        </p:spPr>
+        <p:style>
+          <a:lnRef idx="1">
+            <a:schemeClr val="accent1"/>
+          </a:lnRef>
+          <a:fillRef idx="3">
+            <a:schemeClr val="accent1"/>
+          </a:fillRef>
+          <a:effectRef idx="2">
+            <a:schemeClr val="accent1"/>
+          </a:effectRef>
+          <a:fontRef idx="minor">
+            <a:schemeClr val="lt1"/>
+          </a:fontRef>
+        </p:style>
+        <p:txBody>
+          <a:bodyPr rtlCol="0" anchor="ctr"/>
+          <a:lstStyle/>
+          <a:p>
+            <a:pPr algn="ctr"/>
+          </a:p>
+        </p:txBody>
+      </p:sp>
+      <p:sp>
+        <p:nvSpPr>
+          <p:cNvPr id="41" name="Oval 40"/>
+          <p:cNvSpPr/>
+          <p:nvPr/>
+        </p:nvSpPr>
+        <p:spPr>
+          <a:xfrm>
+            <a:off x="10279740" y="4253612"/>
+            <a:ext cx="310896" cy="310896"/>
+          </a:xfrm>
+          <a:prstGeom prst="ellipse">
+            <a:avLst/>
+          </a:prstGeom>
+          <a:solidFill>
+            <a:srgbClr val="B87878"/>
+          </a:solidFill>
+          <a:ln>
+            <a:noFill/>
+          </a:ln>
+          <a:effectLst/>
+        </p:spPr>
+        <p:style>
+          <a:lnRef idx="1">
+            <a:schemeClr val="accent1"/>
+          </a:lnRef>
+          <a:fillRef idx="3">
+            <a:schemeClr val="accent1"/>
+          </a:fillRef>
+          <a:effectRef idx="2">
+            <a:schemeClr val="accent1"/>
+          </a:effectRef>
+          <a:fontRef idx="minor">
+            <a:schemeClr val="lt1"/>
+          </a:fontRef>
+        </p:style>
+        <p:txBody>
+          <a:bodyPr rtlCol="0" anchor="ctr"/>
+          <a:lstStyle/>
+          <a:p>
+            <a:pPr algn="ctr"/>
+          </a:p>
+        </p:txBody>
+      </p:sp>
+      <p:sp>
+        <p:nvSpPr>
+          <p:cNvPr id="42" name="Oval 41"/>
+          <p:cNvSpPr/>
+          <p:nvPr/>
+        </p:nvSpPr>
+        <p:spPr>
+          <a:xfrm>
+            <a:off x="9380901" y="3624238"/>
+            <a:ext cx="310896" cy="310896"/>
+          </a:xfrm>
+          <a:prstGeom prst="ellipse">
+            <a:avLst/>
+          </a:prstGeom>
+          <a:solidFill>
+            <a:srgbClr val="B87878"/>
+          </a:solidFill>
+          <a:ln>
+            <a:noFill/>
+          </a:ln>
+          <a:effectLst/>
+        </p:spPr>
+        <p:style>
+          <a:lnRef idx="1">
+            <a:schemeClr val="accent1"/>
+          </a:lnRef>
+          <a:fillRef idx="3">
+            <a:schemeClr val="accent1"/>
+          </a:fillRef>
+          <a:effectRef idx="2">
+            <a:schemeClr val="accent1"/>
+          </a:effectRef>
+          <a:fontRef idx="minor">
+            <a:schemeClr val="lt1"/>
+          </a:fontRef>
+        </p:style>
+        <p:txBody>
+          <a:bodyPr rtlCol="0" anchor="ctr"/>
+          <a:lstStyle/>
+          <a:p>
+            <a:pPr algn="ctr"/>
+          </a:p>
+        </p:txBody>
+      </p:sp>
+      <p:cxnSp>
+        <p:nvCxnSpPr>
+          <p:cNvPr id="43" name="Connector 42"/>
+          <p:cNvCxnSpPr/>
+          <p:nvPr/>
+        </p:nvCxnSpPr>
+        <p:spPr>
+          <a:xfrm flipV="1">
+            <a:off x="10484023" y="2970824"/>
+            <a:ext cx="288463" cy="411968"/>
+          </a:xfrm>
+          <a:prstGeom prst="line">
+            <a:avLst/>
+          </a:prstGeom>
+          <a:ln w="28575">
+            <a:solidFill>
+              <a:srgbClr val="C9A227"/>
+            </a:solidFill>
+            <a:tailEnd type="triangle" w="med" len="med"/>
+          </a:ln>
+        </p:spPr>
+        <p:style>
+          <a:lnRef idx="2">
+            <a:schemeClr val="accent1"/>
+          </a:lnRef>
+          <a:fillRef idx="0">
+            <a:schemeClr val="accent1"/>
+          </a:fillRef>
+          <a:effectRef idx="1">
+            <a:schemeClr val="accent1"/>
+          </a:effectRef>
+          <a:fontRef idx="minor">
+            <a:schemeClr val="tx1"/>
+          </a:fontRef>
+        </p:style>
+      </p:cxnSp>
+      <p:cxnSp>
+        <p:nvCxnSpPr>
+          <p:cNvPr id="44" name="Connector 43"/>
+          <p:cNvCxnSpPr/>
+          <p:nvPr/>
+        </p:nvCxnSpPr>
+        <p:spPr>
+          <a:xfrm>
+            <a:off x="10435188" y="4409060"/>
+            <a:ext cx="182767" cy="468534"/>
+          </a:xfrm>
+          <a:prstGeom prst="line">
+            <a:avLst/>
+          </a:prstGeom>
+          <a:ln w="28575">
+            <a:solidFill>
+              <a:srgbClr val="C9A227"/>
+            </a:solidFill>
+            <a:tailEnd type="triangle" w="med" len="med"/>
+          </a:ln>
+        </p:spPr>
+        <p:style>
+          <a:lnRef idx="2">
+            <a:schemeClr val="accent1"/>
+          </a:lnRef>
+          <a:fillRef idx="0">
+            <a:schemeClr val="accent1"/>
+          </a:fillRef>
+          <a:effectRef idx="1">
+            <a:schemeClr val="accent1"/>
+          </a:effectRef>
+          <a:fontRef idx="minor">
+            <a:schemeClr val="tx1"/>
+          </a:fontRef>
+        </p:style>
+      </p:cxnSp>
+      <p:cxnSp>
+        <p:nvCxnSpPr>
+          <p:cNvPr id="45" name="Connector 44"/>
+          <p:cNvCxnSpPr/>
+          <p:nvPr/>
+        </p:nvCxnSpPr>
+        <p:spPr>
+          <a:xfrm flipH="1" flipV="1">
+            <a:off x="9033560" y="3768189"/>
+            <a:ext cx="502789" cy="11497"/>
+          </a:xfrm>
+          <a:prstGeom prst="line">
+            <a:avLst/>
+          </a:prstGeom>
+          <a:ln w="28575">
+            <a:solidFill>
+              <a:srgbClr val="C9A227"/>
+            </a:solidFill>
+            <a:tailEnd type="triangle" w="med" len="med"/>
+          </a:ln>
+        </p:spPr>
+        <p:style>
+          <a:lnRef idx="2">
+            <a:schemeClr val="accent1"/>
+          </a:lnRef>
+          <a:fillRef idx="0">
+            <a:schemeClr val="accent1"/>
+          </a:fillRef>
+          <a:effectRef idx="1">
+            <a:schemeClr val="accent1"/>
+          </a:effectRef>
+          <a:fontRef idx="minor">
+            <a:schemeClr val="tx1"/>
+          </a:fontRef>
+        </p:style>
+      </p:cxnSp>
+      <p:sp>
+        <p:nvSpPr>
+          <p:cNvPr id="46" name="TextBox 45"/>
+          <p:cNvSpPr txBox="1"/>
+          <p:nvPr/>
+        </p:nvSpPr>
+        <p:spPr>
+          <a:xfrm>
+            <a:off x="8595360" y="3657600"/>
+            <a:ext cx="548640" cy="365760"/>
+          </a:xfrm>
+          <a:prstGeom prst="rect">
+            <a:avLst/>
+          </a:prstGeom>
+          <a:noFill/>
+        </p:spPr>
+        <p:txBody>
+          <a:bodyPr wrap="square" anchor="t" lIns="45720" rIns="45720" tIns="18288" bIns="18288">
+            <a:spAutoFit/>
+          </a:bodyPr>
+          <a:lstStyle/>
+          <a:p>
+            <a:pPr algn="ctr"/>
+            <a:r>
+              <a:rPr sz="2000" b="1" i="0">
+                <a:solidFill>
+                  <a:srgbClr val="64748B"/>
+                </a:solidFill>
+                <a:latin typeface="Arial"/>
+              </a:rPr>
+              <a:t>→</a:t>
+            </a:r>
+          </a:p>
+        </p:txBody>
+      </p:sp>
+      <p:sp>
+        <p:nvSpPr>
+          <p:cNvPr id="47" name="TextBox 46"/>
+          <p:cNvSpPr txBox="1"/>
+          <p:nvPr/>
+        </p:nvSpPr>
+        <p:spPr>
+          <a:xfrm>
+            <a:off x="6309360" y="4572000"/>
+            <a:ext cx="5120640" cy="365760"/>
+          </a:xfrm>
+          <a:prstGeom prst="rect">
+            <a:avLst/>
+          </a:prstGeom>
+          <a:noFill/>
+        </p:spPr>
+        <p:txBody>
+          <a:bodyPr wrap="square" anchor="t" lIns="45720" rIns="45720" tIns="18288" bIns="18288">
+            <a:spAutoFit/>
+          </a:bodyPr>
+          <a:lstStyle/>
+          <a:p>
+            <a:pPr algn="ctr"/>
+            <a:r>
+              <a:rPr sz="1100" b="0" i="1">
+                <a:solidFill>
+                  <a:srgbClr val="64748B"/>
+                </a:solidFill>
+                <a:latin typeface="Arial"/>
+              </a:rPr>
+              <a:t>arrows turned by the same angle — nothing else changed</a:t>
+            </a:r>
+          </a:p>
+        </p:txBody>
+      </p:sp>
+      <p:sp>
+        <p:nvSpPr>
+          <p:cNvPr id="48" name="Rounded Rectangle 47"/>
+          <p:cNvSpPr/>
+          <p:nvPr/>
+        </p:nvSpPr>
+        <p:spPr>
+          <a:xfrm>
+            <a:off x="548640" y="5257800"/>
+            <a:ext cx="11064240" cy="868680"/>
+          </a:xfrm>
+          <a:prstGeom prst="roundRect">
+            <a:avLst>
+              <a:gd name="adj" fmla="val 8000"/>
+            </a:avLst>
+          </a:prstGeom>
+          <a:solidFill>
+            <a:srgbClr val="500000"/>
+          </a:solidFill>
+          <a:ln>
+            <a:noFill/>
+          </a:ln>
+          <a:effectLst/>
+        </p:spPr>
+        <p:style>
+          <a:lnRef idx="1">
+            <a:schemeClr val="accent1"/>
+          </a:lnRef>
+          <a:fillRef idx="3">
+            <a:schemeClr val="accent1"/>
+          </a:fillRef>
+          <a:effectRef idx="2">
+            <a:schemeClr val="accent1"/>
+          </a:effectRef>
+          <a:fontRef idx="minor">
+            <a:schemeClr val="lt1"/>
+          </a:fontRef>
+        </p:style>
+        <p:txBody>
+          <a:bodyPr rtlCol="0" anchor="ctr"/>
+          <a:lstStyle/>
+          <a:p>
+            <a:pPr algn="ctr"/>
+          </a:p>
+        </p:txBody>
+      </p:sp>
+      <p:sp>
+        <p:nvSpPr>
+          <p:cNvPr id="49" name="TextBox 48"/>
+          <p:cNvSpPr txBox="1"/>
+          <p:nvPr/>
+        </p:nvSpPr>
+        <p:spPr>
+          <a:xfrm>
+            <a:off x="777240" y="5349240"/>
+            <a:ext cx="10607040" cy="685800"/>
+          </a:xfrm>
+          <a:prstGeom prst="rect">
+            <a:avLst/>
+          </a:prstGeom>
+          <a:noFill/>
+        </p:spPr>
+        <p:txBody>
+          <a:bodyPr wrap="square" anchor="t" lIns="45720" rIns="45720" tIns="18288" bIns="18288">
+            <a:spAutoFit/>
+          </a:bodyPr>
+          <a:lstStyle/>
+          <a:p>
+            <a:pPr algn="l"/>
+            <a:r>
+              <a:rPr sz="1250" b="0" i="0">
+                <a:solidFill>
+                  <a:srgbClr val="FFFFFF"/>
+                </a:solidFill>
+                <a:latin typeface="Arial"/>
+              </a:rPr>
+              <a:t>Why it matters: forces are vectors. A network that must learn rotation from data wastes data and still gets it slightly wrong.</a:t>
+            </a:r>
+          </a:p>
+          <a:p>
+            <a:pPr algn="l"/>
+            <a:r>
+              <a:rPr sz="1250" b="0" i="0">
+                <a:solidFill>
+                  <a:srgbClr val="FFFFFF"/>
+                </a:solidFill>
+                <a:latin typeface="Arial"/>
+              </a:rPr>
+              <a:t>MACE builds the symmetry in — its features carry rotation labels (spherical harmonics), so symmetry is exact and training data goes further.</a:t>
+            </a:r>
+          </a:p>
+        </p:txBody>
+      </p:sp>
+    </p:spTree>
+  </p:cSld>
+  <p:clrMapOvr>
+    <a:masterClrMapping/>
+  </p:clrMapOvr>
+</p:sld>
+</file>
+
+<file path=ppt/slides/slide14.xml><?xml version="1.0" encoding="utf-8"?>
+<p:sld xmlns:a="http://schemas.openxmlformats.org/drawingml/2006/main" xmlns:p="http://schemas.openxmlformats.org/presentationml/2006/main" xmlns:r="http://schemas.openxmlformats.org/officeDocument/2006/relationships">
+  <p:cSld>
+    <p:spTree>
+      <p:nvGrpSpPr>
+        <p:cNvPr id="1" name=""/>
+        <p:cNvGrpSpPr/>
+        <p:nvPr/>
+      </p:nvGrpSpPr>
+      <p:grpSpPr/>
+      <p:sp>
+        <p:nvSpPr>
+          <p:cNvPr id="2" name="TextBox 1"/>
+          <p:cNvSpPr txBox="1"/>
+          <p:nvPr/>
+        </p:nvSpPr>
+        <p:spPr>
+          <a:xfrm>
+            <a:off x="548640" y="347472"/>
+            <a:ext cx="8229600" cy="274320"/>
+          </a:xfrm>
+          <a:prstGeom prst="rect">
+            <a:avLst/>
+          </a:prstGeom>
+          <a:noFill/>
+        </p:spPr>
+        <p:txBody>
+          <a:bodyPr wrap="square" anchor="t" lIns="45720" rIns="45720" tIns="18288" bIns="18288">
+            <a:spAutoFit/>
+          </a:bodyPr>
+          <a:lstStyle/>
+          <a:p>
+            <a:pPr algn="l"/>
+            <a:r>
+              <a:rPr sz="1100" b="1" i="0">
+                <a:solidFill>
+                  <a:srgbClr val="B87878"/>
+                </a:solidFill>
+                <a:latin typeface="Arial"/>
+              </a:rPr>
               <a:t>BACKUP · THE MATH</a:t>
             </a:r>
           </a:p>
@@ -11389,7 +12326,7 @@
 </p:sld>
 </file>
 
-<file path=ppt/slides/slide14.xml><?xml version="1.0" encoding="utf-8"?>
+<file path=ppt/slides/slide15.xml><?xml version="1.0" encoding="utf-8"?>
 <p:sld xmlns:a="http://schemas.openxmlformats.org/drawingml/2006/main" xmlns:p="http://schemas.openxmlformats.org/presentationml/2006/main" xmlns:r="http://schemas.openxmlformats.org/officeDocument/2006/relationships">
   <p:cSld>
     <p:spTree>
@@ -12424,7 +13361,7 @@
 </p:sld>
 </file>
 
-<file path=ppt/slides/slide15.xml><?xml version="1.0" encoding="utf-8"?>
+<file path=ppt/slides/slide16.xml><?xml version="1.0" encoding="utf-8"?>
 <p:sld xmlns:a="http://schemas.openxmlformats.org/drawingml/2006/main" xmlns:p="http://schemas.openxmlformats.org/presentationml/2006/main" xmlns:r="http://schemas.openxmlformats.org/officeDocument/2006/relationships">
   <p:cSld>
     <p:spTree>
@@ -12853,7 +13790,7 @@
 </p:sld>
 </file>
 
-<file path=ppt/slides/slide16.xml><?xml version="1.0" encoding="utf-8"?>
+<file path=ppt/slides/slide17.xml><?xml version="1.0" encoding="utf-8"?>
 <p:sld xmlns:a="http://schemas.openxmlformats.org/drawingml/2006/main" xmlns:p="http://schemas.openxmlformats.org/presentationml/2006/main" xmlns:r="http://schemas.openxmlformats.org/officeDocument/2006/relationships">
   <p:cSld>
     <p:spTree>
@@ -13372,7 +14309,7 @@
       </p:graphicFrame>
       <p:pic>
         <p:nvPicPr>
-          <p:cNvPr id="7" name="Picture 6" descr="structures.png"/>
+          <p:cNvPr id="7" name="Picture 6" descr="structures_preview.png"/>
           <p:cNvPicPr>
             <a:picLocks noChangeAspect="1"/>
           </p:cNvPicPr>
@@ -18722,7 +19659,7 @@
                 </a:solidFill>
                 <a:latin typeface="Arial"/>
               </a:rPr>
-              <a:t>10</a:t>
+              <a:t>09</a:t>
             </a:r>
           </a:p>
         </p:txBody>
@@ -21985,7 +22922,7 @@
                 </a:solidFill>
                 <a:latin typeface="Arial"/>
               </a:rPr>
-              <a:t>BACKUP · THE SIMULATOR</a:t>
+              <a:t>PART 3 · SCALING UP</a:t>
             </a:r>
           </a:p>
         </p:txBody>
@@ -21999,7 +22936,59 @@
         <p:spPr>
           <a:xfrm>
             <a:off x="548640" y="566928"/>
-            <a:ext cx="11064240" cy="640080"/>
+            <a:ext cx="9692640" cy="640080"/>
+          </a:xfrm>
+          <a:prstGeom prst="rect">
+            <a:avLst/>
+          </a:prstGeom>
+          <a:noFill/>
+        </p:spPr>
+        <p:txBody>
+          <a:bodyPr wrap="square" lIns="45720" rIns="45720">
+            <a:spAutoFit/>
+          </a:bodyPr>
+          <a:lstStyle/>
+          <a:p>
+            <a:r>
+              <a:rPr sz="3400" b="1">
+                <a:solidFill>
+                  <a:srgbClr val="500000"/>
+                </a:solidFill>
+                <a:latin typeface="Arial"/>
+              </a:rPr>
+              <a:t>Scaling up: the same loop for </a:t>
+            </a:r>
+            <a:r>
+              <a:rPr sz="3400" b="1">
+                <a:solidFill>
+                  <a:srgbClr val="C9A227"/>
+                </a:solidFill>
+                <a:latin typeface="Arial"/>
+              </a:rPr>
+              <a:t>Tung</a:t>
+            </a:r>
+            <a:r>
+              <a:rPr sz="3400" b="1">
+                <a:solidFill>
+                  <a:srgbClr val="500000"/>
+                </a:solidFill>
+                <a:latin typeface="Arial"/>
+              </a:rPr>
+              <a:t>sten</a:t>
+            </a:r>
+          </a:p>
+        </p:txBody>
+      </p:sp>
+      <p:sp>
+        <p:nvSpPr>
+          <p:cNvPr id="4" name="TextBox 3"/>
+          <p:cNvSpPr txBox="1"/>
+          <p:nvPr/>
+        </p:nvSpPr>
+        <p:spPr>
+          <a:xfrm>
+            <a:off x="548640" y="1207008"/>
+            <a:ext cx="9418320" cy="365760"/>
           </a:xfrm>
           <a:prstGeom prst="rect">
             <a:avLst/>
@@ -22014,27 +23003,27 @@
           <a:p>
             <a:pPr algn="l"/>
             <a:r>
-              <a:rPr sz="3400" b="1" i="0">
-                <a:solidFill>
-                  <a:srgbClr val="500000"/>
-                </a:solidFill>
-                <a:latin typeface="Arial"/>
-              </a:rPr>
-              <a:t>DFT in one slide</a:t>
-            </a:r>
-          </a:p>
-        </p:txBody>
-      </p:sp>
-      <p:sp>
-        <p:nvSpPr>
-          <p:cNvPr id="4" name="TextBox 3"/>
+              <a:rPr sz="1500" b="0" i="1">
+                <a:solidFill>
+                  <a:srgbClr val="64748B"/>
+                </a:solidFill>
+                <a:latin typeface="Arial"/>
+              </a:rPr>
+              <a:t>Fusion-reactor wall material. Radiation damage needs a million atoms for nanoseconds — DFT cannot go there; a fine-tuned MACE can</a:t>
+            </a:r>
+          </a:p>
+        </p:txBody>
+      </p:sp>
+      <p:sp>
+        <p:nvSpPr>
+          <p:cNvPr id="5" name="TextBox 4"/>
           <p:cNvSpPr txBox="1"/>
           <p:nvPr/>
         </p:nvSpPr>
         <p:spPr>
           <a:xfrm>
-            <a:off x="548640" y="1207008"/>
-            <a:ext cx="11064240" cy="365760"/>
+            <a:off x="11155680" y="6400800"/>
+            <a:ext cx="548640" cy="228600"/>
           </a:xfrm>
           <a:prstGeom prst="rect">
             <a:avLst/>
@@ -22047,64 +23036,94 @@
           </a:bodyPr>
           <a:lstStyle/>
           <a:p>
-            <a:pPr algn="l"/>
-            <a:r>
-              <a:rPr sz="1500" b="0" i="1">
-                <a:solidFill>
-                  <a:srgbClr val="64748B"/>
-                </a:solidFill>
-                <a:latin typeface="Arial"/>
-              </a:rPr>
-              <a:t>The slow, trusted physics calculation that produced our labels</a:t>
-            </a:r>
-          </a:p>
-        </p:txBody>
-      </p:sp>
-      <p:sp>
-        <p:nvSpPr>
-          <p:cNvPr id="5" name="TextBox 4"/>
-          <p:cNvSpPr txBox="1"/>
-          <p:nvPr/>
-        </p:nvSpPr>
-        <p:spPr>
-          <a:xfrm>
-            <a:off x="11155680" y="6400800"/>
-            <a:ext cx="548640" cy="228600"/>
+            <a:pPr algn="r"/>
+            <a:r>
+              <a:rPr sz="1000" b="1" i="0">
+                <a:solidFill>
+                  <a:srgbClr val="500000"/>
+                </a:solidFill>
+                <a:latin typeface="Arial"/>
+              </a:rPr>
+              <a:t>10</a:t>
+            </a:r>
+          </a:p>
+        </p:txBody>
+      </p:sp>
+      <p:pic>
+        <p:nvPicPr>
+          <p:cNvPr id="6" name="Picture 5" descr="tungtung.png"/>
+          <p:cNvPicPr>
+            <a:picLocks noChangeAspect="1"/>
+          </p:cNvPicPr>
+          <p:nvPr/>
+        </p:nvPicPr>
+        <p:blipFill>
+          <a:blip r:embed="rId2"/>
+          <a:stretch>
+            <a:fillRect/>
+          </a:stretch>
+        </p:blipFill>
+        <p:spPr>
+          <a:xfrm>
+            <a:off x="10378440" y="182880"/>
+            <a:ext cx="1378690" cy="1463040"/>
           </a:xfrm>
           <a:prstGeom prst="rect">
             <a:avLst/>
           </a:prstGeom>
-          <a:noFill/>
-        </p:spPr>
-        <p:txBody>
-          <a:bodyPr wrap="square" anchor="t" lIns="45720" rIns="45720" tIns="18288" bIns="18288">
-            <a:spAutoFit/>
-          </a:bodyPr>
-          <a:lstStyle/>
-          <a:p>
-            <a:pPr algn="r"/>
-            <a:r>
-              <a:rPr sz="1000" b="1" i="0">
-                <a:solidFill>
-                  <a:srgbClr val="500000"/>
-                </a:solidFill>
-                <a:latin typeface="Arial"/>
-              </a:rPr>
-              <a:t>12</a:t>
-            </a:r>
-          </a:p>
-        </p:txBody>
-      </p:sp>
-      <p:sp>
-        <p:nvSpPr>
-          <p:cNvPr id="6" name="Rounded Rectangle 5"/>
+          <a:ln w="12700">
+            <a:solidFill>
+              <a:srgbClr val="3A3020"/>
+            </a:solidFill>
+          </a:ln>
+        </p:spPr>
+      </p:pic>
+      <p:cxnSp>
+        <p:nvCxnSpPr>
+          <p:cNvPr id="7" name="Connector 6"/>
+          <p:cNvCxnSpPr/>
+          <p:nvPr/>
+        </p:nvCxnSpPr>
+        <p:spPr>
+          <a:xfrm>
+            <a:off x="8641080" y="822960"/>
+            <a:ext cx="1691640" cy="91440"/>
+          </a:xfrm>
+          <a:prstGeom prst="line">
+            <a:avLst/>
+          </a:prstGeom>
+          <a:ln w="31750">
+            <a:solidFill>
+              <a:srgbClr val="C9A227"/>
+            </a:solidFill>
+            <a:tailEnd type="triangle" w="med" len="med"/>
+          </a:ln>
+        </p:spPr>
+        <p:style>
+          <a:lnRef idx="2">
+            <a:schemeClr val="accent1"/>
+          </a:lnRef>
+          <a:fillRef idx="0">
+            <a:schemeClr val="accent1"/>
+          </a:fillRef>
+          <a:effectRef idx="1">
+            <a:schemeClr val="accent1"/>
+          </a:effectRef>
+          <a:fontRef idx="minor">
+            <a:schemeClr val="tx1"/>
+          </a:fontRef>
+        </p:style>
+      </p:cxnSp>
+      <p:sp>
+        <p:nvSpPr>
+          <p:cNvPr id="8" name="Rounded Rectangle 7"/>
           <p:cNvSpPr/>
           <p:nvPr/>
         </p:nvSpPr>
         <p:spPr>
           <a:xfrm>
             <a:off x="548640" y="1783080"/>
-            <a:ext cx="3611880" cy="3429000"/>
+            <a:ext cx="3749039" cy="2743200"/>
           </a:xfrm>
           <a:prstGeom prst="roundRect">
             <a:avLst>
@@ -22143,7 +23162,7 @@
       </p:sp>
       <p:sp>
         <p:nvSpPr>
-          <p:cNvPr id="7" name="Oval 6"/>
+          <p:cNvPr id="9" name="Oval 8"/>
           <p:cNvSpPr/>
           <p:nvPr/>
         </p:nvSpPr>
@@ -22189,21 +23208,21 @@
                 </a:solidFill>
                 <a:latin typeface="Cambria Math"/>
               </a:rPr>
-              <a:t>ψ</a:t>
-            </a:r>
-          </a:p>
-        </p:txBody>
-      </p:sp>
-      <p:sp>
-        <p:nvSpPr>
-          <p:cNvPr id="8" name="TextBox 7"/>
+              <a:t>W</a:t>
+            </a:r>
+          </a:p>
+        </p:txBody>
+      </p:sp>
+      <p:sp>
+        <p:nvSpPr>
+          <p:cNvPr id="10" name="TextBox 9"/>
           <p:cNvSpPr txBox="1"/>
           <p:nvPr/>
         </p:nvSpPr>
         <p:spPr>
           <a:xfrm>
             <a:off x="777240" y="2651760"/>
-            <a:ext cx="3154680" cy="411480"/>
+            <a:ext cx="3291839" cy="411480"/>
           </a:xfrm>
           <a:prstGeom prst="rect">
             <a:avLst/>
@@ -22224,21 +23243,21 @@
                 </a:solidFill>
                 <a:latin typeface="Arial"/>
               </a:rPr>
-              <a:t>What it is</a:t>
-            </a:r>
-          </a:p>
-        </p:txBody>
-      </p:sp>
-      <p:sp>
-        <p:nvSpPr>
-          <p:cNvPr id="9" name="TextBox 8"/>
+              <a:t>Why tungsten</a:t>
+            </a:r>
+          </a:p>
+        </p:txBody>
+      </p:sp>
+      <p:sp>
+        <p:nvSpPr>
+          <p:cNvPr id="11" name="TextBox 10"/>
           <p:cNvSpPr txBox="1"/>
           <p:nvPr/>
         </p:nvSpPr>
         <p:spPr>
           <a:xfrm>
             <a:off x="777240" y="3108960"/>
-            <a:ext cx="3154680" cy="2011679"/>
+            <a:ext cx="3291839" cy="1325879"/>
           </a:xfrm>
           <a:prstGeom prst="rect">
             <a:avLst/>
@@ -22259,7 +23278,7 @@
                 </a:solidFill>
                 <a:latin typeface="Arial"/>
               </a:rPr>
-              <a:t>Electrons obey the Schrödinger equation — unsolvable directly beyond a few electrons.</a:t>
+              <a:t>The armour facing the plasma in a fusion reactor (ITER's divertor).</a:t>
             </a:r>
           </a:p>
           <a:p>
@@ -22271,7 +23290,7 @@
                 </a:solidFill>
                 <a:latin typeface="Arial"/>
               </a:rPr>
-              <a:t>Density functional theory (Kohn, Nobel 1998) rewrites it in terms of the electron density — three coordinates instead of 3N — solved iteratively (the SCF loop).</a:t>
+              <a:t>Neutrons knock atoms off their sites — collision cascades — and helium collects into bubbles; dislocations and grain boundaries decide whether the wall cracks.</a:t>
             </a:r>
           </a:p>
           <a:p>
@@ -22283,21 +23302,423 @@
                 </a:solidFill>
                 <a:latin typeface="Arial"/>
               </a:rPr>
-              <a:t>One approximation: the exchange–correlation functional. We use PBE, the standard for solids.</a:t>
-            </a:r>
-          </a:p>
-        </p:txBody>
-      </p:sp>
-      <p:sp>
-        <p:nvSpPr>
-          <p:cNvPr id="10" name="Rounded Rectangle 9"/>
+              <a:t>That physics lives at 10⁵–10⁶ atoms over picoseconds to microseconds.</a:t>
+            </a:r>
+          </a:p>
+        </p:txBody>
+      </p:sp>
+      <p:graphicFrame>
+        <p:nvGraphicFramePr>
+          <p:cNvPr id="12" name="Table 11"/>
+          <p:cNvGraphicFramePr>
+            <a:graphicFrameLocks noGrp="1"/>
+          </p:cNvGraphicFramePr>
+          <p:nvPr/>
+        </p:nvGraphicFramePr>
+        <p:xfrm>
+          <a:off x="4480560" y="1783080"/>
+          <a:ext cx="7132320" cy="2743200"/>
+        </p:xfrm>
+        <a:graphic>
+          <a:graphicData uri="http://schemas.openxmlformats.org/drawingml/2006/table">
+            <a:tbl>
+              <a:tblPr firstRow="1" bandRow="1">
+                <a:tableStyleId>{5C22544A-7EE6-4342-B048-85BDC9FD1C3A}</a:tableStyleId>
+              </a:tblPr>
+              <a:tblGrid>
+                <a:gridCol w="3566160"/>
+                <a:gridCol w="1463040"/>
+                <a:gridCol w="2103120"/>
+              </a:tblGrid>
+              <a:tr h="548640">
+                <a:tc>
+                  <a:txBody>
+                    <a:bodyPr/>
+                    <a:lstStyle/>
+                    <a:p>
+                      <a:r>
+                        <a:rPr sz="1250" b="1">
+                          <a:solidFill>
+                            <a:srgbClr val="FFFFFF"/>
+                          </a:solidFill>
+                          <a:latin typeface="Arial"/>
+                        </a:rPr>
+                        <a:t>system</a:t>
+                      </a:r>
+                    </a:p>
+                  </a:txBody>
+                  <a:tcPr>
+                    <a:solidFill>
+                      <a:srgbClr val="500000"/>
+                    </a:solidFill>
+                  </a:tcPr>
+                </a:tc>
+                <a:tc>
+                  <a:txBody>
+                    <a:bodyPr/>
+                    <a:lstStyle/>
+                    <a:p>
+                      <a:r>
+                        <a:rPr sz="1250" b="1">
+                          <a:solidFill>
+                            <a:srgbClr val="FFFFFF"/>
+                          </a:solidFill>
+                          <a:latin typeface="Arial"/>
+                        </a:rPr>
+                        <a:t>DFT  (∝ N³)</a:t>
+                      </a:r>
+                    </a:p>
+                  </a:txBody>
+                  <a:tcPr>
+                    <a:solidFill>
+                      <a:srgbClr val="500000"/>
+                    </a:solidFill>
+                  </a:tcPr>
+                </a:tc>
+                <a:tc>
+                  <a:txBody>
+                    <a:bodyPr/>
+                    <a:lstStyle/>
+                    <a:p>
+                      <a:r>
+                        <a:rPr sz="1250" b="1">
+                          <a:solidFill>
+                            <a:srgbClr val="FFFFFF"/>
+                          </a:solidFill>
+                          <a:latin typeface="Arial"/>
+                        </a:rPr>
+                        <a:t>fine-tuned MACE  (∝ N)</a:t>
+                      </a:r>
+                    </a:p>
+                  </a:txBody>
+                  <a:tcPr>
+                    <a:solidFill>
+                      <a:srgbClr val="500000"/>
+                    </a:solidFill>
+                  </a:tcPr>
+                </a:tc>
+              </a:tr>
+              <a:tr h="548640">
+                <a:tc>
+                  <a:txBody>
+                    <a:bodyPr/>
+                    <a:lstStyle/>
+                    <a:p>
+                      <a:r>
+                        <a:rPr sz="1250" b="0">
+                          <a:solidFill>
+                            <a:srgbClr val="1E293B"/>
+                          </a:solidFill>
+                          <a:latin typeface="Arial"/>
+                        </a:rPr>
+                        <a:t>8 atoms — today's demo cell</a:t>
+                      </a:r>
+                    </a:p>
+                  </a:txBody>
+                  <a:tcPr>
+                    <a:solidFill>
+                      <a:srgbClr val="F5F1F1"/>
+                    </a:solidFill>
+                  </a:tcPr>
+                </a:tc>
+                <a:tc>
+                  <a:txBody>
+                    <a:bodyPr/>
+                    <a:lstStyle/>
+                    <a:p>
+                      <a:r>
+                        <a:rPr sz="1250" b="1">
+                          <a:solidFill>
+                            <a:srgbClr val="500000"/>
+                          </a:solidFill>
+                          <a:latin typeface="Arial"/>
+                        </a:rPr>
+                        <a:t>minutes</a:t>
+                      </a:r>
+                    </a:p>
+                  </a:txBody>
+                  <a:tcPr>
+                    <a:solidFill>
+                      <a:srgbClr val="F5F1F1"/>
+                    </a:solidFill>
+                  </a:tcPr>
+                </a:tc>
+                <a:tc>
+                  <a:txBody>
+                    <a:bodyPr/>
+                    <a:lstStyle/>
+                    <a:p>
+                      <a:r>
+                        <a:rPr sz="1250" b="1">
+                          <a:solidFill>
+                            <a:srgbClr val="1E293B"/>
+                          </a:solidFill>
+                          <a:latin typeface="Arial"/>
+                        </a:rPr>
+                        <a:t>40 ms</a:t>
+                      </a:r>
+                    </a:p>
+                  </a:txBody>
+                  <a:tcPr>
+                    <a:solidFill>
+                      <a:srgbClr val="F5F1F1"/>
+                    </a:solidFill>
+                  </a:tcPr>
+                </a:tc>
+              </a:tr>
+              <a:tr h="548640">
+                <a:tc>
+                  <a:txBody>
+                    <a:bodyPr/>
+                    <a:lstStyle/>
+                    <a:p>
+                      <a:r>
+                        <a:rPr sz="1250" b="0">
+                          <a:solidFill>
+                            <a:srgbClr val="1E293B"/>
+                          </a:solidFill>
+                          <a:latin typeface="Arial"/>
+                        </a:rPr>
+                        <a:t>128 atoms — one vacancy or interstitial</a:t>
+                      </a:r>
+                    </a:p>
+                  </a:txBody>
+                  <a:tcPr>
+                    <a:solidFill>
+                      <a:srgbClr val="FFFFFF"/>
+                    </a:solidFill>
+                  </a:tcPr>
+                </a:tc>
+                <a:tc>
+                  <a:txBody>
+                    <a:bodyPr/>
+                    <a:lstStyle/>
+                    <a:p>
+                      <a:r>
+                        <a:rPr sz="1250" b="1">
+                          <a:solidFill>
+                            <a:srgbClr val="500000"/>
+                          </a:solidFill>
+                          <a:latin typeface="Arial"/>
+                        </a:rPr>
+                        <a:t>hours</a:t>
+                      </a:r>
+                    </a:p>
+                  </a:txBody>
+                  <a:tcPr>
+                    <a:solidFill>
+                      <a:srgbClr val="FFFFFF"/>
+                    </a:solidFill>
+                  </a:tcPr>
+                </a:tc>
+                <a:tc>
+                  <a:txBody>
+                    <a:bodyPr/>
+                    <a:lstStyle/>
+                    <a:p>
+                      <a:r>
+                        <a:rPr sz="1250" b="1">
+                          <a:solidFill>
+                            <a:srgbClr val="1E293B"/>
+                          </a:solidFill>
+                          <a:latin typeface="Arial"/>
+                        </a:rPr>
+                        <a:t>~0.5 s</a:t>
+                      </a:r>
+                    </a:p>
+                  </a:txBody>
+                  <a:tcPr>
+                    <a:solidFill>
+                      <a:srgbClr val="FFFFFF"/>
+                    </a:solidFill>
+                  </a:tcPr>
+                </a:tc>
+              </a:tr>
+              <a:tr h="548640">
+                <a:tc>
+                  <a:txBody>
+                    <a:bodyPr/>
+                    <a:lstStyle/>
+                    <a:p>
+                      <a:r>
+                        <a:rPr sz="1250" b="0">
+                          <a:solidFill>
+                            <a:srgbClr val="1E293B"/>
+                          </a:solidFill>
+                          <a:latin typeface="Arial"/>
+                        </a:rPr>
+                        <a:t>10⁴ atoms — a dislocation line</a:t>
+                      </a:r>
+                    </a:p>
+                  </a:txBody>
+                  <a:tcPr>
+                    <a:solidFill>
+                      <a:srgbClr val="F5F1F1"/>
+                    </a:solidFill>
+                  </a:tcPr>
+                </a:tc>
+                <a:tc>
+                  <a:txBody>
+                    <a:bodyPr/>
+                    <a:lstStyle/>
+                    <a:p>
+                      <a:r>
+                        <a:rPr sz="1250" b="1">
+                          <a:solidFill>
+                            <a:srgbClr val="500000"/>
+                          </a:solidFill>
+                          <a:latin typeface="Arial"/>
+                        </a:rPr>
+                        <a:t>years</a:t>
+                      </a:r>
+                    </a:p>
+                  </a:txBody>
+                  <a:tcPr>
+                    <a:solidFill>
+                      <a:srgbClr val="F5F1F1"/>
+                    </a:solidFill>
+                  </a:tcPr>
+                </a:tc>
+                <a:tc>
+                  <a:txBody>
+                    <a:bodyPr/>
+                    <a:lstStyle/>
+                    <a:p>
+                      <a:r>
+                        <a:rPr sz="1250" b="1">
+                          <a:solidFill>
+                            <a:srgbClr val="1E293B"/>
+                          </a:solidFill>
+                          <a:latin typeface="Arial"/>
+                        </a:rPr>
+                        <a:t>seconds per step</a:t>
+                      </a:r>
+                    </a:p>
+                  </a:txBody>
+                  <a:tcPr>
+                    <a:solidFill>
+                      <a:srgbClr val="F5F1F1"/>
+                    </a:solidFill>
+                  </a:tcPr>
+                </a:tc>
+              </a:tr>
+              <a:tr h="548640">
+                <a:tc>
+                  <a:txBody>
+                    <a:bodyPr/>
+                    <a:lstStyle/>
+                    <a:p>
+                      <a:r>
+                        <a:rPr sz="1250" b="0">
+                          <a:solidFill>
+                            <a:srgbClr val="1E293B"/>
+                          </a:solidFill>
+                          <a:latin typeface="Arial"/>
+                        </a:rPr>
+                        <a:t>10⁶ atoms, 10 ps — a collision cascade</a:t>
+                      </a:r>
+                    </a:p>
+                  </a:txBody>
+                  <a:tcPr>
+                    <a:solidFill>
+                      <a:srgbClr val="FFFFFF"/>
+                    </a:solidFill>
+                  </a:tcPr>
+                </a:tc>
+                <a:tc>
+                  <a:txBody>
+                    <a:bodyPr/>
+                    <a:lstStyle/>
+                    <a:p>
+                      <a:r>
+                        <a:rPr sz="1250" b="1">
+                          <a:solidFill>
+                            <a:srgbClr val="500000"/>
+                          </a:solidFill>
+                          <a:latin typeface="Arial"/>
+                        </a:rPr>
+                        <a:t>never</a:t>
+                      </a:r>
+                    </a:p>
+                  </a:txBody>
+                  <a:tcPr>
+                    <a:solidFill>
+                      <a:srgbClr val="FFFFFF"/>
+                    </a:solidFill>
+                  </a:tcPr>
+                </a:tc>
+                <a:tc>
+                  <a:txBody>
+                    <a:bodyPr/>
+                    <a:lstStyle/>
+                    <a:p>
+                      <a:r>
+                        <a:rPr sz="1250" b="1">
+                          <a:solidFill>
+                            <a:srgbClr val="1E293B"/>
+                          </a:solidFill>
+                          <a:latin typeface="Arial"/>
+                        </a:rPr>
+                        <a:t>hours on one GPU</a:t>
+                      </a:r>
+                    </a:p>
+                  </a:txBody>
+                  <a:tcPr>
+                    <a:solidFill>
+                      <a:srgbClr val="FFFFFF"/>
+                    </a:solidFill>
+                  </a:tcPr>
+                </a:tc>
+              </a:tr>
+            </a:tbl>
+          </a:graphicData>
+        </a:graphic>
+      </p:graphicFrame>
+      <p:sp>
+        <p:nvSpPr>
+          <p:cNvPr id="13" name="TextBox 12"/>
+          <p:cNvSpPr txBox="1"/>
+          <p:nvPr/>
+        </p:nvSpPr>
+        <p:spPr>
+          <a:xfrm>
+            <a:off x="548640" y="4754880"/>
+            <a:ext cx="11064240" cy="274320"/>
+          </a:xfrm>
+          <a:prstGeom prst="rect">
+            <a:avLst/>
+          </a:prstGeom>
+          <a:noFill/>
+        </p:spPr>
+        <p:txBody>
+          <a:bodyPr wrap="square" anchor="t" lIns="45720" rIns="45720" tIns="18288" bIns="18288">
+            <a:spAutoFit/>
+          </a:bodyPr>
+          <a:lstStyle/>
+          <a:p>
+            <a:pPr algn="l"/>
+            <a:r>
+              <a:rPr sz="1100" b="1" i="0">
+                <a:solidFill>
+                  <a:srgbClr val="B87878"/>
+                </a:solidFill>
+                <a:latin typeface="Arial"/>
+              </a:rPr>
+              <a:t>THE SAME FOUR BLOCKS, NEW MATERIAL</a:t>
+            </a:r>
+          </a:p>
+        </p:txBody>
+      </p:sp>
+      <p:sp>
+        <p:nvSpPr>
+          <p:cNvPr id="14" name="Rounded Rectangle 13"/>
           <p:cNvSpPr/>
           <p:nvPr/>
         </p:nvSpPr>
         <p:spPr>
           <a:xfrm>
-            <a:off x="4279392" y="1783080"/>
-            <a:ext cx="3611880" cy="3429000"/>
+            <a:off x="548640" y="5029200"/>
+            <a:ext cx="2651760" cy="1188720"/>
           </a:xfrm>
           <a:prstGeom prst="roundRect">
             <a:avLst>
@@ -22336,17 +23757,277 @@
       </p:sp>
       <p:sp>
         <p:nvSpPr>
-          <p:cNvPr id="11" name="Oval 10"/>
+          <p:cNvPr id="15" name="TextBox 14"/>
+          <p:cNvSpPr txBox="1"/>
+          <p:nvPr/>
+        </p:nvSpPr>
+        <p:spPr>
+          <a:xfrm>
+            <a:off x="685800" y="5084064"/>
+            <a:ext cx="2377440" cy="274320"/>
+          </a:xfrm>
+          <a:prstGeom prst="rect">
+            <a:avLst/>
+          </a:prstGeom>
+          <a:noFill/>
+        </p:spPr>
+        <p:txBody>
+          <a:bodyPr wrap="square" anchor="t" lIns="45720" rIns="45720" tIns="18288" bIns="18288">
+            <a:spAutoFit/>
+          </a:bodyPr>
+          <a:lstStyle/>
+          <a:p>
+            <a:pPr algn="l"/>
+            <a:r>
+              <a:rPr sz="1250" b="1" i="0">
+                <a:solidFill>
+                  <a:srgbClr val="1E293B"/>
+                </a:solidFill>
+                <a:latin typeface="Arial"/>
+              </a:rPr>
+              <a:t>learn</a:t>
+            </a:r>
+          </a:p>
+        </p:txBody>
+      </p:sp>
+      <p:sp>
+        <p:nvSpPr>
+          <p:cNvPr id="16" name="TextBox 15"/>
+          <p:cNvSpPr txBox="1"/>
+          <p:nvPr/>
+        </p:nvSpPr>
+        <p:spPr>
+          <a:xfrm>
+            <a:off x="685800" y="5358384"/>
+            <a:ext cx="2377440" cy="868680"/>
+          </a:xfrm>
+          <a:prstGeom prst="rect">
+            <a:avLst/>
+          </a:prstGeom>
+          <a:noFill/>
+        </p:spPr>
+        <p:txBody>
+          <a:bodyPr wrap="square" anchor="t" lIns="45720" rIns="45720" tIns="18288" bIns="18288">
+            <a:spAutoFit/>
+          </a:bodyPr>
+          <a:lstStyle/>
+          <a:p>
+            <a:pPr algn="l"/>
+            <a:r>
+              <a:rPr sz="1050" b="0" i="0">
+                <a:solidFill>
+                  <a:srgbClr val="64748B"/>
+                </a:solidFill>
+                <a:latin typeface="Arial"/>
+              </a:rPr>
+              <a:t>A few hundred DFT cells: bulk, vacancies, interstitials, surfaces, cascade snapshots. Same scripts.</a:t>
+            </a:r>
+          </a:p>
+        </p:txBody>
+      </p:sp>
+      <p:cxnSp>
+        <p:nvCxnSpPr>
+          <p:cNvPr id="17" name="Connector 16"/>
+          <p:cNvCxnSpPr/>
+          <p:nvPr/>
+        </p:nvCxnSpPr>
+        <p:spPr>
+          <a:xfrm>
+            <a:off x="3200400" y="5623560"/>
+            <a:ext cx="155448" cy="0"/>
+          </a:xfrm>
+          <a:prstGeom prst="line">
+            <a:avLst/>
+          </a:prstGeom>
+          <a:ln w="19050">
+            <a:solidFill>
+              <a:srgbClr val="94A3B8"/>
+            </a:solidFill>
+            <a:tailEnd type="triangle" w="med" len="med"/>
+          </a:ln>
+        </p:spPr>
+        <p:style>
+          <a:lnRef idx="2">
+            <a:schemeClr val="accent1"/>
+          </a:lnRef>
+          <a:fillRef idx="0">
+            <a:schemeClr val="accent1"/>
+          </a:fillRef>
+          <a:effectRef idx="1">
+            <a:schemeClr val="accent1"/>
+          </a:effectRef>
+          <a:fontRef idx="minor">
+            <a:schemeClr val="tx1"/>
+          </a:fontRef>
+        </p:style>
+      </p:cxnSp>
+      <p:sp>
+        <p:nvSpPr>
+          <p:cNvPr id="18" name="Rounded Rectangle 17"/>
           <p:cNvSpPr/>
           <p:nvPr/>
         </p:nvSpPr>
         <p:spPr>
           <a:xfrm>
-            <a:off x="4507992" y="1984248"/>
-            <a:ext cx="502920" cy="502920"/>
-          </a:xfrm>
-          <a:prstGeom prst="ellipse">
-            <a:avLst/>
+            <a:off x="3355848" y="5029200"/>
+            <a:ext cx="2651760" cy="1188720"/>
+          </a:xfrm>
+          <a:prstGeom prst="roundRect">
+            <a:avLst>
+              <a:gd name="adj" fmla="val 8000"/>
+            </a:avLst>
+          </a:prstGeom>
+          <a:solidFill>
+            <a:srgbClr val="F5F1F1"/>
+          </a:solidFill>
+          <a:ln>
+            <a:noFill/>
+          </a:ln>
+          <a:effectLst/>
+        </p:spPr>
+        <p:style>
+          <a:lnRef idx="1">
+            <a:schemeClr val="accent1"/>
+          </a:lnRef>
+          <a:fillRef idx="3">
+            <a:schemeClr val="accent1"/>
+          </a:fillRef>
+          <a:effectRef idx="2">
+            <a:schemeClr val="accent1"/>
+          </a:effectRef>
+          <a:fontRef idx="minor">
+            <a:schemeClr val="lt1"/>
+          </a:fontRef>
+        </p:style>
+        <p:txBody>
+          <a:bodyPr rtlCol="0" anchor="ctr"/>
+          <a:lstStyle/>
+          <a:p>
+            <a:pPr algn="ctr"/>
+          </a:p>
+        </p:txBody>
+      </p:sp>
+      <p:sp>
+        <p:nvSpPr>
+          <p:cNvPr id="19" name="TextBox 18"/>
+          <p:cNvSpPr txBox="1"/>
+          <p:nvPr/>
+        </p:nvSpPr>
+        <p:spPr>
+          <a:xfrm>
+            <a:off x="3493008" y="5084064"/>
+            <a:ext cx="2377440" cy="274320"/>
+          </a:xfrm>
+          <a:prstGeom prst="rect">
+            <a:avLst/>
+          </a:prstGeom>
+          <a:noFill/>
+        </p:spPr>
+        <p:txBody>
+          <a:bodyPr wrap="square" anchor="t" lIns="45720" rIns="45720" tIns="18288" bIns="18288">
+            <a:spAutoFit/>
+          </a:bodyPr>
+          <a:lstStyle/>
+          <a:p>
+            <a:pPr algn="l"/>
+            <a:r>
+              <a:rPr sz="1250" b="1" i="0">
+                <a:solidFill>
+                  <a:srgbClr val="1E293B"/>
+                </a:solidFill>
+                <a:latin typeface="Arial"/>
+              </a:rPr>
+              <a:t>test</a:t>
+            </a:r>
+          </a:p>
+        </p:txBody>
+      </p:sp>
+      <p:sp>
+        <p:nvSpPr>
+          <p:cNvPr id="20" name="TextBox 19"/>
+          <p:cNvSpPr txBox="1"/>
+          <p:nvPr/>
+        </p:nvSpPr>
+        <p:spPr>
+          <a:xfrm>
+            <a:off x="3493008" y="5358384"/>
+            <a:ext cx="2377440" cy="868680"/>
+          </a:xfrm>
+          <a:prstGeom prst="rect">
+            <a:avLst/>
+          </a:prstGeom>
+          <a:noFill/>
+        </p:spPr>
+        <p:txBody>
+          <a:bodyPr wrap="square" anchor="t" lIns="45720" rIns="45720" tIns="18288" bIns="18288">
+            <a:spAutoFit/>
+          </a:bodyPr>
+          <a:lstStyle/>
+          <a:p>
+            <a:pPr algn="l"/>
+            <a:r>
+              <a:rPr sz="1050" b="0" i="0">
+                <a:solidFill>
+                  <a:srgbClr val="64748B"/>
+                </a:solidFill>
+                <a:latin typeface="Arial"/>
+              </a:rPr>
+              <a:t>Held-out defect energies and forces. Same parity plot.</a:t>
+            </a:r>
+          </a:p>
+        </p:txBody>
+      </p:sp>
+      <p:cxnSp>
+        <p:nvCxnSpPr>
+          <p:cNvPr id="21" name="Connector 20"/>
+          <p:cNvCxnSpPr/>
+          <p:nvPr/>
+        </p:nvCxnSpPr>
+        <p:spPr>
+          <a:xfrm>
+            <a:off x="6007608" y="5623560"/>
+            <a:ext cx="155448" cy="0"/>
+          </a:xfrm>
+          <a:prstGeom prst="line">
+            <a:avLst/>
+          </a:prstGeom>
+          <a:ln w="19050">
+            <a:solidFill>
+              <a:srgbClr val="94A3B8"/>
+            </a:solidFill>
+            <a:tailEnd type="triangle" w="med" len="med"/>
+          </a:ln>
+        </p:spPr>
+        <p:style>
+          <a:lnRef idx="2">
+            <a:schemeClr val="accent1"/>
+          </a:lnRef>
+          <a:fillRef idx="0">
+            <a:schemeClr val="accent1"/>
+          </a:fillRef>
+          <a:effectRef idx="1">
+            <a:schemeClr val="accent1"/>
+          </a:effectRef>
+          <a:fontRef idx="minor">
+            <a:schemeClr val="tx1"/>
+          </a:fontRef>
+        </p:style>
+      </p:cxnSp>
+      <p:sp>
+        <p:nvSpPr>
+          <p:cNvPr id="22" name="Rounded Rectangle 21"/>
+          <p:cNvSpPr/>
+          <p:nvPr/>
+        </p:nvSpPr>
+        <p:spPr>
+          <a:xfrm>
+            <a:off x="6163056" y="5029200"/>
+            <a:ext cx="2651760" cy="1188720"/>
+          </a:xfrm>
+          <a:prstGeom prst="roundRect">
+            <a:avLst>
+              <a:gd name="adj" fmla="val 8000"/>
+            </a:avLst>
           </a:prstGeom>
           <a:solidFill>
             <a:srgbClr val="500000"/>
@@ -22371,32 +24052,23 @@
           </a:fontRef>
         </p:style>
         <p:txBody>
-          <a:bodyPr rtlCol="0" anchor="ctr" lIns="0" rIns="0" tIns="0" bIns="0"/>
+          <a:bodyPr rtlCol="0" anchor="ctr"/>
           <a:lstStyle/>
           <a:p>
             <a:pPr algn="ctr"/>
-            <a:r>
-              <a:rPr sz="1300" b="1">
-                <a:solidFill>
-                  <a:srgbClr val="FFFFFF"/>
-                </a:solidFill>
-                <a:latin typeface="Cambria Math"/>
-              </a:rPr>
-              <a:t>✓</a:t>
-            </a:r>
-          </a:p>
-        </p:txBody>
-      </p:sp>
-      <p:sp>
-        <p:nvSpPr>
-          <p:cNvPr id="12" name="TextBox 11"/>
+          </a:p>
+        </p:txBody>
+      </p:sp>
+      <p:sp>
+        <p:nvSpPr>
+          <p:cNvPr id="23" name="TextBox 22"/>
           <p:cNvSpPr txBox="1"/>
           <p:nvPr/>
         </p:nvSpPr>
         <p:spPr>
           <a:xfrm>
-            <a:off x="4507992" y="2651760"/>
-            <a:ext cx="3154680" cy="411480"/>
+            <a:off x="6300216" y="5084064"/>
+            <a:ext cx="2377440" cy="274320"/>
           </a:xfrm>
           <a:prstGeom prst="rect">
             <a:avLst/>
@@ -22411,27 +24083,27 @@
           <a:p>
             <a:pPr algn="l"/>
             <a:r>
-              <a:rPr sz="1600" b="1" i="0">
-                <a:solidFill>
-                  <a:srgbClr val="1E293B"/>
-                </a:solidFill>
-                <a:latin typeface="Arial"/>
-              </a:rPr>
-              <a:t>Why it is trusted</a:t>
-            </a:r>
-          </a:p>
-        </p:txBody>
-      </p:sp>
-      <p:sp>
-        <p:nvSpPr>
-          <p:cNvPr id="13" name="TextBox 12"/>
+              <a:rPr sz="1250" b="1" i="0">
+                <a:solidFill>
+                  <a:srgbClr val="FFFFFF"/>
+                </a:solidFill>
+                <a:latin typeface="Arial"/>
+              </a:rPr>
+              <a:t>search</a:t>
+            </a:r>
+          </a:p>
+        </p:txBody>
+      </p:sp>
+      <p:sp>
+        <p:nvSpPr>
+          <p:cNvPr id="24" name="TextBox 23"/>
           <p:cNvSpPr txBox="1"/>
           <p:nvPr/>
         </p:nvSpPr>
         <p:spPr>
           <a:xfrm>
-            <a:off x="4507992" y="3108960"/>
-            <a:ext cx="3154680" cy="2011679"/>
+            <a:off x="6300216" y="5358384"/>
+            <a:ext cx="2377440" cy="868680"/>
           </a:xfrm>
           <a:prstGeom prst="rect">
             <a:avLst/>
@@ -22446,51 +24118,63 @@
           <a:p>
             <a:pPr algn="l"/>
             <a:r>
-              <a:rPr sz="1150" b="0" i="0">
-                <a:solidFill>
-                  <a:srgbClr val="64748B"/>
-                </a:solidFill>
-                <a:latin typeface="Arial"/>
-              </a:rPr>
-              <a:t>First principles: inputs are atomic numbers and positions; nothing fitted to experiment for the system at hand.</a:t>
-            </a:r>
-          </a:p>
-          <a:p>
-            <a:pPr algn="l"/>
-            <a:r>
-              <a:rPr sz="1150" b="0" i="0">
-                <a:solidFill>
-                  <a:srgbClr val="64748B"/>
-                </a:solidFill>
-                <a:latin typeface="Arial"/>
-              </a:rPr>
-              <a:t>Lattice constants within 1–2 %, formation energies to tens of meV/atom, forces for free (Hellmann–Feynman).</a:t>
-            </a:r>
-          </a:p>
-          <a:p>
-            <a:pPr algn="l"/>
-            <a:r>
-              <a:rPr sz="1150" b="0" i="0">
-                <a:solidFill>
-                  <a:srgbClr val="64748B"/>
-                </a:solidFill>
-                <a:latin typeface="Arial"/>
-              </a:rPr>
-              <a:t>Ours: Cu 3.65 Å, Au 4.18 Å (experiment 3.61 / 4.08).</a:t>
-            </a:r>
-          </a:p>
-        </p:txBody>
-      </p:sp>
-      <p:sp>
-        <p:nvSpPr>
-          <p:cNvPr id="14" name="Rounded Rectangle 13"/>
+              <a:rPr sz="1050" b="0" i="0">
+                <a:solidFill>
+                  <a:srgbClr val="E3C4C4"/>
+                </a:solidFill>
+                <a:latin typeface="Arial"/>
+              </a:rPr>
+              <a:t>Evolve defect and grain-boundary configurations; run the million-atom cascade with MACE.</a:t>
+            </a:r>
+          </a:p>
+        </p:txBody>
+      </p:sp>
+      <p:cxnSp>
+        <p:nvCxnSpPr>
+          <p:cNvPr id="25" name="Connector 24"/>
+          <p:cNvCxnSpPr/>
+          <p:nvPr/>
+        </p:nvCxnSpPr>
+        <p:spPr>
+          <a:xfrm>
+            <a:off x="8814816" y="5623560"/>
+            <a:ext cx="155448" cy="0"/>
+          </a:xfrm>
+          <a:prstGeom prst="line">
+            <a:avLst/>
+          </a:prstGeom>
+          <a:ln w="19050">
+            <a:solidFill>
+              <a:srgbClr val="94A3B8"/>
+            </a:solidFill>
+            <a:tailEnd type="triangle" w="med" len="med"/>
+          </a:ln>
+        </p:spPr>
+        <p:style>
+          <a:lnRef idx="2">
+            <a:schemeClr val="accent1"/>
+          </a:lnRef>
+          <a:fillRef idx="0">
+            <a:schemeClr val="accent1"/>
+          </a:fillRef>
+          <a:effectRef idx="1">
+            <a:schemeClr val="accent1"/>
+          </a:effectRef>
+          <a:fontRef idx="minor">
+            <a:schemeClr val="tx1"/>
+          </a:fontRef>
+        </p:style>
+      </p:cxnSp>
+      <p:sp>
+        <p:nvSpPr>
+          <p:cNvPr id="26" name="Rounded Rectangle 25"/>
           <p:cNvSpPr/>
           <p:nvPr/>
         </p:nvSpPr>
         <p:spPr>
           <a:xfrm>
-            <a:off x="8010144" y="1783080"/>
-            <a:ext cx="3611880" cy="3429000"/>
+            <a:off x="8970264" y="5029200"/>
+            <a:ext cx="2651760" cy="1188720"/>
           </a:xfrm>
           <a:prstGeom prst="roundRect">
             <a:avLst>
@@ -22498,7 +24182,7 @@
             </a:avLst>
           </a:prstGeom>
           <a:solidFill>
-            <a:srgbClr val="500000"/>
+            <a:srgbClr val="F5F1F1"/>
           </a:solidFill>
           <a:ln>
             <a:noFill/>
@@ -22529,67 +24213,14 @@
       </p:sp>
       <p:sp>
         <p:nvSpPr>
-          <p:cNvPr id="15" name="Oval 14"/>
-          <p:cNvSpPr/>
-          <p:nvPr/>
-        </p:nvSpPr>
-        <p:spPr>
-          <a:xfrm>
-            <a:off x="8238744" y="1984248"/>
-            <a:ext cx="502920" cy="502920"/>
-          </a:xfrm>
-          <a:prstGeom prst="ellipse">
-            <a:avLst/>
-          </a:prstGeom>
-          <a:solidFill>
-            <a:srgbClr val="FFFFFF"/>
-          </a:solidFill>
-          <a:ln>
-            <a:noFill/>
-          </a:ln>
-          <a:effectLst/>
-        </p:spPr>
-        <p:style>
-          <a:lnRef idx="1">
-            <a:schemeClr val="accent1"/>
-          </a:lnRef>
-          <a:fillRef idx="3">
-            <a:schemeClr val="accent1"/>
-          </a:fillRef>
-          <a:effectRef idx="2">
-            <a:schemeClr val="accent1"/>
-          </a:effectRef>
-          <a:fontRef idx="minor">
-            <a:schemeClr val="lt1"/>
-          </a:fontRef>
-        </p:style>
-        <p:txBody>
-          <a:bodyPr rtlCol="0" anchor="ctr" lIns="0" rIns="0" tIns="0" bIns="0"/>
-          <a:lstStyle/>
-          <a:p>
-            <a:pPr algn="ctr"/>
-            <a:r>
-              <a:rPr sz="1300" b="1">
-                <a:solidFill>
-                  <a:srgbClr val="500000"/>
-                </a:solidFill>
-                <a:latin typeface="Cambria Math"/>
-              </a:rPr>
-              <a:t>N³</a:t>
-            </a:r>
-          </a:p>
-        </p:txBody>
-      </p:sp>
-      <p:sp>
-        <p:nvSpPr>
-          <p:cNvPr id="16" name="TextBox 15"/>
+          <p:cNvPr id="27" name="TextBox 26"/>
           <p:cNvSpPr txBox="1"/>
           <p:nvPr/>
         </p:nvSpPr>
         <p:spPr>
           <a:xfrm>
-            <a:off x="8238744" y="2651760"/>
-            <a:ext cx="3154680" cy="411480"/>
+            <a:off x="9107424" y="5084064"/>
+            <a:ext cx="2377440" cy="274320"/>
           </a:xfrm>
           <a:prstGeom prst="rect">
             <a:avLst/>
@@ -22604,27 +24235,27 @@
           <a:p>
             <a:pPr algn="l"/>
             <a:r>
-              <a:rPr sz="1600" b="1" i="0">
-                <a:solidFill>
-                  <a:srgbClr val="FFFFFF"/>
-                </a:solidFill>
-                <a:latin typeface="Arial"/>
-              </a:rPr>
-              <a:t>Why not inside the loop</a:t>
-            </a:r>
-          </a:p>
-        </p:txBody>
-      </p:sp>
-      <p:sp>
-        <p:nvSpPr>
-          <p:cNvPr id="17" name="TextBox 16"/>
+              <a:rPr sz="1250" b="1" i="0">
+                <a:solidFill>
+                  <a:srgbClr val="1E293B"/>
+                </a:solidFill>
+                <a:latin typeface="Arial"/>
+              </a:rPr>
+              <a:t>verify</a:t>
+            </a:r>
+          </a:p>
+        </p:txBody>
+      </p:sp>
+      <p:sp>
+        <p:nvSpPr>
+          <p:cNvPr id="28" name="TextBox 27"/>
           <p:cNvSpPr txBox="1"/>
           <p:nvPr/>
         </p:nvSpPr>
         <p:spPr>
           <a:xfrm>
-            <a:off x="8238744" y="3108960"/>
-            <a:ext cx="3154680" cy="2011679"/>
+            <a:off x="9107424" y="5358384"/>
+            <a:ext cx="2377440" cy="868680"/>
           </a:xfrm>
           <a:prstGeom prst="rect">
             <a:avLst/>
@@ -22639,99 +24270,27 @@
           <a:p>
             <a:pPr algn="l"/>
             <a:r>
-              <a:rPr sz="1150" b="0" i="0">
-                <a:solidFill>
-                  <a:srgbClr val="E3C4C4"/>
-                </a:solidFill>
-                <a:latin typeface="Arial"/>
-              </a:rPr>
-              <a:t>Cost grows as N³ in the electrons: minutes for 8 atoms, hours for 100, impossible for a million-step simulation.</a:t>
-            </a:r>
-          </a:p>
-          <a:p>
-            <a:pPr algn="l"/>
-            <a:r>
-              <a:rPr sz="1150" b="0" i="0">
-                <a:solidFill>
-                  <a:srgbClr val="E3C4C4"/>
-                </a:solidFill>
-                <a:latin typeface="Arial"/>
-              </a:rPr>
-              <a:t>Known systematic errors — PBE underbinds Cu–Au by ~30 %. The learned model inherits them.</a:t>
-            </a:r>
-          </a:p>
-          <a:p>
-            <a:pPr algn="l"/>
-            <a:r>
-              <a:rPr sz="1150" b="0" i="0">
-                <a:solidFill>
-                  <a:srgbClr val="E3C4C4"/>
-                </a:solidFill>
-                <a:latin typeface="Arial"/>
-              </a:rPr>
-              <a:t>Zero kelvin: temperature needs many more evaluations.</a:t>
-            </a:r>
-          </a:p>
-        </p:txBody>
-      </p:sp>
-      <p:sp>
-        <p:nvSpPr>
-          <p:cNvPr id="18" name="Rounded Rectangle 17"/>
-          <p:cNvSpPr/>
-          <p:nvPr/>
-        </p:nvSpPr>
-        <p:spPr>
-          <a:xfrm>
-            <a:off x="548640" y="5394960"/>
-            <a:ext cx="11064240" cy="914400"/>
-          </a:xfrm>
-          <a:prstGeom prst="roundRect">
-            <a:avLst>
-              <a:gd name="adj" fmla="val 8000"/>
-            </a:avLst>
-          </a:prstGeom>
-          <a:solidFill>
-            <a:srgbClr val="FFFFFF"/>
-          </a:solidFill>
-          <a:ln w="12700">
-            <a:solidFill>
-              <a:srgbClr val="E5E7EB"/>
-            </a:solidFill>
-          </a:ln>
-          <a:effectLst/>
-        </p:spPr>
-        <p:style>
-          <a:lnRef idx="1">
-            <a:schemeClr val="accent1"/>
-          </a:lnRef>
-          <a:fillRef idx="3">
-            <a:schemeClr val="accent1"/>
-          </a:fillRef>
-          <a:effectRef idx="2">
-            <a:schemeClr val="accent1"/>
-          </a:effectRef>
-          <a:fontRef idx="minor">
-            <a:schemeClr val="lt1"/>
-          </a:fontRef>
-        </p:style>
-        <p:txBody>
-          <a:bodyPr rtlCol="0" anchor="ctr"/>
-          <a:lstStyle/>
-          <a:p>
-            <a:pPr algn="ctr"/>
-          </a:p>
-        </p:txBody>
-      </p:sp>
-      <p:sp>
-        <p:nvSpPr>
-          <p:cNvPr id="19" name="TextBox 18"/>
+              <a:rPr sz="1050" b="0" i="0">
+                <a:solidFill>
+                  <a:srgbClr val="64748B"/>
+                </a:solidFill>
+                <a:latin typeface="Arial"/>
+              </a:rPr>
+              <a:t>DFT on the handful of structures the model is unsure about — then retrain.</a:t>
+            </a:r>
+          </a:p>
+        </p:txBody>
+      </p:sp>
+      <p:sp>
+        <p:nvSpPr>
+          <p:cNvPr id="29" name="TextBox 28"/>
           <p:cNvSpPr txBox="1"/>
           <p:nvPr/>
         </p:nvSpPr>
         <p:spPr>
           <a:xfrm>
-            <a:off x="777240" y="5458968"/>
-            <a:ext cx="10607040" cy="274320"/>
+            <a:off x="548640" y="6428232"/>
+            <a:ext cx="9601200" cy="228600"/>
           </a:xfrm>
           <a:prstGeom prst="rect">
             <a:avLst/>
@@ -22746,83 +24305,13 @@
           <a:p>
             <a:pPr algn="l"/>
             <a:r>
-              <a:rPr sz="1250" b="1" i="0">
-                <a:solidFill>
-                  <a:srgbClr val="500000"/>
-                </a:solidFill>
-                <a:latin typeface="Arial"/>
-              </a:rPr>
-              <a:t>Our calculations</a:t>
-            </a:r>
-          </a:p>
-        </p:txBody>
-      </p:sp>
-      <p:sp>
-        <p:nvSpPr>
-          <p:cNvPr id="20" name="TextBox 19"/>
-          <p:cNvSpPr txBox="1"/>
-          <p:nvPr/>
-        </p:nvSpPr>
-        <p:spPr>
-          <a:xfrm>
-            <a:off x="777240" y="5733288"/>
-            <a:ext cx="10607040" cy="548640"/>
-          </a:xfrm>
-          <a:prstGeom prst="rect">
-            <a:avLst/>
-          </a:prstGeom>
-          <a:noFill/>
-        </p:spPr>
-        <p:txBody>
-          <a:bodyPr wrap="square" anchor="t" lIns="45720" rIns="45720" tIns="18288" bIns="18288">
-            <a:spAutoFit/>
-          </a:bodyPr>
-          <a:lstStyle/>
-          <a:p>
-            <a:pPr algn="l"/>
-            <a:r>
-              <a:rPr sz="1100" b="0" i="0">
-                <a:solidFill>
-                  <a:srgbClr val="64748B"/>
-                </a:solidFill>
-                <a:latin typeface="Arial"/>
-              </a:rPr>
-              <a:t>VASP 6.3.2 · PBE · PAW (Cu, Au: 11 valence e⁻) · ENCUT 400 eV · Γ-centred 8×8×8 / 4×8×8 k-points · Methfessel–Paxton 0.1 eV · 186 single points (energy + forces at fixed geometry), minutes each on 12 cores, SLURM array on TAMU HPRC Grace.</a:t>
-            </a:r>
-          </a:p>
-        </p:txBody>
-      </p:sp>
-      <p:sp>
-        <p:nvSpPr>
-          <p:cNvPr id="21" name="TextBox 20"/>
-          <p:cNvSpPr txBox="1"/>
-          <p:nvPr/>
-        </p:nvSpPr>
-        <p:spPr>
-          <a:xfrm>
-            <a:off x="548640" y="6428232"/>
-            <a:ext cx="9601200" cy="228600"/>
-          </a:xfrm>
-          <a:prstGeom prst="rect">
-            <a:avLst/>
-          </a:prstGeom>
-          <a:noFill/>
-        </p:spPr>
-        <p:txBody>
-          <a:bodyPr wrap="square" anchor="t" lIns="45720" rIns="45720" tIns="18288" bIns="18288">
-            <a:spAutoFit/>
-          </a:bodyPr>
-          <a:lstStyle/>
-          <a:p>
-            <a:pPr algn="l"/>
-            <a:r>
               <a:rPr sz="900" b="0" i="0">
                 <a:solidFill>
                   <a:srgbClr val="94A3B8"/>
                 </a:solidFill>
                 <a:latin typeface="Arial"/>
               </a:rPr>
-              <a:t>Hohenberg &amp; Kohn 1964; Kohn &amp; Sham 1965; Perdew, Burke &amp; Ernzerhof 1996</a:t>
+              <a:t>Orders of magnitude, illustrative; constants depend on code and hardware. Tungsten ML potentials are an active field (GAP 2014, tabGAP 2019); MACE-MP-0 covers W.</a:t>
             </a:r>
           </a:p>
         </p:txBody>
